--- a/Group0_1LibraryDW/02_final_presentation.pptx
+++ b/Group0_1LibraryDW/02_final_presentation.pptx
@@ -9629,7 +9629,7 @@
         </p:nvSpPr>
         <p:spPr>
           <a:xfrm>
-            <a:off x="343263" y="2887254"/>
+            <a:off x="314235" y="2891857"/>
             <a:ext cx="274320" cy="274320"/>
           </a:xfrm>
           <a:prstGeom prst="ellipse">
@@ -10049,7 +10049,7 @@
         </p:nvSpPr>
         <p:spPr>
           <a:xfrm>
-            <a:off x="320040" y="4239352"/>
+            <a:off x="311201" y="4239352"/>
             <a:ext cx="274320" cy="274320"/>
           </a:xfrm>
           <a:prstGeom prst="ellipse">
@@ -10154,7 +10154,7 @@
         </p:nvSpPr>
         <p:spPr>
           <a:xfrm>
-            <a:off x="358503" y="4556760"/>
+            <a:off x="314235" y="4556760"/>
             <a:ext cx="274320" cy="274320"/>
           </a:xfrm>
           <a:prstGeom prst="ellipse">
@@ -10259,7 +10259,7 @@
         </p:nvSpPr>
         <p:spPr>
           <a:xfrm>
-            <a:off x="373017" y="4878614"/>
+            <a:off x="311201" y="4847960"/>
             <a:ext cx="274320" cy="274320"/>
           </a:xfrm>
           <a:prstGeom prst="ellipse">

--- a/Group0_1LibraryDW/02_final_presentation.pptx
+++ b/Group0_1LibraryDW/02_final_presentation.pptx
@@ -2,31 +2,35 @@
 <file path=ppt/presentation.xml><?xml version="1.0" encoding="utf-8"?>
 <p:presentation xmlns:a="http://schemas.openxmlformats.org/drawingml/2006/main" xmlns:r="http://schemas.openxmlformats.org/officeDocument/2006/relationships" xmlns:p="http://schemas.openxmlformats.org/presentationml/2006/main" saveSubsetFonts="1" autoCompressPictures="0">
   <p:sldMasterIdLst>
-    <p:sldMasterId id="2147483648" r:id="rId1"/>
+    <p:sldMasterId id="2147483651" r:id="rId1"/>
   </p:sldMasterIdLst>
   <p:notesMasterIdLst>
-    <p:notesMasterId r:id="rId17"/>
+    <p:notesMasterId r:id="rId18"/>
   </p:notesMasterIdLst>
   <p:sldIdLst>
     <p:sldId id="256" r:id="rId2"/>
-    <p:sldId id="271" r:id="rId3"/>
-    <p:sldId id="258" r:id="rId4"/>
-    <p:sldId id="259" r:id="rId5"/>
-    <p:sldId id="260" r:id="rId6"/>
-    <p:sldId id="261" r:id="rId7"/>
-    <p:sldId id="262" r:id="rId8"/>
-    <p:sldId id="263" r:id="rId9"/>
-    <p:sldId id="264" r:id="rId10"/>
-    <p:sldId id="265" r:id="rId11"/>
-    <p:sldId id="266" r:id="rId12"/>
-    <p:sldId id="267" r:id="rId13"/>
-    <p:sldId id="268" r:id="rId14"/>
-    <p:sldId id="269" r:id="rId15"/>
-    <p:sldId id="270" r:id="rId16"/>
+    <p:sldId id="272" r:id="rId3"/>
+    <p:sldId id="271" r:id="rId4"/>
+    <p:sldId id="258" r:id="rId5"/>
+    <p:sldId id="259" r:id="rId6"/>
+    <p:sldId id="260" r:id="rId7"/>
+    <p:sldId id="261" r:id="rId8"/>
+    <p:sldId id="262" r:id="rId9"/>
+    <p:sldId id="263" r:id="rId10"/>
+    <p:sldId id="264" r:id="rId11"/>
+    <p:sldId id="265" r:id="rId12"/>
+    <p:sldId id="266" r:id="rId13"/>
+    <p:sldId id="267" r:id="rId14"/>
+    <p:sldId id="268" r:id="rId15"/>
+    <p:sldId id="269" r:id="rId16"/>
+    <p:sldId id="270" r:id="rId17"/>
   </p:sldIdLst>
   <p:sldSz cx="9144000" cy="5143500" type="screen16x9"/>
   <p:notesSz cx="5143500" cy="9144000"/>
   <p:defaultTextStyle>
+    <a:defPPr>
+      <a:defRPr lang="en-US"/>
+    </a:defPPr>
     <a:lvl1pPr marL="0" algn="l" defTabSz="914400" rtl="0" eaLnBrk="1" latinLnBrk="0" hangingPunct="1">
       <a:defRPr sz="1800" kern="1200">
         <a:solidFill>
@@ -400,7 +404,7 @@
           <a:p>
             <a:fld id="{F7021451-1387-4CA6-816F-3879F97B5CBC}" type="slidenum">
               <a:rPr lang="en-US"/>
-              <a:t>11</a:t>
+              <a:t>12</a:t>
             </a:fld>
             <a:endParaRPr lang="en-US"/>
           </a:p>
@@ -484,7 +488,7 @@
           <a:p>
             <a:fld id="{F7021451-1387-4CA6-816F-3879F97B5CBC}" type="slidenum">
               <a:rPr lang="en-US"/>
-              <a:t>12</a:t>
+              <a:t>13</a:t>
             </a:fld>
             <a:endParaRPr lang="en-US"/>
           </a:p>
@@ -568,7 +572,7 @@
           <a:p>
             <a:fld id="{F7021451-1387-4CA6-816F-3879F97B5CBC}" type="slidenum">
               <a:rPr lang="en-US"/>
-              <a:t>13</a:t>
+              <a:t>14</a:t>
             </a:fld>
             <a:endParaRPr lang="en-US"/>
           </a:p>
@@ -652,7 +656,7 @@
           <a:p>
             <a:fld id="{F7021451-1387-4CA6-816F-3879F97B5CBC}" type="slidenum">
               <a:rPr lang="en-US"/>
-              <a:t>14</a:t>
+              <a:t>15</a:t>
             </a:fld>
             <a:endParaRPr lang="en-US"/>
           </a:p>
@@ -736,7 +740,7 @@
           <a:p>
             <a:fld id="{F7021451-1387-4CA6-816F-3879F97B5CBC}" type="slidenum">
               <a:rPr lang="en-US"/>
-              <a:t>15</a:t>
+              <a:t>16</a:t>
             </a:fld>
             <a:endParaRPr lang="en-US"/>
           </a:p>
@@ -820,7 +824,7 @@
           <a:p>
             <a:fld id="{F7021451-1387-4CA6-816F-3879F97B5CBC}" type="slidenum">
               <a:rPr lang="en-US"/>
-              <a:t>3</a:t>
+              <a:t>4</a:t>
             </a:fld>
             <a:endParaRPr lang="en-US"/>
           </a:p>
@@ -904,7 +908,7 @@
           <a:p>
             <a:fld id="{F7021451-1387-4CA6-816F-3879F97B5CBC}" type="slidenum">
               <a:rPr lang="en-US"/>
-              <a:t>4</a:t>
+              <a:t>5</a:t>
             </a:fld>
             <a:endParaRPr lang="en-US"/>
           </a:p>
@@ -988,7 +992,7 @@
           <a:p>
             <a:fld id="{F7021451-1387-4CA6-816F-3879F97B5CBC}" type="slidenum">
               <a:rPr lang="en-US"/>
-              <a:t>5</a:t>
+              <a:t>6</a:t>
             </a:fld>
             <a:endParaRPr lang="en-US"/>
           </a:p>
@@ -1072,7 +1076,7 @@
           <a:p>
             <a:fld id="{F7021451-1387-4CA6-816F-3879F97B5CBC}" type="slidenum">
               <a:rPr lang="en-US"/>
-              <a:t>6</a:t>
+              <a:t>7</a:t>
             </a:fld>
             <a:endParaRPr lang="en-US"/>
           </a:p>
@@ -1156,7 +1160,7 @@
           <a:p>
             <a:fld id="{F7021451-1387-4CA6-816F-3879F97B5CBC}" type="slidenum">
               <a:rPr lang="en-US"/>
-              <a:t>7</a:t>
+              <a:t>8</a:t>
             </a:fld>
             <a:endParaRPr lang="en-US"/>
           </a:p>
@@ -1240,7 +1244,7 @@
           <a:p>
             <a:fld id="{F7021451-1387-4CA6-816F-3879F97B5CBC}" type="slidenum">
               <a:rPr lang="en-US"/>
-              <a:t>8</a:t>
+              <a:t>9</a:t>
             </a:fld>
             <a:endParaRPr lang="en-US"/>
           </a:p>
@@ -1324,7 +1328,7 @@
           <a:p>
             <a:fld id="{F7021451-1387-4CA6-816F-3879F97B5CBC}" type="slidenum">
               <a:rPr lang="en-US"/>
-              <a:t>9</a:t>
+              <a:t>10</a:t>
             </a:fld>
             <a:endParaRPr lang="en-US"/>
           </a:p>
@@ -1408,7 +1412,7 @@
           <a:p>
             <a:fld id="{F7021451-1387-4CA6-816F-3879F97B5CBC}" type="slidenum">
               <a:rPr lang="en-US"/>
-              <a:t>10</a:t>
+              <a:t>11</a:t>
             </a:fld>
             <a:endParaRPr lang="en-US"/>
           </a:p>
@@ -1428,7 +1432,636 @@
 </file>
 
 <file path=ppt/slideLayouts/slideLayout1.xml><?xml version="1.0" encoding="utf-8"?>
-<p:sldLayout xmlns:a="http://schemas.openxmlformats.org/drawingml/2006/main" xmlns:r="http://schemas.openxmlformats.org/officeDocument/2006/relationships" xmlns:p="http://schemas.openxmlformats.org/presentationml/2006/main" preserve="1">
+<p:sldLayout xmlns:a="http://schemas.openxmlformats.org/drawingml/2006/main" xmlns:r="http://schemas.openxmlformats.org/officeDocument/2006/relationships" xmlns:p="http://schemas.openxmlformats.org/presentationml/2006/main" type="title" preserve="1">
+  <p:cSld name="Title Slide">
+    <p:spTree>
+      <p:nvGrpSpPr>
+        <p:cNvPr id="1" name=""/>
+        <p:cNvGrpSpPr/>
+        <p:nvPr/>
+      </p:nvGrpSpPr>
+      <p:grpSpPr>
+        <a:xfrm>
+          <a:off x="0" y="0"/>
+          <a:ext cx="0" cy="0"/>
+          <a:chOff x="0" y="0"/>
+          <a:chExt cx="0" cy="0"/>
+        </a:xfrm>
+      </p:grpSpPr>
+      <p:sp>
+        <p:nvSpPr>
+          <p:cNvPr id="2" name="Title 1">
+            <a:extLst>
+              <a:ext uri="{FF2B5EF4-FFF2-40B4-BE49-F238E27FC236}">
+                <a16:creationId xmlns:a16="http://schemas.microsoft.com/office/drawing/2014/main" id="{281A963F-A7B8-E9D7-5868-43D550854EFD}"/>
+              </a:ext>
+            </a:extLst>
+          </p:cNvPr>
+          <p:cNvSpPr>
+            <a:spLocks noGrp="1"/>
+          </p:cNvSpPr>
+          <p:nvPr>
+            <p:ph type="ctrTitle"/>
+          </p:nvPr>
+        </p:nvSpPr>
+        <p:spPr>
+          <a:xfrm>
+            <a:off x="1143000" y="841772"/>
+            <a:ext cx="6858000" cy="1790700"/>
+          </a:xfrm>
+        </p:spPr>
+        <p:txBody>
+          <a:bodyPr anchor="b"/>
+          <a:lstStyle>
+            <a:lvl1pPr algn="ctr">
+              <a:defRPr sz="4500"/>
+            </a:lvl1pPr>
+          </a:lstStyle>
+          <a:p>
+            <a:r>
+              <a:rPr lang="en-US"/>
+              <a:t>Click to edit Master title style</a:t>
+            </a:r>
+          </a:p>
+        </p:txBody>
+      </p:sp>
+      <p:sp>
+        <p:nvSpPr>
+          <p:cNvPr id="3" name="Subtitle 2">
+            <a:extLst>
+              <a:ext uri="{FF2B5EF4-FFF2-40B4-BE49-F238E27FC236}">
+                <a16:creationId xmlns:a16="http://schemas.microsoft.com/office/drawing/2014/main" id="{125104DB-5E47-A4AB-1FC5-545B529D729F}"/>
+              </a:ext>
+            </a:extLst>
+          </p:cNvPr>
+          <p:cNvSpPr>
+            <a:spLocks noGrp="1"/>
+          </p:cNvSpPr>
+          <p:nvPr>
+            <p:ph type="subTitle" idx="1"/>
+          </p:nvPr>
+        </p:nvSpPr>
+        <p:spPr>
+          <a:xfrm>
+            <a:off x="1143000" y="2701528"/>
+            <a:ext cx="6858000" cy="1241822"/>
+          </a:xfrm>
+        </p:spPr>
+        <p:txBody>
+          <a:bodyPr/>
+          <a:lstStyle>
+            <a:lvl1pPr marL="0" indent="0" algn="ctr">
+              <a:buNone/>
+              <a:defRPr sz="1800"/>
+            </a:lvl1pPr>
+            <a:lvl2pPr marL="342900" indent="0" algn="ctr">
+              <a:buNone/>
+              <a:defRPr sz="1500"/>
+            </a:lvl2pPr>
+            <a:lvl3pPr marL="685800" indent="0" algn="ctr">
+              <a:buNone/>
+              <a:defRPr sz="1350"/>
+            </a:lvl3pPr>
+            <a:lvl4pPr marL="1028700" indent="0" algn="ctr">
+              <a:buNone/>
+              <a:defRPr sz="1200"/>
+            </a:lvl4pPr>
+            <a:lvl5pPr marL="1371600" indent="0" algn="ctr">
+              <a:buNone/>
+              <a:defRPr sz="1200"/>
+            </a:lvl5pPr>
+            <a:lvl6pPr marL="1714500" indent="0" algn="ctr">
+              <a:buNone/>
+              <a:defRPr sz="1200"/>
+            </a:lvl6pPr>
+            <a:lvl7pPr marL="2057400" indent="0" algn="ctr">
+              <a:buNone/>
+              <a:defRPr sz="1200"/>
+            </a:lvl7pPr>
+            <a:lvl8pPr marL="2400300" indent="0" algn="ctr">
+              <a:buNone/>
+              <a:defRPr sz="1200"/>
+            </a:lvl8pPr>
+            <a:lvl9pPr marL="2743200" indent="0" algn="ctr">
+              <a:buNone/>
+              <a:defRPr sz="1200"/>
+            </a:lvl9pPr>
+          </a:lstStyle>
+          <a:p>
+            <a:r>
+              <a:rPr lang="en-US"/>
+              <a:t>Click to edit Master subtitle style</a:t>
+            </a:r>
+          </a:p>
+        </p:txBody>
+      </p:sp>
+      <p:sp>
+        <p:nvSpPr>
+          <p:cNvPr id="4" name="Date Placeholder 3">
+            <a:extLst>
+              <a:ext uri="{FF2B5EF4-FFF2-40B4-BE49-F238E27FC236}">
+                <a16:creationId xmlns:a16="http://schemas.microsoft.com/office/drawing/2014/main" id="{DA221CD8-F3BB-7C9E-005B-E91452F45E3E}"/>
+              </a:ext>
+            </a:extLst>
+          </p:cNvPr>
+          <p:cNvSpPr>
+            <a:spLocks noGrp="1"/>
+          </p:cNvSpPr>
+          <p:nvPr>
+            <p:ph type="dt" sz="half" idx="10"/>
+          </p:nvPr>
+        </p:nvSpPr>
+        <p:spPr/>
+        <p:txBody>
+          <a:bodyPr/>
+          <a:lstStyle/>
+          <a:p>
+            <a:fld id="{CE65D3C8-C09A-499B-9407-1B57987B4750}" type="datetimeFigureOut">
+              <a:rPr lang="en-US" smtClean="0"/>
+              <a:t>2/3/2026</a:t>
+            </a:fld>
+            <a:endParaRPr lang="en-US"/>
+          </a:p>
+        </p:txBody>
+      </p:sp>
+      <p:sp>
+        <p:nvSpPr>
+          <p:cNvPr id="5" name="Footer Placeholder 4">
+            <a:extLst>
+              <a:ext uri="{FF2B5EF4-FFF2-40B4-BE49-F238E27FC236}">
+                <a16:creationId xmlns:a16="http://schemas.microsoft.com/office/drawing/2014/main" id="{7E88D8A9-4125-15D9-8CCA-7EBEE67637D7}"/>
+              </a:ext>
+            </a:extLst>
+          </p:cNvPr>
+          <p:cNvSpPr>
+            <a:spLocks noGrp="1"/>
+          </p:cNvSpPr>
+          <p:nvPr>
+            <p:ph type="ftr" sz="quarter" idx="11"/>
+          </p:nvPr>
+        </p:nvSpPr>
+        <p:spPr/>
+        <p:txBody>
+          <a:bodyPr/>
+          <a:lstStyle/>
+          <a:p>
+            <a:endParaRPr lang="en-US"/>
+          </a:p>
+        </p:txBody>
+      </p:sp>
+      <p:sp>
+        <p:nvSpPr>
+          <p:cNvPr id="6" name="Slide Number Placeholder 5">
+            <a:extLst>
+              <a:ext uri="{FF2B5EF4-FFF2-40B4-BE49-F238E27FC236}">
+                <a16:creationId xmlns:a16="http://schemas.microsoft.com/office/drawing/2014/main" id="{D9BC174C-4AD8-8AF2-6773-6333344D566A}"/>
+              </a:ext>
+            </a:extLst>
+          </p:cNvPr>
+          <p:cNvSpPr>
+            <a:spLocks noGrp="1"/>
+          </p:cNvSpPr>
+          <p:nvPr>
+            <p:ph type="sldNum" sz="quarter" idx="12"/>
+          </p:nvPr>
+        </p:nvSpPr>
+        <p:spPr/>
+        <p:txBody>
+          <a:bodyPr/>
+          <a:lstStyle/>
+          <a:p>
+            <a:fld id="{7402C3E2-CA08-4EA3-8720-6BC592FEBF98}" type="slidenum">
+              <a:rPr lang="en-US" smtClean="0"/>
+              <a:t>‹#›</a:t>
+            </a:fld>
+            <a:endParaRPr lang="en-US"/>
+          </a:p>
+        </p:txBody>
+      </p:sp>
+    </p:spTree>
+    <p:extLst>
+      <p:ext uri="{BB962C8B-B14F-4D97-AF65-F5344CB8AC3E}">
+        <p14:creationId xmlns:p14="http://schemas.microsoft.com/office/powerpoint/2010/main" val="3809298188"/>
+      </p:ext>
+    </p:extLst>
+  </p:cSld>
+  <p:clrMapOvr>
+    <a:masterClrMapping/>
+  </p:clrMapOvr>
+  <p:hf sldNum="0" hdr="0" ftr="0" dt="0"/>
+</p:sldLayout>
+</file>
+
+<file path=ppt/slideLayouts/slideLayout10.xml><?xml version="1.0" encoding="utf-8"?>
+<p:sldLayout xmlns:a="http://schemas.openxmlformats.org/drawingml/2006/main" xmlns:r="http://schemas.openxmlformats.org/officeDocument/2006/relationships" xmlns:p="http://schemas.openxmlformats.org/presentationml/2006/main" type="vertTx" preserve="1">
+  <p:cSld name="Title and Vertical Text">
+    <p:spTree>
+      <p:nvGrpSpPr>
+        <p:cNvPr id="1" name=""/>
+        <p:cNvGrpSpPr/>
+        <p:nvPr/>
+      </p:nvGrpSpPr>
+      <p:grpSpPr>
+        <a:xfrm>
+          <a:off x="0" y="0"/>
+          <a:ext cx="0" cy="0"/>
+          <a:chOff x="0" y="0"/>
+          <a:chExt cx="0" cy="0"/>
+        </a:xfrm>
+      </p:grpSpPr>
+      <p:sp>
+        <p:nvSpPr>
+          <p:cNvPr id="2" name="Title 1">
+            <a:extLst>
+              <a:ext uri="{FF2B5EF4-FFF2-40B4-BE49-F238E27FC236}">
+                <a16:creationId xmlns:a16="http://schemas.microsoft.com/office/drawing/2014/main" id="{5B0F3E17-B71D-1A24-888D-38E624E901DA}"/>
+              </a:ext>
+            </a:extLst>
+          </p:cNvPr>
+          <p:cNvSpPr>
+            <a:spLocks noGrp="1"/>
+          </p:cNvSpPr>
+          <p:nvPr>
+            <p:ph type="title"/>
+          </p:nvPr>
+        </p:nvSpPr>
+        <p:spPr/>
+        <p:txBody>
+          <a:bodyPr/>
+          <a:lstStyle/>
+          <a:p>
+            <a:r>
+              <a:rPr lang="en-US"/>
+              <a:t>Click to edit Master title style</a:t>
+            </a:r>
+          </a:p>
+        </p:txBody>
+      </p:sp>
+      <p:sp>
+        <p:nvSpPr>
+          <p:cNvPr id="3" name="Vertical Text Placeholder 2">
+            <a:extLst>
+              <a:ext uri="{FF2B5EF4-FFF2-40B4-BE49-F238E27FC236}">
+                <a16:creationId xmlns:a16="http://schemas.microsoft.com/office/drawing/2014/main" id="{60BED1AB-BD4F-F4BB-4C73-65E62A4F691F}"/>
+              </a:ext>
+            </a:extLst>
+          </p:cNvPr>
+          <p:cNvSpPr>
+            <a:spLocks noGrp="1"/>
+          </p:cNvSpPr>
+          <p:nvPr>
+            <p:ph type="body" orient="vert" idx="1"/>
+          </p:nvPr>
+        </p:nvSpPr>
+        <p:spPr/>
+        <p:txBody>
+          <a:bodyPr vert="eaVert"/>
+          <a:lstStyle/>
+          <a:p>
+            <a:pPr lvl="0"/>
+            <a:r>
+              <a:rPr lang="en-US"/>
+              <a:t>Click to edit Master text styles</a:t>
+            </a:r>
+          </a:p>
+          <a:p>
+            <a:pPr lvl="1"/>
+            <a:r>
+              <a:rPr lang="en-US"/>
+              <a:t>Second level</a:t>
+            </a:r>
+          </a:p>
+          <a:p>
+            <a:pPr lvl="2"/>
+            <a:r>
+              <a:rPr lang="en-US"/>
+              <a:t>Third level</a:t>
+            </a:r>
+          </a:p>
+          <a:p>
+            <a:pPr lvl="3"/>
+            <a:r>
+              <a:rPr lang="en-US"/>
+              <a:t>Fourth level</a:t>
+            </a:r>
+          </a:p>
+          <a:p>
+            <a:pPr lvl="4"/>
+            <a:r>
+              <a:rPr lang="en-US"/>
+              <a:t>Fifth level</a:t>
+            </a:r>
+          </a:p>
+        </p:txBody>
+      </p:sp>
+      <p:sp>
+        <p:nvSpPr>
+          <p:cNvPr id="4" name="Date Placeholder 3">
+            <a:extLst>
+              <a:ext uri="{FF2B5EF4-FFF2-40B4-BE49-F238E27FC236}">
+                <a16:creationId xmlns:a16="http://schemas.microsoft.com/office/drawing/2014/main" id="{014E2FA2-0803-7F59-AC09-C216C631FBCF}"/>
+              </a:ext>
+            </a:extLst>
+          </p:cNvPr>
+          <p:cNvSpPr>
+            <a:spLocks noGrp="1"/>
+          </p:cNvSpPr>
+          <p:nvPr>
+            <p:ph type="dt" sz="half" idx="10"/>
+          </p:nvPr>
+        </p:nvSpPr>
+        <p:spPr/>
+        <p:txBody>
+          <a:bodyPr/>
+          <a:lstStyle/>
+          <a:p>
+            <a:fld id="{CE65D3C8-C09A-499B-9407-1B57987B4750}" type="datetimeFigureOut">
+              <a:rPr lang="en-US" smtClean="0"/>
+              <a:t>2/3/2026</a:t>
+            </a:fld>
+            <a:endParaRPr lang="en-US"/>
+          </a:p>
+        </p:txBody>
+      </p:sp>
+      <p:sp>
+        <p:nvSpPr>
+          <p:cNvPr id="5" name="Footer Placeholder 4">
+            <a:extLst>
+              <a:ext uri="{FF2B5EF4-FFF2-40B4-BE49-F238E27FC236}">
+                <a16:creationId xmlns:a16="http://schemas.microsoft.com/office/drawing/2014/main" id="{09BB8FBC-83E1-DDEB-6830-F956E3ADBB72}"/>
+              </a:ext>
+            </a:extLst>
+          </p:cNvPr>
+          <p:cNvSpPr>
+            <a:spLocks noGrp="1"/>
+          </p:cNvSpPr>
+          <p:nvPr>
+            <p:ph type="ftr" sz="quarter" idx="11"/>
+          </p:nvPr>
+        </p:nvSpPr>
+        <p:spPr/>
+        <p:txBody>
+          <a:bodyPr/>
+          <a:lstStyle/>
+          <a:p>
+            <a:endParaRPr lang="en-US"/>
+          </a:p>
+        </p:txBody>
+      </p:sp>
+      <p:sp>
+        <p:nvSpPr>
+          <p:cNvPr id="6" name="Slide Number Placeholder 5">
+            <a:extLst>
+              <a:ext uri="{FF2B5EF4-FFF2-40B4-BE49-F238E27FC236}">
+                <a16:creationId xmlns:a16="http://schemas.microsoft.com/office/drawing/2014/main" id="{CDE97EA3-2D6D-CFF5-509B-3E19AE7EFD98}"/>
+              </a:ext>
+            </a:extLst>
+          </p:cNvPr>
+          <p:cNvSpPr>
+            <a:spLocks noGrp="1"/>
+          </p:cNvSpPr>
+          <p:nvPr>
+            <p:ph type="sldNum" sz="quarter" idx="12"/>
+          </p:nvPr>
+        </p:nvSpPr>
+        <p:spPr/>
+        <p:txBody>
+          <a:bodyPr/>
+          <a:lstStyle/>
+          <a:p>
+            <a:fld id="{7402C3E2-CA08-4EA3-8720-6BC592FEBF98}" type="slidenum">
+              <a:rPr lang="en-US" smtClean="0"/>
+              <a:t>‹#›</a:t>
+            </a:fld>
+            <a:endParaRPr lang="en-US"/>
+          </a:p>
+        </p:txBody>
+      </p:sp>
+    </p:spTree>
+    <p:extLst>
+      <p:ext uri="{BB962C8B-B14F-4D97-AF65-F5344CB8AC3E}">
+        <p14:creationId xmlns:p14="http://schemas.microsoft.com/office/powerpoint/2010/main" val="1188841323"/>
+      </p:ext>
+    </p:extLst>
+  </p:cSld>
+  <p:clrMapOvr>
+    <a:masterClrMapping/>
+  </p:clrMapOvr>
+  <p:hf sldNum="0" hdr="0" ftr="0" dt="0"/>
+</p:sldLayout>
+</file>
+
+<file path=ppt/slideLayouts/slideLayout11.xml><?xml version="1.0" encoding="utf-8"?>
+<p:sldLayout xmlns:a="http://schemas.openxmlformats.org/drawingml/2006/main" xmlns:r="http://schemas.openxmlformats.org/officeDocument/2006/relationships" xmlns:p="http://schemas.openxmlformats.org/presentationml/2006/main" type="vertTitleAndTx" preserve="1">
+  <p:cSld name="Vertical Title and Text">
+    <p:spTree>
+      <p:nvGrpSpPr>
+        <p:cNvPr id="1" name=""/>
+        <p:cNvGrpSpPr/>
+        <p:nvPr/>
+      </p:nvGrpSpPr>
+      <p:grpSpPr>
+        <a:xfrm>
+          <a:off x="0" y="0"/>
+          <a:ext cx="0" cy="0"/>
+          <a:chOff x="0" y="0"/>
+          <a:chExt cx="0" cy="0"/>
+        </a:xfrm>
+      </p:grpSpPr>
+      <p:sp>
+        <p:nvSpPr>
+          <p:cNvPr id="2" name="Vertical Title 1">
+            <a:extLst>
+              <a:ext uri="{FF2B5EF4-FFF2-40B4-BE49-F238E27FC236}">
+                <a16:creationId xmlns:a16="http://schemas.microsoft.com/office/drawing/2014/main" id="{5B9505B4-6AD9-BE16-2AA8-50265902AFF7}"/>
+              </a:ext>
+            </a:extLst>
+          </p:cNvPr>
+          <p:cNvSpPr>
+            <a:spLocks noGrp="1"/>
+          </p:cNvSpPr>
+          <p:nvPr>
+            <p:ph type="title" orient="vert"/>
+          </p:nvPr>
+        </p:nvSpPr>
+        <p:spPr>
+          <a:xfrm>
+            <a:off x="6543675" y="273844"/>
+            <a:ext cx="1971675" cy="4358879"/>
+          </a:xfrm>
+        </p:spPr>
+        <p:txBody>
+          <a:bodyPr vert="eaVert"/>
+          <a:lstStyle/>
+          <a:p>
+            <a:r>
+              <a:rPr lang="en-US"/>
+              <a:t>Click to edit Master title style</a:t>
+            </a:r>
+          </a:p>
+        </p:txBody>
+      </p:sp>
+      <p:sp>
+        <p:nvSpPr>
+          <p:cNvPr id="3" name="Vertical Text Placeholder 2">
+            <a:extLst>
+              <a:ext uri="{FF2B5EF4-FFF2-40B4-BE49-F238E27FC236}">
+                <a16:creationId xmlns:a16="http://schemas.microsoft.com/office/drawing/2014/main" id="{4BE5DDE7-03B2-E01B-057B-D6B4F80AC293}"/>
+              </a:ext>
+            </a:extLst>
+          </p:cNvPr>
+          <p:cNvSpPr>
+            <a:spLocks noGrp="1"/>
+          </p:cNvSpPr>
+          <p:nvPr>
+            <p:ph type="body" orient="vert" idx="1"/>
+          </p:nvPr>
+        </p:nvSpPr>
+        <p:spPr>
+          <a:xfrm>
+            <a:off x="628650" y="273844"/>
+            <a:ext cx="5800725" cy="4358879"/>
+          </a:xfrm>
+        </p:spPr>
+        <p:txBody>
+          <a:bodyPr vert="eaVert"/>
+          <a:lstStyle/>
+          <a:p>
+            <a:pPr lvl="0"/>
+            <a:r>
+              <a:rPr lang="en-US"/>
+              <a:t>Click to edit Master text styles</a:t>
+            </a:r>
+          </a:p>
+          <a:p>
+            <a:pPr lvl="1"/>
+            <a:r>
+              <a:rPr lang="en-US"/>
+              <a:t>Second level</a:t>
+            </a:r>
+          </a:p>
+          <a:p>
+            <a:pPr lvl="2"/>
+            <a:r>
+              <a:rPr lang="en-US"/>
+              <a:t>Third level</a:t>
+            </a:r>
+          </a:p>
+          <a:p>
+            <a:pPr lvl="3"/>
+            <a:r>
+              <a:rPr lang="en-US"/>
+              <a:t>Fourth level</a:t>
+            </a:r>
+          </a:p>
+          <a:p>
+            <a:pPr lvl="4"/>
+            <a:r>
+              <a:rPr lang="en-US"/>
+              <a:t>Fifth level</a:t>
+            </a:r>
+          </a:p>
+        </p:txBody>
+      </p:sp>
+      <p:sp>
+        <p:nvSpPr>
+          <p:cNvPr id="4" name="Date Placeholder 3">
+            <a:extLst>
+              <a:ext uri="{FF2B5EF4-FFF2-40B4-BE49-F238E27FC236}">
+                <a16:creationId xmlns:a16="http://schemas.microsoft.com/office/drawing/2014/main" id="{89B8CE3D-B6E1-775D-2E42-1B0C004E5DCC}"/>
+              </a:ext>
+            </a:extLst>
+          </p:cNvPr>
+          <p:cNvSpPr>
+            <a:spLocks noGrp="1"/>
+          </p:cNvSpPr>
+          <p:nvPr>
+            <p:ph type="dt" sz="half" idx="10"/>
+          </p:nvPr>
+        </p:nvSpPr>
+        <p:spPr/>
+        <p:txBody>
+          <a:bodyPr/>
+          <a:lstStyle/>
+          <a:p>
+            <a:fld id="{CE65D3C8-C09A-499B-9407-1B57987B4750}" type="datetimeFigureOut">
+              <a:rPr lang="en-US" smtClean="0"/>
+              <a:t>2/3/2026</a:t>
+            </a:fld>
+            <a:endParaRPr lang="en-US"/>
+          </a:p>
+        </p:txBody>
+      </p:sp>
+      <p:sp>
+        <p:nvSpPr>
+          <p:cNvPr id="5" name="Footer Placeholder 4">
+            <a:extLst>
+              <a:ext uri="{FF2B5EF4-FFF2-40B4-BE49-F238E27FC236}">
+                <a16:creationId xmlns:a16="http://schemas.microsoft.com/office/drawing/2014/main" id="{FEB8D237-AAAB-09EB-32F7-0B863BFACA03}"/>
+              </a:ext>
+            </a:extLst>
+          </p:cNvPr>
+          <p:cNvSpPr>
+            <a:spLocks noGrp="1"/>
+          </p:cNvSpPr>
+          <p:nvPr>
+            <p:ph type="ftr" sz="quarter" idx="11"/>
+          </p:nvPr>
+        </p:nvSpPr>
+        <p:spPr/>
+        <p:txBody>
+          <a:bodyPr/>
+          <a:lstStyle/>
+          <a:p>
+            <a:endParaRPr lang="en-US"/>
+          </a:p>
+        </p:txBody>
+      </p:sp>
+      <p:sp>
+        <p:nvSpPr>
+          <p:cNvPr id="6" name="Slide Number Placeholder 5">
+            <a:extLst>
+              <a:ext uri="{FF2B5EF4-FFF2-40B4-BE49-F238E27FC236}">
+                <a16:creationId xmlns:a16="http://schemas.microsoft.com/office/drawing/2014/main" id="{8E5B6547-6797-FCB2-2175-7BA3DFAFD0B1}"/>
+              </a:ext>
+            </a:extLst>
+          </p:cNvPr>
+          <p:cNvSpPr>
+            <a:spLocks noGrp="1"/>
+          </p:cNvSpPr>
+          <p:nvPr>
+            <p:ph type="sldNum" sz="quarter" idx="12"/>
+          </p:nvPr>
+        </p:nvSpPr>
+        <p:spPr/>
+        <p:txBody>
+          <a:bodyPr/>
+          <a:lstStyle/>
+          <a:p>
+            <a:fld id="{7402C3E2-CA08-4EA3-8720-6BC592FEBF98}" type="slidenum">
+              <a:rPr lang="en-US" smtClean="0"/>
+              <a:t>‹#›</a:t>
+            </a:fld>
+            <a:endParaRPr lang="en-US"/>
+          </a:p>
+        </p:txBody>
+      </p:sp>
+    </p:spTree>
+    <p:extLst>
+      <p:ext uri="{BB962C8B-B14F-4D97-AF65-F5344CB8AC3E}">
+        <p14:creationId xmlns:p14="http://schemas.microsoft.com/office/powerpoint/2010/main" val="768030809"/>
+      </p:ext>
+    </p:extLst>
+  </p:cSld>
+  <p:clrMapOvr>
+    <a:masterClrMapping/>
+  </p:clrMapOvr>
+  <p:hf sldNum="0" hdr="0" ftr="0" dt="0"/>
+</p:sldLayout>
+</file>
+
+<file path=ppt/slideLayouts/slideLayout12.xml><?xml version="1.0" encoding="utf-8"?>
+<p:sldLayout xmlns:a="http://schemas.openxmlformats.org/drawingml/2006/main" xmlns:r="http://schemas.openxmlformats.org/officeDocument/2006/relationships" xmlns:p="http://schemas.openxmlformats.org/presentationml/2006/main">
   <p:cSld name="DEFAULT">
     <p:bg>
       <p:bgRef idx="1001">
@@ -1450,6 +2083,11 @@
         </a:xfrm>
       </p:grpSpPr>
     </p:spTree>
+    <p:extLst>
+      <p:ext uri="{BB962C8B-B14F-4D97-AF65-F5344CB8AC3E}">
+        <p14:creationId xmlns:p14="http://schemas.microsoft.com/office/powerpoint/2010/main" val="1297977479"/>
+      </p:ext>
+    </p:extLst>
   </p:cSld>
   <p:clrMapOvr>
     <a:masterClrMapping/>
@@ -1458,7 +2096,7 @@
 </file>
 
 <file path=ppt/slideLayouts/slideLayout2.xml><?xml version="1.0" encoding="utf-8"?>
-<p:sldLayout xmlns:a="http://schemas.openxmlformats.org/drawingml/2006/main" xmlns:r="http://schemas.openxmlformats.org/officeDocument/2006/relationships" xmlns:p="http://schemas.openxmlformats.org/presentationml/2006/main" type="obj">
+<p:sldLayout xmlns:a="http://schemas.openxmlformats.org/drawingml/2006/main" xmlns:r="http://schemas.openxmlformats.org/officeDocument/2006/relationships" xmlns:p="http://schemas.openxmlformats.org/presentationml/2006/main" type="obj" preserve="1">
   <p:cSld name="Title and Content">
     <p:spTree>
       <p:nvGrpSpPr>
@@ -1479,7 +2117,7 @@
           <p:cNvPr id="2" name="Title 1">
             <a:extLst>
               <a:ext uri="{FF2B5EF4-FFF2-40B4-BE49-F238E27FC236}">
-                <a16:creationId xmlns:a16="http://schemas.microsoft.com/office/drawing/2014/main" id="{D06DEB19-D674-A89E-55DF-5C4B7914FFDA}"/>
+                <a16:creationId xmlns:a16="http://schemas.microsoft.com/office/drawing/2014/main" id="{E51DFE7F-03CF-B323-A6EC-0C735EFF6A40}"/>
               </a:ext>
             </a:extLst>
           </p:cNvPr>
@@ -1507,7 +2145,7 @@
           <p:cNvPr id="3" name="Content Placeholder 2">
             <a:extLst>
               <a:ext uri="{FF2B5EF4-FFF2-40B4-BE49-F238E27FC236}">
-                <a16:creationId xmlns:a16="http://schemas.microsoft.com/office/drawing/2014/main" id="{40F20C59-7BE5-6CE5-5D00-40F8C75DDFDC}"/>
+                <a16:creationId xmlns:a16="http://schemas.microsoft.com/office/drawing/2014/main" id="{27760CB3-A378-B35C-0804-A5FF1A2C0242}"/>
               </a:ext>
             </a:extLst>
           </p:cNvPr>
@@ -1564,7 +2202,7 @@
           <p:cNvPr id="4" name="Date Placeholder 3">
             <a:extLst>
               <a:ext uri="{FF2B5EF4-FFF2-40B4-BE49-F238E27FC236}">
-                <a16:creationId xmlns:a16="http://schemas.microsoft.com/office/drawing/2014/main" id="{60E21016-AC22-678F-07B2-39A65918613B}"/>
+                <a16:creationId xmlns:a16="http://schemas.microsoft.com/office/drawing/2014/main" id="{5F7302C2-908A-E000-7A3D-BE43A37CCC2B}"/>
               </a:ext>
             </a:extLst>
           </p:cNvPr>
@@ -1582,7 +2220,7 @@
           <a:p>
             <a:fld id="{06F3ED35-1DFE-4C8E-AB7B-30ADA7D40FAC}" type="datetimeFigureOut">
               <a:rPr lang="en-US" smtClean="0"/>
-              <a:t>1/30/2026</a:t>
+              <a:t>2/3/2026</a:t>
             </a:fld>
             <a:endParaRPr lang="en-US"/>
           </a:p>
@@ -1593,7 +2231,7 @@
           <p:cNvPr id="5" name="Footer Placeholder 4">
             <a:extLst>
               <a:ext uri="{FF2B5EF4-FFF2-40B4-BE49-F238E27FC236}">
-                <a16:creationId xmlns:a16="http://schemas.microsoft.com/office/drawing/2014/main" id="{1E34696C-AF65-4124-481D-1373F229D56E}"/>
+                <a16:creationId xmlns:a16="http://schemas.microsoft.com/office/drawing/2014/main" id="{433E66AE-ACA1-F4A6-F2A3-82D55EBF0D61}"/>
               </a:ext>
             </a:extLst>
           </p:cNvPr>
@@ -1618,7 +2256,7 @@
           <p:cNvPr id="6" name="Slide Number Placeholder 5">
             <a:extLst>
               <a:ext uri="{FF2B5EF4-FFF2-40B4-BE49-F238E27FC236}">
-                <a16:creationId xmlns:a16="http://schemas.microsoft.com/office/drawing/2014/main" id="{0A74BEBB-D2E9-BAE0-48D6-3787E2ADCF24}"/>
+                <a16:creationId xmlns:a16="http://schemas.microsoft.com/office/drawing/2014/main" id="{E9A42584-AF0D-FAE4-D2EC-84D899ACBEBC}"/>
               </a:ext>
             </a:extLst>
           </p:cNvPr>
@@ -1645,13 +2283,1825 @@
     </p:spTree>
     <p:extLst>
       <p:ext uri="{BB962C8B-B14F-4D97-AF65-F5344CB8AC3E}">
-        <p14:creationId xmlns:p14="http://schemas.microsoft.com/office/powerpoint/2010/main" val="1923956772"/>
+        <p14:creationId xmlns:p14="http://schemas.microsoft.com/office/powerpoint/2010/main" val="2149219149"/>
       </p:ext>
     </p:extLst>
   </p:cSld>
   <p:clrMapOvr>
     <a:masterClrMapping/>
   </p:clrMapOvr>
+</p:sldLayout>
+</file>
+
+<file path=ppt/slideLayouts/slideLayout3.xml><?xml version="1.0" encoding="utf-8"?>
+<p:sldLayout xmlns:a="http://schemas.openxmlformats.org/drawingml/2006/main" xmlns:r="http://schemas.openxmlformats.org/officeDocument/2006/relationships" xmlns:p="http://schemas.openxmlformats.org/presentationml/2006/main" type="secHead" preserve="1">
+  <p:cSld name="Section Header">
+    <p:spTree>
+      <p:nvGrpSpPr>
+        <p:cNvPr id="1" name=""/>
+        <p:cNvGrpSpPr/>
+        <p:nvPr/>
+      </p:nvGrpSpPr>
+      <p:grpSpPr>
+        <a:xfrm>
+          <a:off x="0" y="0"/>
+          <a:ext cx="0" cy="0"/>
+          <a:chOff x="0" y="0"/>
+          <a:chExt cx="0" cy="0"/>
+        </a:xfrm>
+      </p:grpSpPr>
+      <p:sp>
+        <p:nvSpPr>
+          <p:cNvPr id="2" name="Title 1">
+            <a:extLst>
+              <a:ext uri="{FF2B5EF4-FFF2-40B4-BE49-F238E27FC236}">
+                <a16:creationId xmlns:a16="http://schemas.microsoft.com/office/drawing/2014/main" id="{9740D30A-71A3-6F7F-6058-724AFFC76D9C}"/>
+              </a:ext>
+            </a:extLst>
+          </p:cNvPr>
+          <p:cNvSpPr>
+            <a:spLocks noGrp="1"/>
+          </p:cNvSpPr>
+          <p:nvPr>
+            <p:ph type="title"/>
+          </p:nvPr>
+        </p:nvSpPr>
+        <p:spPr>
+          <a:xfrm>
+            <a:off x="623888" y="1282304"/>
+            <a:ext cx="7886700" cy="2139553"/>
+          </a:xfrm>
+        </p:spPr>
+        <p:txBody>
+          <a:bodyPr anchor="b"/>
+          <a:lstStyle>
+            <a:lvl1pPr>
+              <a:defRPr sz="4500"/>
+            </a:lvl1pPr>
+          </a:lstStyle>
+          <a:p>
+            <a:r>
+              <a:rPr lang="en-US"/>
+              <a:t>Click to edit Master title style</a:t>
+            </a:r>
+          </a:p>
+        </p:txBody>
+      </p:sp>
+      <p:sp>
+        <p:nvSpPr>
+          <p:cNvPr id="3" name="Text Placeholder 2">
+            <a:extLst>
+              <a:ext uri="{FF2B5EF4-FFF2-40B4-BE49-F238E27FC236}">
+                <a16:creationId xmlns:a16="http://schemas.microsoft.com/office/drawing/2014/main" id="{18B91715-3488-ABCD-31B3-96971C824355}"/>
+              </a:ext>
+            </a:extLst>
+          </p:cNvPr>
+          <p:cNvSpPr>
+            <a:spLocks noGrp="1"/>
+          </p:cNvSpPr>
+          <p:nvPr>
+            <p:ph type="body" idx="1"/>
+          </p:nvPr>
+        </p:nvSpPr>
+        <p:spPr>
+          <a:xfrm>
+            <a:off x="623888" y="3442098"/>
+            <a:ext cx="7886700" cy="1125140"/>
+          </a:xfrm>
+        </p:spPr>
+        <p:txBody>
+          <a:bodyPr/>
+          <a:lstStyle>
+            <a:lvl1pPr marL="0" indent="0">
+              <a:buNone/>
+              <a:defRPr sz="1800">
+                <a:solidFill>
+                  <a:schemeClr val="tx1">
+                    <a:tint val="82000"/>
+                  </a:schemeClr>
+                </a:solidFill>
+              </a:defRPr>
+            </a:lvl1pPr>
+            <a:lvl2pPr marL="342900" indent="0">
+              <a:buNone/>
+              <a:defRPr sz="1500">
+                <a:solidFill>
+                  <a:schemeClr val="tx1">
+                    <a:tint val="82000"/>
+                  </a:schemeClr>
+                </a:solidFill>
+              </a:defRPr>
+            </a:lvl2pPr>
+            <a:lvl3pPr marL="685800" indent="0">
+              <a:buNone/>
+              <a:defRPr sz="1350">
+                <a:solidFill>
+                  <a:schemeClr val="tx1">
+                    <a:tint val="82000"/>
+                  </a:schemeClr>
+                </a:solidFill>
+              </a:defRPr>
+            </a:lvl3pPr>
+            <a:lvl4pPr marL="1028700" indent="0">
+              <a:buNone/>
+              <a:defRPr sz="1200">
+                <a:solidFill>
+                  <a:schemeClr val="tx1">
+                    <a:tint val="82000"/>
+                  </a:schemeClr>
+                </a:solidFill>
+              </a:defRPr>
+            </a:lvl4pPr>
+            <a:lvl5pPr marL="1371600" indent="0">
+              <a:buNone/>
+              <a:defRPr sz="1200">
+                <a:solidFill>
+                  <a:schemeClr val="tx1">
+                    <a:tint val="82000"/>
+                  </a:schemeClr>
+                </a:solidFill>
+              </a:defRPr>
+            </a:lvl5pPr>
+            <a:lvl6pPr marL="1714500" indent="0">
+              <a:buNone/>
+              <a:defRPr sz="1200">
+                <a:solidFill>
+                  <a:schemeClr val="tx1">
+                    <a:tint val="82000"/>
+                  </a:schemeClr>
+                </a:solidFill>
+              </a:defRPr>
+            </a:lvl6pPr>
+            <a:lvl7pPr marL="2057400" indent="0">
+              <a:buNone/>
+              <a:defRPr sz="1200">
+                <a:solidFill>
+                  <a:schemeClr val="tx1">
+                    <a:tint val="82000"/>
+                  </a:schemeClr>
+                </a:solidFill>
+              </a:defRPr>
+            </a:lvl7pPr>
+            <a:lvl8pPr marL="2400300" indent="0">
+              <a:buNone/>
+              <a:defRPr sz="1200">
+                <a:solidFill>
+                  <a:schemeClr val="tx1">
+                    <a:tint val="82000"/>
+                  </a:schemeClr>
+                </a:solidFill>
+              </a:defRPr>
+            </a:lvl8pPr>
+            <a:lvl9pPr marL="2743200" indent="0">
+              <a:buNone/>
+              <a:defRPr sz="1200">
+                <a:solidFill>
+                  <a:schemeClr val="tx1">
+                    <a:tint val="82000"/>
+                  </a:schemeClr>
+                </a:solidFill>
+              </a:defRPr>
+            </a:lvl9pPr>
+          </a:lstStyle>
+          <a:p>
+            <a:pPr lvl="0"/>
+            <a:r>
+              <a:rPr lang="en-US"/>
+              <a:t>Click to edit Master text styles</a:t>
+            </a:r>
+          </a:p>
+        </p:txBody>
+      </p:sp>
+      <p:sp>
+        <p:nvSpPr>
+          <p:cNvPr id="4" name="Date Placeholder 3">
+            <a:extLst>
+              <a:ext uri="{FF2B5EF4-FFF2-40B4-BE49-F238E27FC236}">
+                <a16:creationId xmlns:a16="http://schemas.microsoft.com/office/drawing/2014/main" id="{8E0456C9-14E6-EBCA-ED0A-170EB7280F79}"/>
+              </a:ext>
+            </a:extLst>
+          </p:cNvPr>
+          <p:cNvSpPr>
+            <a:spLocks noGrp="1"/>
+          </p:cNvSpPr>
+          <p:nvPr>
+            <p:ph type="dt" sz="half" idx="10"/>
+          </p:nvPr>
+        </p:nvSpPr>
+        <p:spPr/>
+        <p:txBody>
+          <a:bodyPr/>
+          <a:lstStyle/>
+          <a:p>
+            <a:fld id="{CE65D3C8-C09A-499B-9407-1B57987B4750}" type="datetimeFigureOut">
+              <a:rPr lang="en-US" smtClean="0"/>
+              <a:t>2/3/2026</a:t>
+            </a:fld>
+            <a:endParaRPr lang="en-US"/>
+          </a:p>
+        </p:txBody>
+      </p:sp>
+      <p:sp>
+        <p:nvSpPr>
+          <p:cNvPr id="5" name="Footer Placeholder 4">
+            <a:extLst>
+              <a:ext uri="{FF2B5EF4-FFF2-40B4-BE49-F238E27FC236}">
+                <a16:creationId xmlns:a16="http://schemas.microsoft.com/office/drawing/2014/main" id="{F63958EC-7274-35E1-2412-9263C6541B84}"/>
+              </a:ext>
+            </a:extLst>
+          </p:cNvPr>
+          <p:cNvSpPr>
+            <a:spLocks noGrp="1"/>
+          </p:cNvSpPr>
+          <p:nvPr>
+            <p:ph type="ftr" sz="quarter" idx="11"/>
+          </p:nvPr>
+        </p:nvSpPr>
+        <p:spPr/>
+        <p:txBody>
+          <a:bodyPr/>
+          <a:lstStyle/>
+          <a:p>
+            <a:endParaRPr lang="en-US"/>
+          </a:p>
+        </p:txBody>
+      </p:sp>
+      <p:sp>
+        <p:nvSpPr>
+          <p:cNvPr id="6" name="Slide Number Placeholder 5">
+            <a:extLst>
+              <a:ext uri="{FF2B5EF4-FFF2-40B4-BE49-F238E27FC236}">
+                <a16:creationId xmlns:a16="http://schemas.microsoft.com/office/drawing/2014/main" id="{89B5130F-1F9F-3DF2-875B-3B5C39DBAD9E}"/>
+              </a:ext>
+            </a:extLst>
+          </p:cNvPr>
+          <p:cNvSpPr>
+            <a:spLocks noGrp="1"/>
+          </p:cNvSpPr>
+          <p:nvPr>
+            <p:ph type="sldNum" sz="quarter" idx="12"/>
+          </p:nvPr>
+        </p:nvSpPr>
+        <p:spPr/>
+        <p:txBody>
+          <a:bodyPr/>
+          <a:lstStyle/>
+          <a:p>
+            <a:fld id="{7402C3E2-CA08-4EA3-8720-6BC592FEBF98}" type="slidenum">
+              <a:rPr lang="en-US" smtClean="0"/>
+              <a:t>‹#›</a:t>
+            </a:fld>
+            <a:endParaRPr lang="en-US"/>
+          </a:p>
+        </p:txBody>
+      </p:sp>
+    </p:spTree>
+    <p:extLst>
+      <p:ext uri="{BB962C8B-B14F-4D97-AF65-F5344CB8AC3E}">
+        <p14:creationId xmlns:p14="http://schemas.microsoft.com/office/powerpoint/2010/main" val="1755502331"/>
+      </p:ext>
+    </p:extLst>
+  </p:cSld>
+  <p:clrMapOvr>
+    <a:masterClrMapping/>
+  </p:clrMapOvr>
+  <p:hf sldNum="0" hdr="0" ftr="0" dt="0"/>
+</p:sldLayout>
+</file>
+
+<file path=ppt/slideLayouts/slideLayout4.xml><?xml version="1.0" encoding="utf-8"?>
+<p:sldLayout xmlns:a="http://schemas.openxmlformats.org/drawingml/2006/main" xmlns:r="http://schemas.openxmlformats.org/officeDocument/2006/relationships" xmlns:p="http://schemas.openxmlformats.org/presentationml/2006/main" type="twoObj" preserve="1">
+  <p:cSld name="Two Content">
+    <p:spTree>
+      <p:nvGrpSpPr>
+        <p:cNvPr id="1" name=""/>
+        <p:cNvGrpSpPr/>
+        <p:nvPr/>
+      </p:nvGrpSpPr>
+      <p:grpSpPr>
+        <a:xfrm>
+          <a:off x="0" y="0"/>
+          <a:ext cx="0" cy="0"/>
+          <a:chOff x="0" y="0"/>
+          <a:chExt cx="0" cy="0"/>
+        </a:xfrm>
+      </p:grpSpPr>
+      <p:sp>
+        <p:nvSpPr>
+          <p:cNvPr id="2" name="Title 1">
+            <a:extLst>
+              <a:ext uri="{FF2B5EF4-FFF2-40B4-BE49-F238E27FC236}">
+                <a16:creationId xmlns:a16="http://schemas.microsoft.com/office/drawing/2014/main" id="{1EA10F3B-60DC-FAE3-BD9D-7D5EF9CD3117}"/>
+              </a:ext>
+            </a:extLst>
+          </p:cNvPr>
+          <p:cNvSpPr>
+            <a:spLocks noGrp="1"/>
+          </p:cNvSpPr>
+          <p:nvPr>
+            <p:ph type="title"/>
+          </p:nvPr>
+        </p:nvSpPr>
+        <p:spPr/>
+        <p:txBody>
+          <a:bodyPr/>
+          <a:lstStyle/>
+          <a:p>
+            <a:r>
+              <a:rPr lang="en-US"/>
+              <a:t>Click to edit Master title style</a:t>
+            </a:r>
+          </a:p>
+        </p:txBody>
+      </p:sp>
+      <p:sp>
+        <p:nvSpPr>
+          <p:cNvPr id="3" name="Content Placeholder 2">
+            <a:extLst>
+              <a:ext uri="{FF2B5EF4-FFF2-40B4-BE49-F238E27FC236}">
+                <a16:creationId xmlns:a16="http://schemas.microsoft.com/office/drawing/2014/main" id="{ED9DAAF8-7B98-F17D-9C6F-D7F0228BD5E3}"/>
+              </a:ext>
+            </a:extLst>
+          </p:cNvPr>
+          <p:cNvSpPr>
+            <a:spLocks noGrp="1"/>
+          </p:cNvSpPr>
+          <p:nvPr>
+            <p:ph sz="half" idx="1"/>
+          </p:nvPr>
+        </p:nvSpPr>
+        <p:spPr>
+          <a:xfrm>
+            <a:off x="628650" y="1369219"/>
+            <a:ext cx="3886200" cy="3263504"/>
+          </a:xfrm>
+        </p:spPr>
+        <p:txBody>
+          <a:bodyPr/>
+          <a:lstStyle/>
+          <a:p>
+            <a:pPr lvl="0"/>
+            <a:r>
+              <a:rPr lang="en-US"/>
+              <a:t>Click to edit Master text styles</a:t>
+            </a:r>
+          </a:p>
+          <a:p>
+            <a:pPr lvl="1"/>
+            <a:r>
+              <a:rPr lang="en-US"/>
+              <a:t>Second level</a:t>
+            </a:r>
+          </a:p>
+          <a:p>
+            <a:pPr lvl="2"/>
+            <a:r>
+              <a:rPr lang="en-US"/>
+              <a:t>Third level</a:t>
+            </a:r>
+          </a:p>
+          <a:p>
+            <a:pPr lvl="3"/>
+            <a:r>
+              <a:rPr lang="en-US"/>
+              <a:t>Fourth level</a:t>
+            </a:r>
+          </a:p>
+          <a:p>
+            <a:pPr lvl="4"/>
+            <a:r>
+              <a:rPr lang="en-US"/>
+              <a:t>Fifth level</a:t>
+            </a:r>
+          </a:p>
+        </p:txBody>
+      </p:sp>
+      <p:sp>
+        <p:nvSpPr>
+          <p:cNvPr id="4" name="Content Placeholder 3">
+            <a:extLst>
+              <a:ext uri="{FF2B5EF4-FFF2-40B4-BE49-F238E27FC236}">
+                <a16:creationId xmlns:a16="http://schemas.microsoft.com/office/drawing/2014/main" id="{A6B64479-E58A-9740-2577-2514DAD0E8DD}"/>
+              </a:ext>
+            </a:extLst>
+          </p:cNvPr>
+          <p:cNvSpPr>
+            <a:spLocks noGrp="1"/>
+          </p:cNvSpPr>
+          <p:nvPr>
+            <p:ph sz="half" idx="2"/>
+          </p:nvPr>
+        </p:nvSpPr>
+        <p:spPr>
+          <a:xfrm>
+            <a:off x="4629150" y="1369219"/>
+            <a:ext cx="3886200" cy="3263504"/>
+          </a:xfrm>
+        </p:spPr>
+        <p:txBody>
+          <a:bodyPr/>
+          <a:lstStyle/>
+          <a:p>
+            <a:pPr lvl="0"/>
+            <a:r>
+              <a:rPr lang="en-US"/>
+              <a:t>Click to edit Master text styles</a:t>
+            </a:r>
+          </a:p>
+          <a:p>
+            <a:pPr lvl="1"/>
+            <a:r>
+              <a:rPr lang="en-US"/>
+              <a:t>Second level</a:t>
+            </a:r>
+          </a:p>
+          <a:p>
+            <a:pPr lvl="2"/>
+            <a:r>
+              <a:rPr lang="en-US"/>
+              <a:t>Third level</a:t>
+            </a:r>
+          </a:p>
+          <a:p>
+            <a:pPr lvl="3"/>
+            <a:r>
+              <a:rPr lang="en-US"/>
+              <a:t>Fourth level</a:t>
+            </a:r>
+          </a:p>
+          <a:p>
+            <a:pPr lvl="4"/>
+            <a:r>
+              <a:rPr lang="en-US"/>
+              <a:t>Fifth level</a:t>
+            </a:r>
+          </a:p>
+        </p:txBody>
+      </p:sp>
+      <p:sp>
+        <p:nvSpPr>
+          <p:cNvPr id="5" name="Date Placeholder 4">
+            <a:extLst>
+              <a:ext uri="{FF2B5EF4-FFF2-40B4-BE49-F238E27FC236}">
+                <a16:creationId xmlns:a16="http://schemas.microsoft.com/office/drawing/2014/main" id="{E8212835-8701-6B48-814B-033C7BBA408D}"/>
+              </a:ext>
+            </a:extLst>
+          </p:cNvPr>
+          <p:cNvSpPr>
+            <a:spLocks noGrp="1"/>
+          </p:cNvSpPr>
+          <p:nvPr>
+            <p:ph type="dt" sz="half" idx="10"/>
+          </p:nvPr>
+        </p:nvSpPr>
+        <p:spPr/>
+        <p:txBody>
+          <a:bodyPr/>
+          <a:lstStyle/>
+          <a:p>
+            <a:fld id="{CE65D3C8-C09A-499B-9407-1B57987B4750}" type="datetimeFigureOut">
+              <a:rPr lang="en-US" smtClean="0"/>
+              <a:t>2/3/2026</a:t>
+            </a:fld>
+            <a:endParaRPr lang="en-US"/>
+          </a:p>
+        </p:txBody>
+      </p:sp>
+      <p:sp>
+        <p:nvSpPr>
+          <p:cNvPr id="6" name="Footer Placeholder 5">
+            <a:extLst>
+              <a:ext uri="{FF2B5EF4-FFF2-40B4-BE49-F238E27FC236}">
+                <a16:creationId xmlns:a16="http://schemas.microsoft.com/office/drawing/2014/main" id="{1B2D1DE1-69C0-BEC5-B66C-45BEDF06AA0C}"/>
+              </a:ext>
+            </a:extLst>
+          </p:cNvPr>
+          <p:cNvSpPr>
+            <a:spLocks noGrp="1"/>
+          </p:cNvSpPr>
+          <p:nvPr>
+            <p:ph type="ftr" sz="quarter" idx="11"/>
+          </p:nvPr>
+        </p:nvSpPr>
+        <p:spPr/>
+        <p:txBody>
+          <a:bodyPr/>
+          <a:lstStyle/>
+          <a:p>
+            <a:endParaRPr lang="en-US"/>
+          </a:p>
+        </p:txBody>
+      </p:sp>
+      <p:sp>
+        <p:nvSpPr>
+          <p:cNvPr id="7" name="Slide Number Placeholder 6">
+            <a:extLst>
+              <a:ext uri="{FF2B5EF4-FFF2-40B4-BE49-F238E27FC236}">
+                <a16:creationId xmlns:a16="http://schemas.microsoft.com/office/drawing/2014/main" id="{CB02287D-54AC-A18A-8A64-8313B3B2EC9A}"/>
+              </a:ext>
+            </a:extLst>
+          </p:cNvPr>
+          <p:cNvSpPr>
+            <a:spLocks noGrp="1"/>
+          </p:cNvSpPr>
+          <p:nvPr>
+            <p:ph type="sldNum" sz="quarter" idx="12"/>
+          </p:nvPr>
+        </p:nvSpPr>
+        <p:spPr/>
+        <p:txBody>
+          <a:bodyPr/>
+          <a:lstStyle/>
+          <a:p>
+            <a:fld id="{7402C3E2-CA08-4EA3-8720-6BC592FEBF98}" type="slidenum">
+              <a:rPr lang="en-US" smtClean="0"/>
+              <a:t>‹#›</a:t>
+            </a:fld>
+            <a:endParaRPr lang="en-US"/>
+          </a:p>
+        </p:txBody>
+      </p:sp>
+    </p:spTree>
+    <p:extLst>
+      <p:ext uri="{BB962C8B-B14F-4D97-AF65-F5344CB8AC3E}">
+        <p14:creationId xmlns:p14="http://schemas.microsoft.com/office/powerpoint/2010/main" val="2135875638"/>
+      </p:ext>
+    </p:extLst>
+  </p:cSld>
+  <p:clrMapOvr>
+    <a:masterClrMapping/>
+  </p:clrMapOvr>
+  <p:hf sldNum="0" hdr="0" ftr="0" dt="0"/>
+</p:sldLayout>
+</file>
+
+<file path=ppt/slideLayouts/slideLayout5.xml><?xml version="1.0" encoding="utf-8"?>
+<p:sldLayout xmlns:a="http://schemas.openxmlformats.org/drawingml/2006/main" xmlns:r="http://schemas.openxmlformats.org/officeDocument/2006/relationships" xmlns:p="http://schemas.openxmlformats.org/presentationml/2006/main" type="twoTxTwoObj" preserve="1">
+  <p:cSld name="Comparison">
+    <p:spTree>
+      <p:nvGrpSpPr>
+        <p:cNvPr id="1" name=""/>
+        <p:cNvGrpSpPr/>
+        <p:nvPr/>
+      </p:nvGrpSpPr>
+      <p:grpSpPr>
+        <a:xfrm>
+          <a:off x="0" y="0"/>
+          <a:ext cx="0" cy="0"/>
+          <a:chOff x="0" y="0"/>
+          <a:chExt cx="0" cy="0"/>
+        </a:xfrm>
+      </p:grpSpPr>
+      <p:sp>
+        <p:nvSpPr>
+          <p:cNvPr id="2" name="Title 1">
+            <a:extLst>
+              <a:ext uri="{FF2B5EF4-FFF2-40B4-BE49-F238E27FC236}">
+                <a16:creationId xmlns:a16="http://schemas.microsoft.com/office/drawing/2014/main" id="{5CDADF1D-B808-090B-3E3E-1A9622FA3D09}"/>
+              </a:ext>
+            </a:extLst>
+          </p:cNvPr>
+          <p:cNvSpPr>
+            <a:spLocks noGrp="1"/>
+          </p:cNvSpPr>
+          <p:nvPr>
+            <p:ph type="title"/>
+          </p:nvPr>
+        </p:nvSpPr>
+        <p:spPr>
+          <a:xfrm>
+            <a:off x="629841" y="273844"/>
+            <a:ext cx="7886700" cy="994172"/>
+          </a:xfrm>
+        </p:spPr>
+        <p:txBody>
+          <a:bodyPr/>
+          <a:lstStyle/>
+          <a:p>
+            <a:r>
+              <a:rPr lang="en-US"/>
+              <a:t>Click to edit Master title style</a:t>
+            </a:r>
+          </a:p>
+        </p:txBody>
+      </p:sp>
+      <p:sp>
+        <p:nvSpPr>
+          <p:cNvPr id="3" name="Text Placeholder 2">
+            <a:extLst>
+              <a:ext uri="{FF2B5EF4-FFF2-40B4-BE49-F238E27FC236}">
+                <a16:creationId xmlns:a16="http://schemas.microsoft.com/office/drawing/2014/main" id="{54352885-6B99-2F51-C928-A1163A91DED3}"/>
+              </a:ext>
+            </a:extLst>
+          </p:cNvPr>
+          <p:cNvSpPr>
+            <a:spLocks noGrp="1"/>
+          </p:cNvSpPr>
+          <p:nvPr>
+            <p:ph type="body" idx="1"/>
+          </p:nvPr>
+        </p:nvSpPr>
+        <p:spPr>
+          <a:xfrm>
+            <a:off x="629842" y="1260872"/>
+            <a:ext cx="3868340" cy="617934"/>
+          </a:xfrm>
+        </p:spPr>
+        <p:txBody>
+          <a:bodyPr anchor="b"/>
+          <a:lstStyle>
+            <a:lvl1pPr marL="0" indent="0">
+              <a:buNone/>
+              <a:defRPr sz="1800" b="1"/>
+            </a:lvl1pPr>
+            <a:lvl2pPr marL="342900" indent="0">
+              <a:buNone/>
+              <a:defRPr sz="1500" b="1"/>
+            </a:lvl2pPr>
+            <a:lvl3pPr marL="685800" indent="0">
+              <a:buNone/>
+              <a:defRPr sz="1350" b="1"/>
+            </a:lvl3pPr>
+            <a:lvl4pPr marL="1028700" indent="0">
+              <a:buNone/>
+              <a:defRPr sz="1200" b="1"/>
+            </a:lvl4pPr>
+            <a:lvl5pPr marL="1371600" indent="0">
+              <a:buNone/>
+              <a:defRPr sz="1200" b="1"/>
+            </a:lvl5pPr>
+            <a:lvl6pPr marL="1714500" indent="0">
+              <a:buNone/>
+              <a:defRPr sz="1200" b="1"/>
+            </a:lvl6pPr>
+            <a:lvl7pPr marL="2057400" indent="0">
+              <a:buNone/>
+              <a:defRPr sz="1200" b="1"/>
+            </a:lvl7pPr>
+            <a:lvl8pPr marL="2400300" indent="0">
+              <a:buNone/>
+              <a:defRPr sz="1200" b="1"/>
+            </a:lvl8pPr>
+            <a:lvl9pPr marL="2743200" indent="0">
+              <a:buNone/>
+              <a:defRPr sz="1200" b="1"/>
+            </a:lvl9pPr>
+          </a:lstStyle>
+          <a:p>
+            <a:pPr lvl="0"/>
+            <a:r>
+              <a:rPr lang="en-US"/>
+              <a:t>Click to edit Master text styles</a:t>
+            </a:r>
+          </a:p>
+        </p:txBody>
+      </p:sp>
+      <p:sp>
+        <p:nvSpPr>
+          <p:cNvPr id="4" name="Content Placeholder 3">
+            <a:extLst>
+              <a:ext uri="{FF2B5EF4-FFF2-40B4-BE49-F238E27FC236}">
+                <a16:creationId xmlns:a16="http://schemas.microsoft.com/office/drawing/2014/main" id="{75F992A7-467A-A23E-5AB4-7886209AA305}"/>
+              </a:ext>
+            </a:extLst>
+          </p:cNvPr>
+          <p:cNvSpPr>
+            <a:spLocks noGrp="1"/>
+          </p:cNvSpPr>
+          <p:nvPr>
+            <p:ph sz="half" idx="2"/>
+          </p:nvPr>
+        </p:nvSpPr>
+        <p:spPr>
+          <a:xfrm>
+            <a:off x="629842" y="1878806"/>
+            <a:ext cx="3868340" cy="2763441"/>
+          </a:xfrm>
+        </p:spPr>
+        <p:txBody>
+          <a:bodyPr/>
+          <a:lstStyle/>
+          <a:p>
+            <a:pPr lvl="0"/>
+            <a:r>
+              <a:rPr lang="en-US"/>
+              <a:t>Click to edit Master text styles</a:t>
+            </a:r>
+          </a:p>
+          <a:p>
+            <a:pPr lvl="1"/>
+            <a:r>
+              <a:rPr lang="en-US"/>
+              <a:t>Second level</a:t>
+            </a:r>
+          </a:p>
+          <a:p>
+            <a:pPr lvl="2"/>
+            <a:r>
+              <a:rPr lang="en-US"/>
+              <a:t>Third level</a:t>
+            </a:r>
+          </a:p>
+          <a:p>
+            <a:pPr lvl="3"/>
+            <a:r>
+              <a:rPr lang="en-US"/>
+              <a:t>Fourth level</a:t>
+            </a:r>
+          </a:p>
+          <a:p>
+            <a:pPr lvl="4"/>
+            <a:r>
+              <a:rPr lang="en-US"/>
+              <a:t>Fifth level</a:t>
+            </a:r>
+          </a:p>
+        </p:txBody>
+      </p:sp>
+      <p:sp>
+        <p:nvSpPr>
+          <p:cNvPr id="5" name="Text Placeholder 4">
+            <a:extLst>
+              <a:ext uri="{FF2B5EF4-FFF2-40B4-BE49-F238E27FC236}">
+                <a16:creationId xmlns:a16="http://schemas.microsoft.com/office/drawing/2014/main" id="{697D1A60-E04C-1D47-E97A-3B0FB7AA8540}"/>
+              </a:ext>
+            </a:extLst>
+          </p:cNvPr>
+          <p:cNvSpPr>
+            <a:spLocks noGrp="1"/>
+          </p:cNvSpPr>
+          <p:nvPr>
+            <p:ph type="body" sz="quarter" idx="3"/>
+          </p:nvPr>
+        </p:nvSpPr>
+        <p:spPr>
+          <a:xfrm>
+            <a:off x="4629150" y="1260872"/>
+            <a:ext cx="3887391" cy="617934"/>
+          </a:xfrm>
+        </p:spPr>
+        <p:txBody>
+          <a:bodyPr anchor="b"/>
+          <a:lstStyle>
+            <a:lvl1pPr marL="0" indent="0">
+              <a:buNone/>
+              <a:defRPr sz="1800" b="1"/>
+            </a:lvl1pPr>
+            <a:lvl2pPr marL="342900" indent="0">
+              <a:buNone/>
+              <a:defRPr sz="1500" b="1"/>
+            </a:lvl2pPr>
+            <a:lvl3pPr marL="685800" indent="0">
+              <a:buNone/>
+              <a:defRPr sz="1350" b="1"/>
+            </a:lvl3pPr>
+            <a:lvl4pPr marL="1028700" indent="0">
+              <a:buNone/>
+              <a:defRPr sz="1200" b="1"/>
+            </a:lvl4pPr>
+            <a:lvl5pPr marL="1371600" indent="0">
+              <a:buNone/>
+              <a:defRPr sz="1200" b="1"/>
+            </a:lvl5pPr>
+            <a:lvl6pPr marL="1714500" indent="0">
+              <a:buNone/>
+              <a:defRPr sz="1200" b="1"/>
+            </a:lvl6pPr>
+            <a:lvl7pPr marL="2057400" indent="0">
+              <a:buNone/>
+              <a:defRPr sz="1200" b="1"/>
+            </a:lvl7pPr>
+            <a:lvl8pPr marL="2400300" indent="0">
+              <a:buNone/>
+              <a:defRPr sz="1200" b="1"/>
+            </a:lvl8pPr>
+            <a:lvl9pPr marL="2743200" indent="0">
+              <a:buNone/>
+              <a:defRPr sz="1200" b="1"/>
+            </a:lvl9pPr>
+          </a:lstStyle>
+          <a:p>
+            <a:pPr lvl="0"/>
+            <a:r>
+              <a:rPr lang="en-US"/>
+              <a:t>Click to edit Master text styles</a:t>
+            </a:r>
+          </a:p>
+        </p:txBody>
+      </p:sp>
+      <p:sp>
+        <p:nvSpPr>
+          <p:cNvPr id="6" name="Content Placeholder 5">
+            <a:extLst>
+              <a:ext uri="{FF2B5EF4-FFF2-40B4-BE49-F238E27FC236}">
+                <a16:creationId xmlns:a16="http://schemas.microsoft.com/office/drawing/2014/main" id="{CC9B184D-5ABD-536E-8B01-3C7F9ED59EB5}"/>
+              </a:ext>
+            </a:extLst>
+          </p:cNvPr>
+          <p:cNvSpPr>
+            <a:spLocks noGrp="1"/>
+          </p:cNvSpPr>
+          <p:nvPr>
+            <p:ph sz="quarter" idx="4"/>
+          </p:nvPr>
+        </p:nvSpPr>
+        <p:spPr>
+          <a:xfrm>
+            <a:off x="4629150" y="1878806"/>
+            <a:ext cx="3887391" cy="2763441"/>
+          </a:xfrm>
+        </p:spPr>
+        <p:txBody>
+          <a:bodyPr/>
+          <a:lstStyle/>
+          <a:p>
+            <a:pPr lvl="0"/>
+            <a:r>
+              <a:rPr lang="en-US"/>
+              <a:t>Click to edit Master text styles</a:t>
+            </a:r>
+          </a:p>
+          <a:p>
+            <a:pPr lvl="1"/>
+            <a:r>
+              <a:rPr lang="en-US"/>
+              <a:t>Second level</a:t>
+            </a:r>
+          </a:p>
+          <a:p>
+            <a:pPr lvl="2"/>
+            <a:r>
+              <a:rPr lang="en-US"/>
+              <a:t>Third level</a:t>
+            </a:r>
+          </a:p>
+          <a:p>
+            <a:pPr lvl="3"/>
+            <a:r>
+              <a:rPr lang="en-US"/>
+              <a:t>Fourth level</a:t>
+            </a:r>
+          </a:p>
+          <a:p>
+            <a:pPr lvl="4"/>
+            <a:r>
+              <a:rPr lang="en-US"/>
+              <a:t>Fifth level</a:t>
+            </a:r>
+          </a:p>
+        </p:txBody>
+      </p:sp>
+      <p:sp>
+        <p:nvSpPr>
+          <p:cNvPr id="7" name="Date Placeholder 6">
+            <a:extLst>
+              <a:ext uri="{FF2B5EF4-FFF2-40B4-BE49-F238E27FC236}">
+                <a16:creationId xmlns:a16="http://schemas.microsoft.com/office/drawing/2014/main" id="{9498AE1C-7DCE-CE58-29C5-B6474A7D57D1}"/>
+              </a:ext>
+            </a:extLst>
+          </p:cNvPr>
+          <p:cNvSpPr>
+            <a:spLocks noGrp="1"/>
+          </p:cNvSpPr>
+          <p:nvPr>
+            <p:ph type="dt" sz="half" idx="10"/>
+          </p:nvPr>
+        </p:nvSpPr>
+        <p:spPr/>
+        <p:txBody>
+          <a:bodyPr/>
+          <a:lstStyle/>
+          <a:p>
+            <a:fld id="{CE65D3C8-C09A-499B-9407-1B57987B4750}" type="datetimeFigureOut">
+              <a:rPr lang="en-US" smtClean="0"/>
+              <a:t>2/3/2026</a:t>
+            </a:fld>
+            <a:endParaRPr lang="en-US"/>
+          </a:p>
+        </p:txBody>
+      </p:sp>
+      <p:sp>
+        <p:nvSpPr>
+          <p:cNvPr id="8" name="Footer Placeholder 7">
+            <a:extLst>
+              <a:ext uri="{FF2B5EF4-FFF2-40B4-BE49-F238E27FC236}">
+                <a16:creationId xmlns:a16="http://schemas.microsoft.com/office/drawing/2014/main" id="{12A45B4F-C493-3C2E-E0F5-FEF8D77E0804}"/>
+              </a:ext>
+            </a:extLst>
+          </p:cNvPr>
+          <p:cNvSpPr>
+            <a:spLocks noGrp="1"/>
+          </p:cNvSpPr>
+          <p:nvPr>
+            <p:ph type="ftr" sz="quarter" idx="11"/>
+          </p:nvPr>
+        </p:nvSpPr>
+        <p:spPr/>
+        <p:txBody>
+          <a:bodyPr/>
+          <a:lstStyle/>
+          <a:p>
+            <a:endParaRPr lang="en-US"/>
+          </a:p>
+        </p:txBody>
+      </p:sp>
+      <p:sp>
+        <p:nvSpPr>
+          <p:cNvPr id="9" name="Slide Number Placeholder 8">
+            <a:extLst>
+              <a:ext uri="{FF2B5EF4-FFF2-40B4-BE49-F238E27FC236}">
+                <a16:creationId xmlns:a16="http://schemas.microsoft.com/office/drawing/2014/main" id="{5B75133F-395C-3AA1-6F9F-39B2D230B58E}"/>
+              </a:ext>
+            </a:extLst>
+          </p:cNvPr>
+          <p:cNvSpPr>
+            <a:spLocks noGrp="1"/>
+          </p:cNvSpPr>
+          <p:nvPr>
+            <p:ph type="sldNum" sz="quarter" idx="12"/>
+          </p:nvPr>
+        </p:nvSpPr>
+        <p:spPr/>
+        <p:txBody>
+          <a:bodyPr/>
+          <a:lstStyle/>
+          <a:p>
+            <a:fld id="{7402C3E2-CA08-4EA3-8720-6BC592FEBF98}" type="slidenum">
+              <a:rPr lang="en-US" smtClean="0"/>
+              <a:t>‹#›</a:t>
+            </a:fld>
+            <a:endParaRPr lang="en-US"/>
+          </a:p>
+        </p:txBody>
+      </p:sp>
+    </p:spTree>
+    <p:extLst>
+      <p:ext uri="{BB962C8B-B14F-4D97-AF65-F5344CB8AC3E}">
+        <p14:creationId xmlns:p14="http://schemas.microsoft.com/office/powerpoint/2010/main" val="937068494"/>
+      </p:ext>
+    </p:extLst>
+  </p:cSld>
+  <p:clrMapOvr>
+    <a:masterClrMapping/>
+  </p:clrMapOvr>
+  <p:hf sldNum="0" hdr="0" ftr="0" dt="0"/>
+</p:sldLayout>
+</file>
+
+<file path=ppt/slideLayouts/slideLayout6.xml><?xml version="1.0" encoding="utf-8"?>
+<p:sldLayout xmlns:a="http://schemas.openxmlformats.org/drawingml/2006/main" xmlns:r="http://schemas.openxmlformats.org/officeDocument/2006/relationships" xmlns:p="http://schemas.openxmlformats.org/presentationml/2006/main" type="titleOnly" preserve="1">
+  <p:cSld name="Title Only">
+    <p:spTree>
+      <p:nvGrpSpPr>
+        <p:cNvPr id="1" name=""/>
+        <p:cNvGrpSpPr/>
+        <p:nvPr/>
+      </p:nvGrpSpPr>
+      <p:grpSpPr>
+        <a:xfrm>
+          <a:off x="0" y="0"/>
+          <a:ext cx="0" cy="0"/>
+          <a:chOff x="0" y="0"/>
+          <a:chExt cx="0" cy="0"/>
+        </a:xfrm>
+      </p:grpSpPr>
+      <p:sp>
+        <p:nvSpPr>
+          <p:cNvPr id="2" name="Title 1">
+            <a:extLst>
+              <a:ext uri="{FF2B5EF4-FFF2-40B4-BE49-F238E27FC236}">
+                <a16:creationId xmlns:a16="http://schemas.microsoft.com/office/drawing/2014/main" id="{A3942946-3813-7605-1CBA-4BD82D7191B6}"/>
+              </a:ext>
+            </a:extLst>
+          </p:cNvPr>
+          <p:cNvSpPr>
+            <a:spLocks noGrp="1"/>
+          </p:cNvSpPr>
+          <p:nvPr>
+            <p:ph type="title"/>
+          </p:nvPr>
+        </p:nvSpPr>
+        <p:spPr/>
+        <p:txBody>
+          <a:bodyPr/>
+          <a:lstStyle/>
+          <a:p>
+            <a:r>
+              <a:rPr lang="en-US"/>
+              <a:t>Click to edit Master title style</a:t>
+            </a:r>
+          </a:p>
+        </p:txBody>
+      </p:sp>
+      <p:sp>
+        <p:nvSpPr>
+          <p:cNvPr id="3" name="Date Placeholder 2">
+            <a:extLst>
+              <a:ext uri="{FF2B5EF4-FFF2-40B4-BE49-F238E27FC236}">
+                <a16:creationId xmlns:a16="http://schemas.microsoft.com/office/drawing/2014/main" id="{AF9A6B5D-016A-FDC2-5278-A8F49C3B27BA}"/>
+              </a:ext>
+            </a:extLst>
+          </p:cNvPr>
+          <p:cNvSpPr>
+            <a:spLocks noGrp="1"/>
+          </p:cNvSpPr>
+          <p:nvPr>
+            <p:ph type="dt" sz="half" idx="10"/>
+          </p:nvPr>
+        </p:nvSpPr>
+        <p:spPr/>
+        <p:txBody>
+          <a:bodyPr/>
+          <a:lstStyle/>
+          <a:p>
+            <a:fld id="{CE65D3C8-C09A-499B-9407-1B57987B4750}" type="datetimeFigureOut">
+              <a:rPr lang="en-US" smtClean="0"/>
+              <a:t>2/3/2026</a:t>
+            </a:fld>
+            <a:endParaRPr lang="en-US"/>
+          </a:p>
+        </p:txBody>
+      </p:sp>
+      <p:sp>
+        <p:nvSpPr>
+          <p:cNvPr id="4" name="Footer Placeholder 3">
+            <a:extLst>
+              <a:ext uri="{FF2B5EF4-FFF2-40B4-BE49-F238E27FC236}">
+                <a16:creationId xmlns:a16="http://schemas.microsoft.com/office/drawing/2014/main" id="{A97F2829-3B8C-2787-283A-A9E045E159EC}"/>
+              </a:ext>
+            </a:extLst>
+          </p:cNvPr>
+          <p:cNvSpPr>
+            <a:spLocks noGrp="1"/>
+          </p:cNvSpPr>
+          <p:nvPr>
+            <p:ph type="ftr" sz="quarter" idx="11"/>
+          </p:nvPr>
+        </p:nvSpPr>
+        <p:spPr/>
+        <p:txBody>
+          <a:bodyPr/>
+          <a:lstStyle/>
+          <a:p>
+            <a:endParaRPr lang="en-US"/>
+          </a:p>
+        </p:txBody>
+      </p:sp>
+      <p:sp>
+        <p:nvSpPr>
+          <p:cNvPr id="5" name="Slide Number Placeholder 4">
+            <a:extLst>
+              <a:ext uri="{FF2B5EF4-FFF2-40B4-BE49-F238E27FC236}">
+                <a16:creationId xmlns:a16="http://schemas.microsoft.com/office/drawing/2014/main" id="{347D682D-0CC3-D266-75E4-E751EC2E64C4}"/>
+              </a:ext>
+            </a:extLst>
+          </p:cNvPr>
+          <p:cNvSpPr>
+            <a:spLocks noGrp="1"/>
+          </p:cNvSpPr>
+          <p:nvPr>
+            <p:ph type="sldNum" sz="quarter" idx="12"/>
+          </p:nvPr>
+        </p:nvSpPr>
+        <p:spPr/>
+        <p:txBody>
+          <a:bodyPr/>
+          <a:lstStyle/>
+          <a:p>
+            <a:fld id="{7402C3E2-CA08-4EA3-8720-6BC592FEBF98}" type="slidenum">
+              <a:rPr lang="en-US" smtClean="0"/>
+              <a:t>‹#›</a:t>
+            </a:fld>
+            <a:endParaRPr lang="en-US"/>
+          </a:p>
+        </p:txBody>
+      </p:sp>
+    </p:spTree>
+    <p:extLst>
+      <p:ext uri="{BB962C8B-B14F-4D97-AF65-F5344CB8AC3E}">
+        <p14:creationId xmlns:p14="http://schemas.microsoft.com/office/powerpoint/2010/main" val="2039077326"/>
+      </p:ext>
+    </p:extLst>
+  </p:cSld>
+  <p:clrMapOvr>
+    <a:masterClrMapping/>
+  </p:clrMapOvr>
+  <p:hf sldNum="0" hdr="0" ftr="0" dt="0"/>
+</p:sldLayout>
+</file>
+
+<file path=ppt/slideLayouts/slideLayout7.xml><?xml version="1.0" encoding="utf-8"?>
+<p:sldLayout xmlns:a="http://schemas.openxmlformats.org/drawingml/2006/main" xmlns:r="http://schemas.openxmlformats.org/officeDocument/2006/relationships" xmlns:p="http://schemas.openxmlformats.org/presentationml/2006/main" type="blank" preserve="1">
+  <p:cSld name="Blank">
+    <p:spTree>
+      <p:nvGrpSpPr>
+        <p:cNvPr id="1" name=""/>
+        <p:cNvGrpSpPr/>
+        <p:nvPr/>
+      </p:nvGrpSpPr>
+      <p:grpSpPr>
+        <a:xfrm>
+          <a:off x="0" y="0"/>
+          <a:ext cx="0" cy="0"/>
+          <a:chOff x="0" y="0"/>
+          <a:chExt cx="0" cy="0"/>
+        </a:xfrm>
+      </p:grpSpPr>
+      <p:sp>
+        <p:nvSpPr>
+          <p:cNvPr id="2" name="Date Placeholder 1">
+            <a:extLst>
+              <a:ext uri="{FF2B5EF4-FFF2-40B4-BE49-F238E27FC236}">
+                <a16:creationId xmlns:a16="http://schemas.microsoft.com/office/drawing/2014/main" id="{8D16FE28-4194-1478-69D7-8BEC7A87CFE8}"/>
+              </a:ext>
+            </a:extLst>
+          </p:cNvPr>
+          <p:cNvSpPr>
+            <a:spLocks noGrp="1"/>
+          </p:cNvSpPr>
+          <p:nvPr>
+            <p:ph type="dt" sz="half" idx="10"/>
+          </p:nvPr>
+        </p:nvSpPr>
+        <p:spPr/>
+        <p:txBody>
+          <a:bodyPr/>
+          <a:lstStyle/>
+          <a:p>
+            <a:fld id="{CE65D3C8-C09A-499B-9407-1B57987B4750}" type="datetimeFigureOut">
+              <a:rPr lang="en-US" smtClean="0"/>
+              <a:t>2/3/2026</a:t>
+            </a:fld>
+            <a:endParaRPr lang="en-US"/>
+          </a:p>
+        </p:txBody>
+      </p:sp>
+      <p:sp>
+        <p:nvSpPr>
+          <p:cNvPr id="3" name="Footer Placeholder 2">
+            <a:extLst>
+              <a:ext uri="{FF2B5EF4-FFF2-40B4-BE49-F238E27FC236}">
+                <a16:creationId xmlns:a16="http://schemas.microsoft.com/office/drawing/2014/main" id="{6A2E7EEE-3F80-E0D1-812B-DDF22632D02E}"/>
+              </a:ext>
+            </a:extLst>
+          </p:cNvPr>
+          <p:cNvSpPr>
+            <a:spLocks noGrp="1"/>
+          </p:cNvSpPr>
+          <p:nvPr>
+            <p:ph type="ftr" sz="quarter" idx="11"/>
+          </p:nvPr>
+        </p:nvSpPr>
+        <p:spPr/>
+        <p:txBody>
+          <a:bodyPr/>
+          <a:lstStyle/>
+          <a:p>
+            <a:endParaRPr lang="en-US"/>
+          </a:p>
+        </p:txBody>
+      </p:sp>
+      <p:sp>
+        <p:nvSpPr>
+          <p:cNvPr id="4" name="Slide Number Placeholder 3">
+            <a:extLst>
+              <a:ext uri="{FF2B5EF4-FFF2-40B4-BE49-F238E27FC236}">
+                <a16:creationId xmlns:a16="http://schemas.microsoft.com/office/drawing/2014/main" id="{98C9B6A5-8694-14F4-2A2F-D7617DD300CF}"/>
+              </a:ext>
+            </a:extLst>
+          </p:cNvPr>
+          <p:cNvSpPr>
+            <a:spLocks noGrp="1"/>
+          </p:cNvSpPr>
+          <p:nvPr>
+            <p:ph type="sldNum" sz="quarter" idx="12"/>
+          </p:nvPr>
+        </p:nvSpPr>
+        <p:spPr/>
+        <p:txBody>
+          <a:bodyPr/>
+          <a:lstStyle/>
+          <a:p>
+            <a:fld id="{7402C3E2-CA08-4EA3-8720-6BC592FEBF98}" type="slidenum">
+              <a:rPr lang="en-US" smtClean="0"/>
+              <a:t>‹#›</a:t>
+            </a:fld>
+            <a:endParaRPr lang="en-US"/>
+          </a:p>
+        </p:txBody>
+      </p:sp>
+    </p:spTree>
+    <p:extLst>
+      <p:ext uri="{BB962C8B-B14F-4D97-AF65-F5344CB8AC3E}">
+        <p14:creationId xmlns:p14="http://schemas.microsoft.com/office/powerpoint/2010/main" val="4005972840"/>
+      </p:ext>
+    </p:extLst>
+  </p:cSld>
+  <p:clrMapOvr>
+    <a:masterClrMapping/>
+  </p:clrMapOvr>
+  <p:hf sldNum="0" hdr="0" ftr="0" dt="0"/>
+</p:sldLayout>
+</file>
+
+<file path=ppt/slideLayouts/slideLayout8.xml><?xml version="1.0" encoding="utf-8"?>
+<p:sldLayout xmlns:a="http://schemas.openxmlformats.org/drawingml/2006/main" xmlns:r="http://schemas.openxmlformats.org/officeDocument/2006/relationships" xmlns:p="http://schemas.openxmlformats.org/presentationml/2006/main" type="objTx" preserve="1">
+  <p:cSld name="Content with Caption">
+    <p:spTree>
+      <p:nvGrpSpPr>
+        <p:cNvPr id="1" name=""/>
+        <p:cNvGrpSpPr/>
+        <p:nvPr/>
+      </p:nvGrpSpPr>
+      <p:grpSpPr>
+        <a:xfrm>
+          <a:off x="0" y="0"/>
+          <a:ext cx="0" cy="0"/>
+          <a:chOff x="0" y="0"/>
+          <a:chExt cx="0" cy="0"/>
+        </a:xfrm>
+      </p:grpSpPr>
+      <p:sp>
+        <p:nvSpPr>
+          <p:cNvPr id="2" name="Title 1">
+            <a:extLst>
+              <a:ext uri="{FF2B5EF4-FFF2-40B4-BE49-F238E27FC236}">
+                <a16:creationId xmlns:a16="http://schemas.microsoft.com/office/drawing/2014/main" id="{AC921BD5-2D6F-C407-F5A8-83679691B5D0}"/>
+              </a:ext>
+            </a:extLst>
+          </p:cNvPr>
+          <p:cNvSpPr>
+            <a:spLocks noGrp="1"/>
+          </p:cNvSpPr>
+          <p:nvPr>
+            <p:ph type="title"/>
+          </p:nvPr>
+        </p:nvSpPr>
+        <p:spPr>
+          <a:xfrm>
+            <a:off x="629841" y="342900"/>
+            <a:ext cx="2949178" cy="1200150"/>
+          </a:xfrm>
+        </p:spPr>
+        <p:txBody>
+          <a:bodyPr anchor="b"/>
+          <a:lstStyle>
+            <a:lvl1pPr>
+              <a:defRPr sz="2400"/>
+            </a:lvl1pPr>
+          </a:lstStyle>
+          <a:p>
+            <a:r>
+              <a:rPr lang="en-US"/>
+              <a:t>Click to edit Master title style</a:t>
+            </a:r>
+          </a:p>
+        </p:txBody>
+      </p:sp>
+      <p:sp>
+        <p:nvSpPr>
+          <p:cNvPr id="3" name="Content Placeholder 2">
+            <a:extLst>
+              <a:ext uri="{FF2B5EF4-FFF2-40B4-BE49-F238E27FC236}">
+                <a16:creationId xmlns:a16="http://schemas.microsoft.com/office/drawing/2014/main" id="{2124A2FF-7F24-374C-9F07-CD01FD9A024A}"/>
+              </a:ext>
+            </a:extLst>
+          </p:cNvPr>
+          <p:cNvSpPr>
+            <a:spLocks noGrp="1"/>
+          </p:cNvSpPr>
+          <p:nvPr>
+            <p:ph idx="1"/>
+          </p:nvPr>
+        </p:nvSpPr>
+        <p:spPr>
+          <a:xfrm>
+            <a:off x="3887391" y="740569"/>
+            <a:ext cx="4629150" cy="3655219"/>
+          </a:xfrm>
+        </p:spPr>
+        <p:txBody>
+          <a:bodyPr/>
+          <a:lstStyle>
+            <a:lvl1pPr>
+              <a:defRPr sz="2400"/>
+            </a:lvl1pPr>
+            <a:lvl2pPr>
+              <a:defRPr sz="2100"/>
+            </a:lvl2pPr>
+            <a:lvl3pPr>
+              <a:defRPr sz="1800"/>
+            </a:lvl3pPr>
+            <a:lvl4pPr>
+              <a:defRPr sz="1500"/>
+            </a:lvl4pPr>
+            <a:lvl5pPr>
+              <a:defRPr sz="1500"/>
+            </a:lvl5pPr>
+            <a:lvl6pPr>
+              <a:defRPr sz="1500"/>
+            </a:lvl6pPr>
+            <a:lvl7pPr>
+              <a:defRPr sz="1500"/>
+            </a:lvl7pPr>
+            <a:lvl8pPr>
+              <a:defRPr sz="1500"/>
+            </a:lvl8pPr>
+            <a:lvl9pPr>
+              <a:defRPr sz="1500"/>
+            </a:lvl9pPr>
+          </a:lstStyle>
+          <a:p>
+            <a:pPr lvl="0"/>
+            <a:r>
+              <a:rPr lang="en-US"/>
+              <a:t>Click to edit Master text styles</a:t>
+            </a:r>
+          </a:p>
+          <a:p>
+            <a:pPr lvl="1"/>
+            <a:r>
+              <a:rPr lang="en-US"/>
+              <a:t>Second level</a:t>
+            </a:r>
+          </a:p>
+          <a:p>
+            <a:pPr lvl="2"/>
+            <a:r>
+              <a:rPr lang="en-US"/>
+              <a:t>Third level</a:t>
+            </a:r>
+          </a:p>
+          <a:p>
+            <a:pPr lvl="3"/>
+            <a:r>
+              <a:rPr lang="en-US"/>
+              <a:t>Fourth level</a:t>
+            </a:r>
+          </a:p>
+          <a:p>
+            <a:pPr lvl="4"/>
+            <a:r>
+              <a:rPr lang="en-US"/>
+              <a:t>Fifth level</a:t>
+            </a:r>
+          </a:p>
+        </p:txBody>
+      </p:sp>
+      <p:sp>
+        <p:nvSpPr>
+          <p:cNvPr id="4" name="Text Placeholder 3">
+            <a:extLst>
+              <a:ext uri="{FF2B5EF4-FFF2-40B4-BE49-F238E27FC236}">
+                <a16:creationId xmlns:a16="http://schemas.microsoft.com/office/drawing/2014/main" id="{6BE2C74D-E605-FAE3-4CEC-2D32390E4116}"/>
+              </a:ext>
+            </a:extLst>
+          </p:cNvPr>
+          <p:cNvSpPr>
+            <a:spLocks noGrp="1"/>
+          </p:cNvSpPr>
+          <p:nvPr>
+            <p:ph type="body" sz="half" idx="2"/>
+          </p:nvPr>
+        </p:nvSpPr>
+        <p:spPr>
+          <a:xfrm>
+            <a:off x="629841" y="1543050"/>
+            <a:ext cx="2949178" cy="2858691"/>
+          </a:xfrm>
+        </p:spPr>
+        <p:txBody>
+          <a:bodyPr/>
+          <a:lstStyle>
+            <a:lvl1pPr marL="0" indent="0">
+              <a:buNone/>
+              <a:defRPr sz="1200"/>
+            </a:lvl1pPr>
+            <a:lvl2pPr marL="342900" indent="0">
+              <a:buNone/>
+              <a:defRPr sz="1050"/>
+            </a:lvl2pPr>
+            <a:lvl3pPr marL="685800" indent="0">
+              <a:buNone/>
+              <a:defRPr sz="900"/>
+            </a:lvl3pPr>
+            <a:lvl4pPr marL="1028700" indent="0">
+              <a:buNone/>
+              <a:defRPr sz="750"/>
+            </a:lvl4pPr>
+            <a:lvl5pPr marL="1371600" indent="0">
+              <a:buNone/>
+              <a:defRPr sz="750"/>
+            </a:lvl5pPr>
+            <a:lvl6pPr marL="1714500" indent="0">
+              <a:buNone/>
+              <a:defRPr sz="750"/>
+            </a:lvl6pPr>
+            <a:lvl7pPr marL="2057400" indent="0">
+              <a:buNone/>
+              <a:defRPr sz="750"/>
+            </a:lvl7pPr>
+            <a:lvl8pPr marL="2400300" indent="0">
+              <a:buNone/>
+              <a:defRPr sz="750"/>
+            </a:lvl8pPr>
+            <a:lvl9pPr marL="2743200" indent="0">
+              <a:buNone/>
+              <a:defRPr sz="750"/>
+            </a:lvl9pPr>
+          </a:lstStyle>
+          <a:p>
+            <a:pPr lvl="0"/>
+            <a:r>
+              <a:rPr lang="en-US"/>
+              <a:t>Click to edit Master text styles</a:t>
+            </a:r>
+          </a:p>
+        </p:txBody>
+      </p:sp>
+      <p:sp>
+        <p:nvSpPr>
+          <p:cNvPr id="5" name="Date Placeholder 4">
+            <a:extLst>
+              <a:ext uri="{FF2B5EF4-FFF2-40B4-BE49-F238E27FC236}">
+                <a16:creationId xmlns:a16="http://schemas.microsoft.com/office/drawing/2014/main" id="{450F438F-5470-B8FA-0D05-3DF3C0B208FF}"/>
+              </a:ext>
+            </a:extLst>
+          </p:cNvPr>
+          <p:cNvSpPr>
+            <a:spLocks noGrp="1"/>
+          </p:cNvSpPr>
+          <p:nvPr>
+            <p:ph type="dt" sz="half" idx="10"/>
+          </p:nvPr>
+        </p:nvSpPr>
+        <p:spPr/>
+        <p:txBody>
+          <a:bodyPr/>
+          <a:lstStyle/>
+          <a:p>
+            <a:fld id="{CE65D3C8-C09A-499B-9407-1B57987B4750}" type="datetimeFigureOut">
+              <a:rPr lang="en-US" smtClean="0"/>
+              <a:t>2/3/2026</a:t>
+            </a:fld>
+            <a:endParaRPr lang="en-US"/>
+          </a:p>
+        </p:txBody>
+      </p:sp>
+      <p:sp>
+        <p:nvSpPr>
+          <p:cNvPr id="6" name="Footer Placeholder 5">
+            <a:extLst>
+              <a:ext uri="{FF2B5EF4-FFF2-40B4-BE49-F238E27FC236}">
+                <a16:creationId xmlns:a16="http://schemas.microsoft.com/office/drawing/2014/main" id="{25933B2A-2CAB-0429-DA85-A8F5FEEED4FD}"/>
+              </a:ext>
+            </a:extLst>
+          </p:cNvPr>
+          <p:cNvSpPr>
+            <a:spLocks noGrp="1"/>
+          </p:cNvSpPr>
+          <p:nvPr>
+            <p:ph type="ftr" sz="quarter" idx="11"/>
+          </p:nvPr>
+        </p:nvSpPr>
+        <p:spPr/>
+        <p:txBody>
+          <a:bodyPr/>
+          <a:lstStyle/>
+          <a:p>
+            <a:endParaRPr lang="en-US"/>
+          </a:p>
+        </p:txBody>
+      </p:sp>
+      <p:sp>
+        <p:nvSpPr>
+          <p:cNvPr id="7" name="Slide Number Placeholder 6">
+            <a:extLst>
+              <a:ext uri="{FF2B5EF4-FFF2-40B4-BE49-F238E27FC236}">
+                <a16:creationId xmlns:a16="http://schemas.microsoft.com/office/drawing/2014/main" id="{4A44F9DC-12D3-6C08-CF17-A5CC8D93B80A}"/>
+              </a:ext>
+            </a:extLst>
+          </p:cNvPr>
+          <p:cNvSpPr>
+            <a:spLocks noGrp="1"/>
+          </p:cNvSpPr>
+          <p:nvPr>
+            <p:ph type="sldNum" sz="quarter" idx="12"/>
+          </p:nvPr>
+        </p:nvSpPr>
+        <p:spPr/>
+        <p:txBody>
+          <a:bodyPr/>
+          <a:lstStyle/>
+          <a:p>
+            <a:fld id="{7402C3E2-CA08-4EA3-8720-6BC592FEBF98}" type="slidenum">
+              <a:rPr lang="en-US" smtClean="0"/>
+              <a:t>‹#›</a:t>
+            </a:fld>
+            <a:endParaRPr lang="en-US"/>
+          </a:p>
+        </p:txBody>
+      </p:sp>
+    </p:spTree>
+    <p:extLst>
+      <p:ext uri="{BB962C8B-B14F-4D97-AF65-F5344CB8AC3E}">
+        <p14:creationId xmlns:p14="http://schemas.microsoft.com/office/powerpoint/2010/main" val="1418774376"/>
+      </p:ext>
+    </p:extLst>
+  </p:cSld>
+  <p:clrMapOvr>
+    <a:masterClrMapping/>
+  </p:clrMapOvr>
+  <p:hf sldNum="0" hdr="0" ftr="0" dt="0"/>
+</p:sldLayout>
+</file>
+
+<file path=ppt/slideLayouts/slideLayout9.xml><?xml version="1.0" encoding="utf-8"?>
+<p:sldLayout xmlns:a="http://schemas.openxmlformats.org/drawingml/2006/main" xmlns:r="http://schemas.openxmlformats.org/officeDocument/2006/relationships" xmlns:p="http://schemas.openxmlformats.org/presentationml/2006/main" type="picTx" preserve="1">
+  <p:cSld name="Picture with Caption">
+    <p:spTree>
+      <p:nvGrpSpPr>
+        <p:cNvPr id="1" name=""/>
+        <p:cNvGrpSpPr/>
+        <p:nvPr/>
+      </p:nvGrpSpPr>
+      <p:grpSpPr>
+        <a:xfrm>
+          <a:off x="0" y="0"/>
+          <a:ext cx="0" cy="0"/>
+          <a:chOff x="0" y="0"/>
+          <a:chExt cx="0" cy="0"/>
+        </a:xfrm>
+      </p:grpSpPr>
+      <p:sp>
+        <p:nvSpPr>
+          <p:cNvPr id="2" name="Title 1">
+            <a:extLst>
+              <a:ext uri="{FF2B5EF4-FFF2-40B4-BE49-F238E27FC236}">
+                <a16:creationId xmlns:a16="http://schemas.microsoft.com/office/drawing/2014/main" id="{8C8772E8-8550-2D74-3ABC-992FA092930C}"/>
+              </a:ext>
+            </a:extLst>
+          </p:cNvPr>
+          <p:cNvSpPr>
+            <a:spLocks noGrp="1"/>
+          </p:cNvSpPr>
+          <p:nvPr>
+            <p:ph type="title"/>
+          </p:nvPr>
+        </p:nvSpPr>
+        <p:spPr>
+          <a:xfrm>
+            <a:off x="629841" y="342900"/>
+            <a:ext cx="2949178" cy="1200150"/>
+          </a:xfrm>
+        </p:spPr>
+        <p:txBody>
+          <a:bodyPr anchor="b"/>
+          <a:lstStyle>
+            <a:lvl1pPr>
+              <a:defRPr sz="2400"/>
+            </a:lvl1pPr>
+          </a:lstStyle>
+          <a:p>
+            <a:r>
+              <a:rPr lang="en-US"/>
+              <a:t>Click to edit Master title style</a:t>
+            </a:r>
+          </a:p>
+        </p:txBody>
+      </p:sp>
+      <p:sp>
+        <p:nvSpPr>
+          <p:cNvPr id="3" name="Picture Placeholder 2">
+            <a:extLst>
+              <a:ext uri="{FF2B5EF4-FFF2-40B4-BE49-F238E27FC236}">
+                <a16:creationId xmlns:a16="http://schemas.microsoft.com/office/drawing/2014/main" id="{E5A7E7B2-A3B7-E3EF-C151-CFE48CAAAB12}"/>
+              </a:ext>
+            </a:extLst>
+          </p:cNvPr>
+          <p:cNvSpPr>
+            <a:spLocks noGrp="1"/>
+          </p:cNvSpPr>
+          <p:nvPr>
+            <p:ph type="pic" idx="1"/>
+          </p:nvPr>
+        </p:nvSpPr>
+        <p:spPr>
+          <a:xfrm>
+            <a:off x="3887391" y="740569"/>
+            <a:ext cx="4629150" cy="3655219"/>
+          </a:xfrm>
+        </p:spPr>
+        <p:txBody>
+          <a:bodyPr/>
+          <a:lstStyle>
+            <a:lvl1pPr marL="0" indent="0">
+              <a:buNone/>
+              <a:defRPr sz="2400"/>
+            </a:lvl1pPr>
+            <a:lvl2pPr marL="342900" indent="0">
+              <a:buNone/>
+              <a:defRPr sz="2100"/>
+            </a:lvl2pPr>
+            <a:lvl3pPr marL="685800" indent="0">
+              <a:buNone/>
+              <a:defRPr sz="1800"/>
+            </a:lvl3pPr>
+            <a:lvl4pPr marL="1028700" indent="0">
+              <a:buNone/>
+              <a:defRPr sz="1500"/>
+            </a:lvl4pPr>
+            <a:lvl5pPr marL="1371600" indent="0">
+              <a:buNone/>
+              <a:defRPr sz="1500"/>
+            </a:lvl5pPr>
+            <a:lvl6pPr marL="1714500" indent="0">
+              <a:buNone/>
+              <a:defRPr sz="1500"/>
+            </a:lvl6pPr>
+            <a:lvl7pPr marL="2057400" indent="0">
+              <a:buNone/>
+              <a:defRPr sz="1500"/>
+            </a:lvl7pPr>
+            <a:lvl8pPr marL="2400300" indent="0">
+              <a:buNone/>
+              <a:defRPr sz="1500"/>
+            </a:lvl8pPr>
+            <a:lvl9pPr marL="2743200" indent="0">
+              <a:buNone/>
+              <a:defRPr sz="1500"/>
+            </a:lvl9pPr>
+          </a:lstStyle>
+          <a:p>
+            <a:endParaRPr lang="en-US"/>
+          </a:p>
+        </p:txBody>
+      </p:sp>
+      <p:sp>
+        <p:nvSpPr>
+          <p:cNvPr id="4" name="Text Placeholder 3">
+            <a:extLst>
+              <a:ext uri="{FF2B5EF4-FFF2-40B4-BE49-F238E27FC236}">
+                <a16:creationId xmlns:a16="http://schemas.microsoft.com/office/drawing/2014/main" id="{4B515BEC-DF23-8B58-7E5D-21DCC1B5F2D4}"/>
+              </a:ext>
+            </a:extLst>
+          </p:cNvPr>
+          <p:cNvSpPr>
+            <a:spLocks noGrp="1"/>
+          </p:cNvSpPr>
+          <p:nvPr>
+            <p:ph type="body" sz="half" idx="2"/>
+          </p:nvPr>
+        </p:nvSpPr>
+        <p:spPr>
+          <a:xfrm>
+            <a:off x="629841" y="1543050"/>
+            <a:ext cx="2949178" cy="2858691"/>
+          </a:xfrm>
+        </p:spPr>
+        <p:txBody>
+          <a:bodyPr/>
+          <a:lstStyle>
+            <a:lvl1pPr marL="0" indent="0">
+              <a:buNone/>
+              <a:defRPr sz="1200"/>
+            </a:lvl1pPr>
+            <a:lvl2pPr marL="342900" indent="0">
+              <a:buNone/>
+              <a:defRPr sz="1050"/>
+            </a:lvl2pPr>
+            <a:lvl3pPr marL="685800" indent="0">
+              <a:buNone/>
+              <a:defRPr sz="900"/>
+            </a:lvl3pPr>
+            <a:lvl4pPr marL="1028700" indent="0">
+              <a:buNone/>
+              <a:defRPr sz="750"/>
+            </a:lvl4pPr>
+            <a:lvl5pPr marL="1371600" indent="0">
+              <a:buNone/>
+              <a:defRPr sz="750"/>
+            </a:lvl5pPr>
+            <a:lvl6pPr marL="1714500" indent="0">
+              <a:buNone/>
+              <a:defRPr sz="750"/>
+            </a:lvl6pPr>
+            <a:lvl7pPr marL="2057400" indent="0">
+              <a:buNone/>
+              <a:defRPr sz="750"/>
+            </a:lvl7pPr>
+            <a:lvl8pPr marL="2400300" indent="0">
+              <a:buNone/>
+              <a:defRPr sz="750"/>
+            </a:lvl8pPr>
+            <a:lvl9pPr marL="2743200" indent="0">
+              <a:buNone/>
+              <a:defRPr sz="750"/>
+            </a:lvl9pPr>
+          </a:lstStyle>
+          <a:p>
+            <a:pPr lvl="0"/>
+            <a:r>
+              <a:rPr lang="en-US"/>
+              <a:t>Click to edit Master text styles</a:t>
+            </a:r>
+          </a:p>
+        </p:txBody>
+      </p:sp>
+      <p:sp>
+        <p:nvSpPr>
+          <p:cNvPr id="5" name="Date Placeholder 4">
+            <a:extLst>
+              <a:ext uri="{FF2B5EF4-FFF2-40B4-BE49-F238E27FC236}">
+                <a16:creationId xmlns:a16="http://schemas.microsoft.com/office/drawing/2014/main" id="{8B5CC0FF-3CBE-B2C3-E8A4-94C8DFB9C110}"/>
+              </a:ext>
+            </a:extLst>
+          </p:cNvPr>
+          <p:cNvSpPr>
+            <a:spLocks noGrp="1"/>
+          </p:cNvSpPr>
+          <p:nvPr>
+            <p:ph type="dt" sz="half" idx="10"/>
+          </p:nvPr>
+        </p:nvSpPr>
+        <p:spPr/>
+        <p:txBody>
+          <a:bodyPr/>
+          <a:lstStyle/>
+          <a:p>
+            <a:fld id="{CE65D3C8-C09A-499B-9407-1B57987B4750}" type="datetimeFigureOut">
+              <a:rPr lang="en-US" smtClean="0"/>
+              <a:t>2/3/2026</a:t>
+            </a:fld>
+            <a:endParaRPr lang="en-US"/>
+          </a:p>
+        </p:txBody>
+      </p:sp>
+      <p:sp>
+        <p:nvSpPr>
+          <p:cNvPr id="6" name="Footer Placeholder 5">
+            <a:extLst>
+              <a:ext uri="{FF2B5EF4-FFF2-40B4-BE49-F238E27FC236}">
+                <a16:creationId xmlns:a16="http://schemas.microsoft.com/office/drawing/2014/main" id="{C638A20F-B773-4092-18E6-6749A755EB4C}"/>
+              </a:ext>
+            </a:extLst>
+          </p:cNvPr>
+          <p:cNvSpPr>
+            <a:spLocks noGrp="1"/>
+          </p:cNvSpPr>
+          <p:nvPr>
+            <p:ph type="ftr" sz="quarter" idx="11"/>
+          </p:nvPr>
+        </p:nvSpPr>
+        <p:spPr/>
+        <p:txBody>
+          <a:bodyPr/>
+          <a:lstStyle/>
+          <a:p>
+            <a:endParaRPr lang="en-US"/>
+          </a:p>
+        </p:txBody>
+      </p:sp>
+      <p:sp>
+        <p:nvSpPr>
+          <p:cNvPr id="7" name="Slide Number Placeholder 6">
+            <a:extLst>
+              <a:ext uri="{FF2B5EF4-FFF2-40B4-BE49-F238E27FC236}">
+                <a16:creationId xmlns:a16="http://schemas.microsoft.com/office/drawing/2014/main" id="{9CA266AD-B5C5-871F-2568-586B9913CCA0}"/>
+              </a:ext>
+            </a:extLst>
+          </p:cNvPr>
+          <p:cNvSpPr>
+            <a:spLocks noGrp="1"/>
+          </p:cNvSpPr>
+          <p:nvPr>
+            <p:ph type="sldNum" sz="quarter" idx="12"/>
+          </p:nvPr>
+        </p:nvSpPr>
+        <p:spPr/>
+        <p:txBody>
+          <a:bodyPr/>
+          <a:lstStyle/>
+          <a:p>
+            <a:fld id="{7402C3E2-CA08-4EA3-8720-6BC592FEBF98}" type="slidenum">
+              <a:rPr lang="en-US" smtClean="0"/>
+              <a:t>‹#›</a:t>
+            </a:fld>
+            <a:endParaRPr lang="en-US"/>
+          </a:p>
+        </p:txBody>
+      </p:sp>
+    </p:spTree>
+    <p:extLst>
+      <p:ext uri="{BB962C8B-B14F-4D97-AF65-F5344CB8AC3E}">
+        <p14:creationId xmlns:p14="http://schemas.microsoft.com/office/powerpoint/2010/main" val="3620445567"/>
+      </p:ext>
+    </p:extLst>
+  </p:cSld>
+  <p:clrMapOvr>
+    <a:masterClrMapping/>
+  </p:clrMapOvr>
+  <p:hf sldNum="0" hdr="0" ftr="0" dt="0"/>
 </p:sldLayout>
 </file>
 
@@ -1677,22 +4127,282 @@
           <a:chExt cx="0" cy="0"/>
         </a:xfrm>
       </p:grpSpPr>
+      <p:sp>
+        <p:nvSpPr>
+          <p:cNvPr id="2" name="Title Placeholder 1">
+            <a:extLst>
+              <a:ext uri="{FF2B5EF4-FFF2-40B4-BE49-F238E27FC236}">
+                <a16:creationId xmlns:a16="http://schemas.microsoft.com/office/drawing/2014/main" id="{4D34E476-3E60-CC69-E148-38A3FD8CBF5A}"/>
+              </a:ext>
+            </a:extLst>
+          </p:cNvPr>
+          <p:cNvSpPr>
+            <a:spLocks noGrp="1"/>
+          </p:cNvSpPr>
+          <p:nvPr>
+            <p:ph type="title"/>
+          </p:nvPr>
+        </p:nvSpPr>
+        <p:spPr>
+          <a:xfrm>
+            <a:off x="628650" y="273844"/>
+            <a:ext cx="7886700" cy="994172"/>
+          </a:xfrm>
+          <a:prstGeom prst="rect">
+            <a:avLst/>
+          </a:prstGeom>
+        </p:spPr>
+        <p:txBody>
+          <a:bodyPr vert="horz" lIns="91440" tIns="45720" rIns="91440" bIns="45720" rtlCol="0" anchor="ctr">
+            <a:normAutofit/>
+          </a:bodyPr>
+          <a:lstStyle/>
+          <a:p>
+            <a:r>
+              <a:rPr lang="en-US"/>
+              <a:t>Click to edit Master title style</a:t>
+            </a:r>
+          </a:p>
+        </p:txBody>
+      </p:sp>
+      <p:sp>
+        <p:nvSpPr>
+          <p:cNvPr id="3" name="Text Placeholder 2">
+            <a:extLst>
+              <a:ext uri="{FF2B5EF4-FFF2-40B4-BE49-F238E27FC236}">
+                <a16:creationId xmlns:a16="http://schemas.microsoft.com/office/drawing/2014/main" id="{02CC60AF-81FD-9F13-D586-D8AA5FDCDCC3}"/>
+              </a:ext>
+            </a:extLst>
+          </p:cNvPr>
+          <p:cNvSpPr>
+            <a:spLocks noGrp="1"/>
+          </p:cNvSpPr>
+          <p:nvPr>
+            <p:ph type="body" idx="1"/>
+          </p:nvPr>
+        </p:nvSpPr>
+        <p:spPr>
+          <a:xfrm>
+            <a:off x="628650" y="1369219"/>
+            <a:ext cx="7886700" cy="3263504"/>
+          </a:xfrm>
+          <a:prstGeom prst="rect">
+            <a:avLst/>
+          </a:prstGeom>
+        </p:spPr>
+        <p:txBody>
+          <a:bodyPr vert="horz" lIns="91440" tIns="45720" rIns="91440" bIns="45720" rtlCol="0">
+            <a:normAutofit/>
+          </a:bodyPr>
+          <a:lstStyle/>
+          <a:p>
+            <a:pPr lvl="0"/>
+            <a:r>
+              <a:rPr lang="en-US"/>
+              <a:t>Click to edit Master text styles</a:t>
+            </a:r>
+          </a:p>
+          <a:p>
+            <a:pPr lvl="1"/>
+            <a:r>
+              <a:rPr lang="en-US"/>
+              <a:t>Second level</a:t>
+            </a:r>
+          </a:p>
+          <a:p>
+            <a:pPr lvl="2"/>
+            <a:r>
+              <a:rPr lang="en-US"/>
+              <a:t>Third level</a:t>
+            </a:r>
+          </a:p>
+          <a:p>
+            <a:pPr lvl="3"/>
+            <a:r>
+              <a:rPr lang="en-US"/>
+              <a:t>Fourth level</a:t>
+            </a:r>
+          </a:p>
+          <a:p>
+            <a:pPr lvl="4"/>
+            <a:r>
+              <a:rPr lang="en-US"/>
+              <a:t>Fifth level</a:t>
+            </a:r>
+          </a:p>
+        </p:txBody>
+      </p:sp>
+      <p:sp>
+        <p:nvSpPr>
+          <p:cNvPr id="4" name="Date Placeholder 3">
+            <a:extLst>
+              <a:ext uri="{FF2B5EF4-FFF2-40B4-BE49-F238E27FC236}">
+                <a16:creationId xmlns:a16="http://schemas.microsoft.com/office/drawing/2014/main" id="{68CB5DD6-533B-2099-2F0A-57A882838377}"/>
+              </a:ext>
+            </a:extLst>
+          </p:cNvPr>
+          <p:cNvSpPr>
+            <a:spLocks noGrp="1"/>
+          </p:cNvSpPr>
+          <p:nvPr>
+            <p:ph type="dt" sz="half" idx="2"/>
+          </p:nvPr>
+        </p:nvSpPr>
+        <p:spPr>
+          <a:xfrm>
+            <a:off x="628650" y="4767263"/>
+            <a:ext cx="2057400" cy="273844"/>
+          </a:xfrm>
+          <a:prstGeom prst="rect">
+            <a:avLst/>
+          </a:prstGeom>
+        </p:spPr>
+        <p:txBody>
+          <a:bodyPr vert="horz" lIns="91440" tIns="45720" rIns="91440" bIns="45720" rtlCol="0" anchor="ctr"/>
+          <a:lstStyle>
+            <a:lvl1pPr algn="l">
+              <a:defRPr sz="900">
+                <a:solidFill>
+                  <a:schemeClr val="tx1">
+                    <a:tint val="82000"/>
+                  </a:schemeClr>
+                </a:solidFill>
+              </a:defRPr>
+            </a:lvl1pPr>
+          </a:lstStyle>
+          <a:p>
+            <a:fld id="{CE65D3C8-C09A-499B-9407-1B57987B4750}" type="datetimeFigureOut">
+              <a:rPr lang="en-US" smtClean="0"/>
+              <a:t>2/3/2026</a:t>
+            </a:fld>
+            <a:endParaRPr lang="en-US"/>
+          </a:p>
+        </p:txBody>
+      </p:sp>
+      <p:sp>
+        <p:nvSpPr>
+          <p:cNvPr id="5" name="Footer Placeholder 4">
+            <a:extLst>
+              <a:ext uri="{FF2B5EF4-FFF2-40B4-BE49-F238E27FC236}">
+                <a16:creationId xmlns:a16="http://schemas.microsoft.com/office/drawing/2014/main" id="{8F898D23-623C-3A33-BF12-8AE02624BD8E}"/>
+              </a:ext>
+            </a:extLst>
+          </p:cNvPr>
+          <p:cNvSpPr>
+            <a:spLocks noGrp="1"/>
+          </p:cNvSpPr>
+          <p:nvPr>
+            <p:ph type="ftr" sz="quarter" idx="3"/>
+          </p:nvPr>
+        </p:nvSpPr>
+        <p:spPr>
+          <a:xfrm>
+            <a:off x="3028950" y="4767263"/>
+            <a:ext cx="3086100" cy="273844"/>
+          </a:xfrm>
+          <a:prstGeom prst="rect">
+            <a:avLst/>
+          </a:prstGeom>
+        </p:spPr>
+        <p:txBody>
+          <a:bodyPr vert="horz" lIns="91440" tIns="45720" rIns="91440" bIns="45720" rtlCol="0" anchor="ctr"/>
+          <a:lstStyle>
+            <a:lvl1pPr algn="ctr">
+              <a:defRPr sz="900">
+                <a:solidFill>
+                  <a:schemeClr val="tx1">
+                    <a:tint val="82000"/>
+                  </a:schemeClr>
+                </a:solidFill>
+              </a:defRPr>
+            </a:lvl1pPr>
+          </a:lstStyle>
+          <a:p>
+            <a:endParaRPr lang="en-US"/>
+          </a:p>
+        </p:txBody>
+      </p:sp>
+      <p:sp>
+        <p:nvSpPr>
+          <p:cNvPr id="6" name="Slide Number Placeholder 5">
+            <a:extLst>
+              <a:ext uri="{FF2B5EF4-FFF2-40B4-BE49-F238E27FC236}">
+                <a16:creationId xmlns:a16="http://schemas.microsoft.com/office/drawing/2014/main" id="{F7BD6DA6-E2CE-6BE6-564F-2D4A330B3BD5}"/>
+              </a:ext>
+            </a:extLst>
+          </p:cNvPr>
+          <p:cNvSpPr>
+            <a:spLocks noGrp="1"/>
+          </p:cNvSpPr>
+          <p:nvPr>
+            <p:ph type="sldNum" sz="quarter" idx="4"/>
+          </p:nvPr>
+        </p:nvSpPr>
+        <p:spPr>
+          <a:xfrm>
+            <a:off x="6457950" y="4767263"/>
+            <a:ext cx="2057400" cy="273844"/>
+          </a:xfrm>
+          <a:prstGeom prst="rect">
+            <a:avLst/>
+          </a:prstGeom>
+        </p:spPr>
+        <p:txBody>
+          <a:bodyPr vert="horz" lIns="91440" tIns="45720" rIns="91440" bIns="45720" rtlCol="0" anchor="ctr"/>
+          <a:lstStyle>
+            <a:lvl1pPr algn="r">
+              <a:defRPr sz="900">
+                <a:solidFill>
+                  <a:schemeClr val="tx1">
+                    <a:tint val="82000"/>
+                  </a:schemeClr>
+                </a:solidFill>
+              </a:defRPr>
+            </a:lvl1pPr>
+          </a:lstStyle>
+          <a:p>
+            <a:fld id="{7402C3E2-CA08-4EA3-8720-6BC592FEBF98}" type="slidenum">
+              <a:rPr lang="en-US" smtClean="0"/>
+              <a:t>‹#›</a:t>
+            </a:fld>
+            <a:endParaRPr lang="en-US"/>
+          </a:p>
+        </p:txBody>
+      </p:sp>
     </p:spTree>
+    <p:extLst>
+      <p:ext uri="{BB962C8B-B14F-4D97-AF65-F5344CB8AC3E}">
+        <p14:creationId xmlns:p14="http://schemas.microsoft.com/office/powerpoint/2010/main" val="3847612332"/>
+      </p:ext>
+    </p:extLst>
   </p:cSld>
   <p:clrMap bg1="lt1" tx1="dk1" bg2="lt2" tx2="dk2" accent1="accent1" accent2="accent2" accent3="accent3" accent4="accent4" accent5="accent5" accent6="accent6" hlink="hlink" folHlink="folHlink"/>
   <p:sldLayoutIdLst>
-    <p:sldLayoutId id="2147483649" r:id="rId1"/>
-    <p:sldLayoutId id="2147483650" r:id="rId2"/>
+    <p:sldLayoutId id="2147483652" r:id="rId1"/>
+    <p:sldLayoutId id="2147483653" r:id="rId2"/>
+    <p:sldLayoutId id="2147483654" r:id="rId3"/>
+    <p:sldLayoutId id="2147483655" r:id="rId4"/>
+    <p:sldLayoutId id="2147483656" r:id="rId5"/>
+    <p:sldLayoutId id="2147483657" r:id="rId6"/>
+    <p:sldLayoutId id="2147483658" r:id="rId7"/>
+    <p:sldLayoutId id="2147483659" r:id="rId8"/>
+    <p:sldLayoutId id="2147483660" r:id="rId9"/>
+    <p:sldLayoutId id="2147483661" r:id="rId10"/>
+    <p:sldLayoutId id="2147483662" r:id="rId11"/>
+    <p:sldLayoutId id="2147483663" r:id="rId12"/>
   </p:sldLayoutIdLst>
   <p:hf sldNum="0" hdr="0" ftr="0" dt="0"/>
   <p:txStyles>
     <p:titleStyle>
-      <a:lvl1pPr algn="ctr" defTabSz="914400" rtl="0" eaLnBrk="1" latinLnBrk="0" hangingPunct="1">
+      <a:lvl1pPr algn="l" defTabSz="685800" rtl="0" eaLnBrk="1" latinLnBrk="0" hangingPunct="1">
+        <a:lnSpc>
+          <a:spcPct val="90000"/>
+        </a:lnSpc>
         <a:spcBef>
           <a:spcPct val="0"/>
         </a:spcBef>
         <a:buNone/>
-        <a:defRPr sz="4400" kern="1200">
+        <a:defRPr sz="3300" kern="1200">
           <a:solidFill>
             <a:schemeClr val="tx1"/>
           </a:solidFill>
@@ -1703,13 +4413,16 @@
       </a:lvl1pPr>
     </p:titleStyle>
     <p:bodyStyle>
-      <a:lvl1pPr marL="342900" indent="-342900" algn="l" defTabSz="914400" rtl="0" eaLnBrk="1" latinLnBrk="0" hangingPunct="1">
+      <a:lvl1pPr marL="171450" indent="-171450" algn="l" defTabSz="685800" rtl="0" eaLnBrk="1" latinLnBrk="0" hangingPunct="1">
+        <a:lnSpc>
+          <a:spcPct val="90000"/>
+        </a:lnSpc>
         <a:spcBef>
-          <a:spcPct val="20000"/>
+          <a:spcPts val="750"/>
         </a:spcBef>
-        <a:buFont typeface="Arial" pitchFamily="34" charset="0"/>
+        <a:buFont typeface="Arial" panose="020B0604020202020204" pitchFamily="34" charset="0"/>
         <a:buChar char="•"/>
-        <a:defRPr sz="3200" kern="1200">
+        <a:defRPr sz="2100" kern="1200">
           <a:solidFill>
             <a:schemeClr val="tx1"/>
           </a:solidFill>
@@ -1718,13 +4431,16 @@
           <a:cs typeface="+mn-cs"/>
         </a:defRPr>
       </a:lvl1pPr>
-      <a:lvl2pPr marL="742950" indent="-285750" algn="l" defTabSz="914400" rtl="0" eaLnBrk="1" latinLnBrk="0" hangingPunct="1">
+      <a:lvl2pPr marL="514350" indent="-171450" algn="l" defTabSz="685800" rtl="0" eaLnBrk="1" latinLnBrk="0" hangingPunct="1">
+        <a:lnSpc>
+          <a:spcPct val="90000"/>
+        </a:lnSpc>
         <a:spcBef>
-          <a:spcPct val="20000"/>
+          <a:spcPts val="375"/>
         </a:spcBef>
-        <a:buFont typeface="Arial" pitchFamily="34" charset="0"/>
-        <a:buChar char="–"/>
-        <a:defRPr sz="2800" kern="1200">
+        <a:buFont typeface="Arial" panose="020B0604020202020204" pitchFamily="34" charset="0"/>
+        <a:buChar char="•"/>
+        <a:defRPr sz="1800" kern="1200">
           <a:solidFill>
             <a:schemeClr val="tx1"/>
           </a:solidFill>
@@ -1733,13 +4449,16 @@
           <a:cs typeface="+mn-cs"/>
         </a:defRPr>
       </a:lvl2pPr>
-      <a:lvl3pPr marL="1143000" indent="-228600" algn="l" defTabSz="914400" rtl="0" eaLnBrk="1" latinLnBrk="0" hangingPunct="1">
+      <a:lvl3pPr marL="857250" indent="-171450" algn="l" defTabSz="685800" rtl="0" eaLnBrk="1" latinLnBrk="0" hangingPunct="1">
+        <a:lnSpc>
+          <a:spcPct val="90000"/>
+        </a:lnSpc>
         <a:spcBef>
-          <a:spcPct val="20000"/>
+          <a:spcPts val="375"/>
         </a:spcBef>
-        <a:buFont typeface="Arial" pitchFamily="34" charset="0"/>
+        <a:buFont typeface="Arial" panose="020B0604020202020204" pitchFamily="34" charset="0"/>
         <a:buChar char="•"/>
-        <a:defRPr sz="2400" kern="1200">
+        <a:defRPr sz="1500" kern="1200">
           <a:solidFill>
             <a:schemeClr val="tx1"/>
           </a:solidFill>
@@ -1748,13 +4467,16 @@
           <a:cs typeface="+mn-cs"/>
         </a:defRPr>
       </a:lvl3pPr>
-      <a:lvl4pPr marL="1600200" indent="-228600" algn="l" defTabSz="914400" rtl="0" eaLnBrk="1" latinLnBrk="0" hangingPunct="1">
+      <a:lvl4pPr marL="1200150" indent="-171450" algn="l" defTabSz="685800" rtl="0" eaLnBrk="1" latinLnBrk="0" hangingPunct="1">
+        <a:lnSpc>
+          <a:spcPct val="90000"/>
+        </a:lnSpc>
         <a:spcBef>
-          <a:spcPct val="20000"/>
+          <a:spcPts val="375"/>
         </a:spcBef>
-        <a:buFont typeface="Arial" pitchFamily="34" charset="0"/>
-        <a:buChar char="–"/>
-        <a:defRPr sz="2000" kern="1200">
+        <a:buFont typeface="Arial" panose="020B0604020202020204" pitchFamily="34" charset="0"/>
+        <a:buChar char="•"/>
+        <a:defRPr sz="1350" kern="1200">
           <a:solidFill>
             <a:schemeClr val="tx1"/>
           </a:solidFill>
@@ -1763,13 +4485,16 @@
           <a:cs typeface="+mn-cs"/>
         </a:defRPr>
       </a:lvl4pPr>
-      <a:lvl5pPr marL="2057400" indent="-228600" algn="l" defTabSz="914400" rtl="0" eaLnBrk="1" latinLnBrk="0" hangingPunct="1">
+      <a:lvl5pPr marL="1543050" indent="-171450" algn="l" defTabSz="685800" rtl="0" eaLnBrk="1" latinLnBrk="0" hangingPunct="1">
+        <a:lnSpc>
+          <a:spcPct val="90000"/>
+        </a:lnSpc>
         <a:spcBef>
-          <a:spcPct val="20000"/>
+          <a:spcPts val="375"/>
         </a:spcBef>
-        <a:buFont typeface="Arial" pitchFamily="34" charset="0"/>
-        <a:buChar char="»"/>
-        <a:defRPr sz="2000" kern="1200">
+        <a:buFont typeface="Arial" panose="020B0604020202020204" pitchFamily="34" charset="0"/>
+        <a:buChar char="•"/>
+        <a:defRPr sz="1350" kern="1200">
           <a:solidFill>
             <a:schemeClr val="tx1"/>
           </a:solidFill>
@@ -1778,13 +4503,16 @@
           <a:cs typeface="+mn-cs"/>
         </a:defRPr>
       </a:lvl5pPr>
-      <a:lvl6pPr marL="2514600" indent="-228600" algn="l" defTabSz="914400" rtl="0" eaLnBrk="1" latinLnBrk="0" hangingPunct="1">
+      <a:lvl6pPr marL="1885950" indent="-171450" algn="l" defTabSz="685800" rtl="0" eaLnBrk="1" latinLnBrk="0" hangingPunct="1">
+        <a:lnSpc>
+          <a:spcPct val="90000"/>
+        </a:lnSpc>
         <a:spcBef>
-          <a:spcPct val="20000"/>
+          <a:spcPts val="375"/>
         </a:spcBef>
-        <a:buFont typeface="Arial" pitchFamily="34" charset="0"/>
+        <a:buFont typeface="Arial" panose="020B0604020202020204" pitchFamily="34" charset="0"/>
         <a:buChar char="•"/>
-        <a:defRPr sz="2000" kern="1200">
+        <a:defRPr sz="1350" kern="1200">
           <a:solidFill>
             <a:schemeClr val="tx1"/>
           </a:solidFill>
@@ -1793,13 +4521,16 @@
           <a:cs typeface="+mn-cs"/>
         </a:defRPr>
       </a:lvl6pPr>
-      <a:lvl7pPr marL="2971800" indent="-228600" algn="l" defTabSz="914400" rtl="0" eaLnBrk="1" latinLnBrk="0" hangingPunct="1">
+      <a:lvl7pPr marL="2228850" indent="-171450" algn="l" defTabSz="685800" rtl="0" eaLnBrk="1" latinLnBrk="0" hangingPunct="1">
+        <a:lnSpc>
+          <a:spcPct val="90000"/>
+        </a:lnSpc>
         <a:spcBef>
-          <a:spcPct val="20000"/>
+          <a:spcPts val="375"/>
         </a:spcBef>
-        <a:buFont typeface="Arial" pitchFamily="34" charset="0"/>
+        <a:buFont typeface="Arial" panose="020B0604020202020204" pitchFamily="34" charset="0"/>
         <a:buChar char="•"/>
-        <a:defRPr sz="2000" kern="1200">
+        <a:defRPr sz="1350" kern="1200">
           <a:solidFill>
             <a:schemeClr val="tx1"/>
           </a:solidFill>
@@ -1808,13 +4539,16 @@
           <a:cs typeface="+mn-cs"/>
         </a:defRPr>
       </a:lvl7pPr>
-      <a:lvl8pPr marL="3429000" indent="-228600" algn="l" defTabSz="914400" rtl="0" eaLnBrk="1" latinLnBrk="0" hangingPunct="1">
+      <a:lvl8pPr marL="2571750" indent="-171450" algn="l" defTabSz="685800" rtl="0" eaLnBrk="1" latinLnBrk="0" hangingPunct="1">
+        <a:lnSpc>
+          <a:spcPct val="90000"/>
+        </a:lnSpc>
         <a:spcBef>
-          <a:spcPct val="20000"/>
+          <a:spcPts val="375"/>
         </a:spcBef>
-        <a:buFont typeface="Arial" pitchFamily="34" charset="0"/>
+        <a:buFont typeface="Arial" panose="020B0604020202020204" pitchFamily="34" charset="0"/>
         <a:buChar char="•"/>
-        <a:defRPr sz="2000" kern="1200">
+        <a:defRPr sz="1350" kern="1200">
           <a:solidFill>
             <a:schemeClr val="tx1"/>
           </a:solidFill>
@@ -1823,13 +4557,16 @@
           <a:cs typeface="+mn-cs"/>
         </a:defRPr>
       </a:lvl8pPr>
-      <a:lvl9pPr marL="3886200" indent="-228600" algn="l" defTabSz="914400" rtl="0" eaLnBrk="1" latinLnBrk="0" hangingPunct="1">
+      <a:lvl9pPr marL="2914650" indent="-171450" algn="l" defTabSz="685800" rtl="0" eaLnBrk="1" latinLnBrk="0" hangingPunct="1">
+        <a:lnSpc>
+          <a:spcPct val="90000"/>
+        </a:lnSpc>
         <a:spcBef>
-          <a:spcPct val="20000"/>
+          <a:spcPts val="375"/>
         </a:spcBef>
-        <a:buFont typeface="Arial" pitchFamily="34" charset="0"/>
+        <a:buFont typeface="Arial" panose="020B0604020202020204" pitchFamily="34" charset="0"/>
         <a:buChar char="•"/>
-        <a:defRPr sz="2000" kern="1200">
+        <a:defRPr sz="1350" kern="1200">
           <a:solidFill>
             <a:schemeClr val="tx1"/>
           </a:solidFill>
@@ -1843,8 +4580,8 @@
       <a:defPPr>
         <a:defRPr lang="en-US"/>
       </a:defPPr>
-      <a:lvl1pPr marL="0" algn="l" defTabSz="914400" rtl="0" eaLnBrk="1" latinLnBrk="0" hangingPunct="1">
-        <a:defRPr sz="1800" kern="1200">
+      <a:lvl1pPr marL="0" algn="l" defTabSz="685800" rtl="0" eaLnBrk="1" latinLnBrk="0" hangingPunct="1">
+        <a:defRPr sz="1350" kern="1200">
           <a:solidFill>
             <a:schemeClr val="tx1"/>
           </a:solidFill>
@@ -1853,8 +4590,8 @@
           <a:cs typeface="+mn-cs"/>
         </a:defRPr>
       </a:lvl1pPr>
-      <a:lvl2pPr marL="457200" algn="l" defTabSz="914400" rtl="0" eaLnBrk="1" latinLnBrk="0" hangingPunct="1">
-        <a:defRPr sz="1800" kern="1200">
+      <a:lvl2pPr marL="342900" algn="l" defTabSz="685800" rtl="0" eaLnBrk="1" latinLnBrk="0" hangingPunct="1">
+        <a:defRPr sz="1350" kern="1200">
           <a:solidFill>
             <a:schemeClr val="tx1"/>
           </a:solidFill>
@@ -1863,8 +4600,8 @@
           <a:cs typeface="+mn-cs"/>
         </a:defRPr>
       </a:lvl2pPr>
-      <a:lvl3pPr marL="914400" algn="l" defTabSz="914400" rtl="0" eaLnBrk="1" latinLnBrk="0" hangingPunct="1">
-        <a:defRPr sz="1800" kern="1200">
+      <a:lvl3pPr marL="685800" algn="l" defTabSz="685800" rtl="0" eaLnBrk="1" latinLnBrk="0" hangingPunct="1">
+        <a:defRPr sz="1350" kern="1200">
           <a:solidFill>
             <a:schemeClr val="tx1"/>
           </a:solidFill>
@@ -1873,8 +4610,8 @@
           <a:cs typeface="+mn-cs"/>
         </a:defRPr>
       </a:lvl3pPr>
-      <a:lvl4pPr marL="1371600" algn="l" defTabSz="914400" rtl="0" eaLnBrk="1" latinLnBrk="0" hangingPunct="1">
-        <a:defRPr sz="1800" kern="1200">
+      <a:lvl4pPr marL="1028700" algn="l" defTabSz="685800" rtl="0" eaLnBrk="1" latinLnBrk="0" hangingPunct="1">
+        <a:defRPr sz="1350" kern="1200">
           <a:solidFill>
             <a:schemeClr val="tx1"/>
           </a:solidFill>
@@ -1883,8 +4620,8 @@
           <a:cs typeface="+mn-cs"/>
         </a:defRPr>
       </a:lvl4pPr>
-      <a:lvl5pPr marL="1828800" algn="l" defTabSz="914400" rtl="0" eaLnBrk="1" latinLnBrk="0" hangingPunct="1">
-        <a:defRPr sz="1800" kern="1200">
+      <a:lvl5pPr marL="1371600" algn="l" defTabSz="685800" rtl="0" eaLnBrk="1" latinLnBrk="0" hangingPunct="1">
+        <a:defRPr sz="1350" kern="1200">
           <a:solidFill>
             <a:schemeClr val="tx1"/>
           </a:solidFill>
@@ -1893,8 +4630,8 @@
           <a:cs typeface="+mn-cs"/>
         </a:defRPr>
       </a:lvl5pPr>
-      <a:lvl6pPr marL="2286000" algn="l" defTabSz="914400" rtl="0" eaLnBrk="1" latinLnBrk="0" hangingPunct="1">
-        <a:defRPr sz="1800" kern="1200">
+      <a:lvl6pPr marL="1714500" algn="l" defTabSz="685800" rtl="0" eaLnBrk="1" latinLnBrk="0" hangingPunct="1">
+        <a:defRPr sz="1350" kern="1200">
           <a:solidFill>
             <a:schemeClr val="tx1"/>
           </a:solidFill>
@@ -1903,8 +4640,8 @@
           <a:cs typeface="+mn-cs"/>
         </a:defRPr>
       </a:lvl6pPr>
-      <a:lvl7pPr marL="2743200" algn="l" defTabSz="914400" rtl="0" eaLnBrk="1" latinLnBrk="0" hangingPunct="1">
-        <a:defRPr sz="1800" kern="1200">
+      <a:lvl7pPr marL="2057400" algn="l" defTabSz="685800" rtl="0" eaLnBrk="1" latinLnBrk="0" hangingPunct="1">
+        <a:defRPr sz="1350" kern="1200">
           <a:solidFill>
             <a:schemeClr val="tx1"/>
           </a:solidFill>
@@ -1913,8 +4650,8 @@
           <a:cs typeface="+mn-cs"/>
         </a:defRPr>
       </a:lvl7pPr>
-      <a:lvl8pPr marL="3200400" algn="l" defTabSz="914400" rtl="0" eaLnBrk="1" latinLnBrk="0" hangingPunct="1">
-        <a:defRPr sz="1800" kern="1200">
+      <a:lvl8pPr marL="2400300" algn="l" defTabSz="685800" rtl="0" eaLnBrk="1" latinLnBrk="0" hangingPunct="1">
+        <a:defRPr sz="1350" kern="1200">
           <a:solidFill>
             <a:schemeClr val="tx1"/>
           </a:solidFill>
@@ -1923,8 +4660,8 @@
           <a:cs typeface="+mn-cs"/>
         </a:defRPr>
       </a:lvl8pPr>
-      <a:lvl9pPr marL="3657600" algn="l" defTabSz="914400" rtl="0" eaLnBrk="1" latinLnBrk="0" hangingPunct="1">
-        <a:defRPr sz="1800" kern="1200">
+      <a:lvl9pPr marL="2743200" algn="l" defTabSz="685800" rtl="0" eaLnBrk="1" latinLnBrk="0" hangingPunct="1">
+        <a:defRPr sz="1350" kern="1200">
           <a:solidFill>
             <a:schemeClr val="tx1"/>
           </a:solidFill>
@@ -2142,6 +4879,822 @@
 
 <file path=ppt/slides/slide10.xml><?xml version="1.0" encoding="utf-8"?>
 <p:sld xmlns:a="http://schemas.openxmlformats.org/drawingml/2006/main" xmlns:r="http://schemas.openxmlformats.org/officeDocument/2006/relationships" xmlns:p="http://schemas.openxmlformats.org/presentationml/2006/main">
+  <p:cSld name="Slide 9">
+    <p:bg>
+      <p:bgPr>
+        <a:solidFill>
+          <a:srgbClr val="FFFFFF"/>
+        </a:solidFill>
+        <a:effectLst/>
+      </p:bgPr>
+    </p:bg>
+    <p:spTree>
+      <p:nvGrpSpPr>
+        <p:cNvPr id="1" name=""/>
+        <p:cNvGrpSpPr/>
+        <p:nvPr/>
+      </p:nvGrpSpPr>
+      <p:grpSpPr>
+        <a:xfrm>
+          <a:off x="0" y="0"/>
+          <a:ext cx="0" cy="0"/>
+          <a:chOff x="0" y="0"/>
+          <a:chExt cx="0" cy="0"/>
+        </a:xfrm>
+      </p:grpSpPr>
+      <p:sp>
+        <p:nvSpPr>
+          <p:cNvPr id="2" name="Text 0"/>
+          <p:cNvSpPr/>
+          <p:nvPr/>
+        </p:nvSpPr>
+        <p:spPr>
+          <a:xfrm>
+            <a:off x="457200" y="274320"/>
+            <a:ext cx="8229600" cy="548640"/>
+          </a:xfrm>
+          <a:prstGeom prst="rect">
+            <a:avLst/>
+          </a:prstGeom>
+          <a:noFill/>
+          <a:ln/>
+        </p:spPr>
+        <p:txBody>
+          <a:bodyPr wrap="square" rtlCol="0" anchor="ctr"/>
+          <a:lstStyle/>
+          <a:p>
+            <a:pPr marL="0" indent="0">
+              <a:buNone/>
+            </a:pPr>
+            <a:r>
+              <a:rPr lang="en-US" sz="4000" b="1" dirty="0">
+                <a:solidFill>
+                  <a:srgbClr val="065A82"/>
+                </a:solidFill>
+                <a:latin typeface="Arial Black" pitchFamily="34" charset="0"/>
+                <a:ea typeface="Arial Black" pitchFamily="34" charset="-122"/>
+                <a:cs typeface="Arial Black" pitchFamily="34" charset="-120"/>
+              </a:rPr>
+              <a:t>Business Intelligence &amp; Analytics</a:t>
+            </a:r>
+            <a:endParaRPr lang="en-US" sz="4000" dirty="0"/>
+          </a:p>
+        </p:txBody>
+      </p:sp>
+      <p:sp>
+        <p:nvSpPr>
+          <p:cNvPr id="3" name="Text 1"/>
+          <p:cNvSpPr/>
+          <p:nvPr/>
+        </p:nvSpPr>
+        <p:spPr>
+          <a:xfrm>
+            <a:off x="457200" y="1097280"/>
+            <a:ext cx="8229600" cy="274320"/>
+          </a:xfrm>
+          <a:prstGeom prst="rect">
+            <a:avLst/>
+          </a:prstGeom>
+          <a:noFill/>
+          <a:ln/>
+        </p:spPr>
+        <p:txBody>
+          <a:bodyPr wrap="square" rtlCol="0" anchor="ctr"/>
+          <a:lstStyle/>
+          <a:p>
+            <a:pPr marL="0" indent="0">
+              <a:buNone/>
+            </a:pPr>
+            <a:r>
+              <a:rPr lang="en-US" sz="1800" i="1" dirty="0">
+                <a:solidFill>
+                  <a:srgbClr val="666666"/>
+                </a:solidFill>
+                <a:latin typeface="Arial" pitchFamily="34" charset="0"/>
+                <a:ea typeface="Arial" pitchFamily="34" charset="-122"/>
+                <a:cs typeface="Arial" pitchFamily="34" charset="-120"/>
+              </a:rPr>
+              <a:t>13+ SQL Queries Answering Critical Questions</a:t>
+            </a:r>
+            <a:endParaRPr lang="en-US" sz="1800" dirty="0"/>
+          </a:p>
+        </p:txBody>
+      </p:sp>
+      <p:sp>
+        <p:nvSpPr>
+          <p:cNvPr id="4" name="Shape 2"/>
+          <p:cNvSpPr/>
+          <p:nvPr/>
+        </p:nvSpPr>
+        <p:spPr>
+          <a:xfrm>
+            <a:off x="513805" y="1449324"/>
+            <a:ext cx="7680960" cy="365760"/>
+          </a:xfrm>
+          <a:prstGeom prst="rect">
+            <a:avLst/>
+          </a:prstGeom>
+          <a:solidFill>
+            <a:srgbClr val="1C7293"/>
+          </a:solidFill>
+          <a:ln/>
+        </p:spPr>
+        <p:txBody>
+          <a:bodyPr/>
+          <a:lstStyle/>
+          <a:p>
+            <a:endParaRPr lang="en-US"/>
+          </a:p>
+        </p:txBody>
+      </p:sp>
+      <p:sp>
+        <p:nvSpPr>
+          <p:cNvPr id="5" name="Text 3"/>
+          <p:cNvSpPr/>
+          <p:nvPr/>
+        </p:nvSpPr>
+        <p:spPr>
+          <a:xfrm>
+            <a:off x="731520" y="1473490"/>
+            <a:ext cx="7680960" cy="365760"/>
+          </a:xfrm>
+          <a:prstGeom prst="rect">
+            <a:avLst/>
+          </a:prstGeom>
+          <a:noFill/>
+          <a:ln/>
+        </p:spPr>
+        <p:txBody>
+          <a:bodyPr wrap="square" rtlCol="0" anchor="ctr"/>
+          <a:lstStyle/>
+          <a:p>
+            <a:pPr marL="0" indent="0">
+              <a:buNone/>
+            </a:pPr>
+            <a:r>
+              <a:rPr lang="en-US" sz="1400" b="1" dirty="0">
+                <a:solidFill>
+                  <a:srgbClr val="FFFFFF"/>
+                </a:solidFill>
+                <a:latin typeface="Arial" pitchFamily="34" charset="0"/>
+                <a:ea typeface="Arial" pitchFamily="34" charset="-122"/>
+                <a:cs typeface="Arial" pitchFamily="34" charset="-120"/>
+              </a:rPr>
+              <a:t>Basic Reporting (5 queries)</a:t>
+            </a:r>
+            <a:endParaRPr lang="en-US" sz="1400" dirty="0"/>
+          </a:p>
+        </p:txBody>
+      </p:sp>
+      <p:sp>
+        <p:nvSpPr>
+          <p:cNvPr id="6" name="Text 4"/>
+          <p:cNvSpPr/>
+          <p:nvPr/>
+        </p:nvSpPr>
+        <p:spPr>
+          <a:xfrm>
+            <a:off x="1010195" y="1888236"/>
+            <a:ext cx="6949440" cy="228600"/>
+          </a:xfrm>
+          <a:prstGeom prst="rect">
+            <a:avLst/>
+          </a:prstGeom>
+          <a:noFill/>
+          <a:ln/>
+        </p:spPr>
+        <p:txBody>
+          <a:bodyPr wrap="square" rtlCol="0" anchor="ctr"/>
+          <a:lstStyle/>
+          <a:p>
+            <a:pPr marL="0" indent="0">
+              <a:buNone/>
+            </a:pPr>
+            <a:r>
+              <a:rPr lang="en-US" sz="1200" dirty="0">
+                <a:solidFill>
+                  <a:srgbClr val="212121"/>
+                </a:solidFill>
+                <a:latin typeface="Arial" pitchFamily="34" charset="0"/>
+                <a:ea typeface="Arial" pitchFamily="34" charset="-122"/>
+                <a:cs typeface="Arial" pitchFamily="34" charset="-120"/>
+              </a:rPr>
+              <a:t>• Monthly usage trends</a:t>
+            </a:r>
+            <a:endParaRPr lang="en-US" sz="1200" dirty="0"/>
+          </a:p>
+        </p:txBody>
+      </p:sp>
+      <p:sp>
+        <p:nvSpPr>
+          <p:cNvPr id="7" name="Text 5"/>
+          <p:cNvSpPr/>
+          <p:nvPr/>
+        </p:nvSpPr>
+        <p:spPr>
+          <a:xfrm>
+            <a:off x="1010195" y="2107692"/>
+            <a:ext cx="6949440" cy="228600"/>
+          </a:xfrm>
+          <a:prstGeom prst="rect">
+            <a:avLst/>
+          </a:prstGeom>
+          <a:noFill/>
+          <a:ln/>
+        </p:spPr>
+        <p:txBody>
+          <a:bodyPr wrap="square" rtlCol="0" anchor="ctr"/>
+          <a:lstStyle/>
+          <a:p>
+            <a:pPr marL="0" indent="0">
+              <a:buNone/>
+            </a:pPr>
+            <a:r>
+              <a:rPr lang="en-US" sz="1200" dirty="0">
+                <a:solidFill>
+                  <a:srgbClr val="212121"/>
+                </a:solidFill>
+                <a:latin typeface="Arial" pitchFamily="34" charset="0"/>
+                <a:ea typeface="Arial" pitchFamily="34" charset="-122"/>
+                <a:cs typeface="Arial" pitchFamily="34" charset="-120"/>
+              </a:rPr>
+              <a:t>• Department rankings</a:t>
+            </a:r>
+            <a:endParaRPr lang="en-US" sz="1200" dirty="0"/>
+          </a:p>
+        </p:txBody>
+      </p:sp>
+      <p:sp>
+        <p:nvSpPr>
+          <p:cNvPr id="8" name="Text 6"/>
+          <p:cNvSpPr/>
+          <p:nvPr/>
+        </p:nvSpPr>
+        <p:spPr>
+          <a:xfrm>
+            <a:off x="1047931" y="2313432"/>
+            <a:ext cx="6949440" cy="228600"/>
+          </a:xfrm>
+          <a:prstGeom prst="rect">
+            <a:avLst/>
+          </a:prstGeom>
+          <a:noFill/>
+          <a:ln/>
+        </p:spPr>
+        <p:txBody>
+          <a:bodyPr wrap="square" rtlCol="0" anchor="ctr"/>
+          <a:lstStyle/>
+          <a:p>
+            <a:pPr marL="0" indent="0">
+              <a:buNone/>
+            </a:pPr>
+            <a:r>
+              <a:rPr lang="en-US" sz="1200" dirty="0">
+                <a:solidFill>
+                  <a:srgbClr val="212121"/>
+                </a:solidFill>
+                <a:latin typeface="Arial" pitchFamily="34" charset="0"/>
+                <a:ea typeface="Arial" pitchFamily="34" charset="-122"/>
+                <a:cs typeface="Arial" pitchFamily="34" charset="-120"/>
+              </a:rPr>
+              <a:t>• Peak usage times</a:t>
+            </a:r>
+            <a:endParaRPr lang="en-US" sz="1200" dirty="0"/>
+          </a:p>
+        </p:txBody>
+      </p:sp>
+      <p:sp>
+        <p:nvSpPr>
+          <p:cNvPr id="9" name="Text 7"/>
+          <p:cNvSpPr/>
+          <p:nvPr/>
+        </p:nvSpPr>
+        <p:spPr>
+          <a:xfrm>
+            <a:off x="1047931" y="2500884"/>
+            <a:ext cx="6949440" cy="228600"/>
+          </a:xfrm>
+          <a:prstGeom prst="rect">
+            <a:avLst/>
+          </a:prstGeom>
+          <a:noFill/>
+          <a:ln/>
+        </p:spPr>
+        <p:txBody>
+          <a:bodyPr wrap="square" rtlCol="0" anchor="ctr"/>
+          <a:lstStyle/>
+          <a:p>
+            <a:pPr marL="0" indent="0">
+              <a:buNone/>
+            </a:pPr>
+            <a:r>
+              <a:rPr lang="en-US" sz="1200" dirty="0">
+                <a:solidFill>
+                  <a:srgbClr val="212121"/>
+                </a:solidFill>
+                <a:latin typeface="Arial" pitchFamily="34" charset="0"/>
+                <a:ea typeface="Arial" pitchFamily="34" charset="-122"/>
+                <a:cs typeface="Arial" pitchFamily="34" charset="-120"/>
+              </a:rPr>
+              <a:t>• Popular resources</a:t>
+            </a:r>
+            <a:endParaRPr lang="en-US" sz="1200" dirty="0"/>
+          </a:p>
+        </p:txBody>
+      </p:sp>
+      <p:sp>
+        <p:nvSpPr>
+          <p:cNvPr id="10" name="Text 8"/>
+          <p:cNvSpPr/>
+          <p:nvPr/>
+        </p:nvSpPr>
+        <p:spPr>
+          <a:xfrm>
+            <a:off x="1047931" y="2696174"/>
+            <a:ext cx="6949440" cy="228600"/>
+          </a:xfrm>
+          <a:prstGeom prst="rect">
+            <a:avLst/>
+          </a:prstGeom>
+          <a:noFill/>
+          <a:ln/>
+        </p:spPr>
+        <p:txBody>
+          <a:bodyPr wrap="square" rtlCol="0" anchor="ctr"/>
+          <a:lstStyle/>
+          <a:p>
+            <a:pPr marL="0" indent="0">
+              <a:buNone/>
+            </a:pPr>
+            <a:r>
+              <a:rPr lang="en-US" sz="1200" dirty="0">
+                <a:solidFill>
+                  <a:srgbClr val="212121"/>
+                </a:solidFill>
+                <a:latin typeface="Arial" pitchFamily="34" charset="0"/>
+                <a:ea typeface="Arial" pitchFamily="34" charset="-122"/>
+                <a:cs typeface="Arial" pitchFamily="34" charset="-120"/>
+              </a:rPr>
+              <a:t>• Average loan duration</a:t>
+            </a:r>
+            <a:endParaRPr lang="en-US" sz="1200" dirty="0"/>
+          </a:p>
+        </p:txBody>
+      </p:sp>
+      <p:sp>
+        <p:nvSpPr>
+          <p:cNvPr id="11" name="Shape 9"/>
+          <p:cNvSpPr/>
+          <p:nvPr/>
+        </p:nvSpPr>
+        <p:spPr>
+          <a:xfrm>
+            <a:off x="513805" y="3073690"/>
+            <a:ext cx="7680960" cy="365760"/>
+          </a:xfrm>
+          <a:prstGeom prst="rect">
+            <a:avLst/>
+          </a:prstGeom>
+          <a:solidFill>
+            <a:srgbClr val="1C7293"/>
+          </a:solidFill>
+          <a:ln/>
+        </p:spPr>
+        <p:txBody>
+          <a:bodyPr/>
+          <a:lstStyle/>
+          <a:p>
+            <a:endParaRPr lang="en-US"/>
+          </a:p>
+        </p:txBody>
+      </p:sp>
+      <p:sp>
+        <p:nvSpPr>
+          <p:cNvPr id="12" name="Text 10"/>
+          <p:cNvSpPr/>
+          <p:nvPr/>
+        </p:nvSpPr>
+        <p:spPr>
+          <a:xfrm>
+            <a:off x="731520" y="3119410"/>
+            <a:ext cx="7680960" cy="365760"/>
+          </a:xfrm>
+          <a:prstGeom prst="rect">
+            <a:avLst/>
+          </a:prstGeom>
+          <a:noFill/>
+          <a:ln/>
+        </p:spPr>
+        <p:txBody>
+          <a:bodyPr wrap="square" rtlCol="0" anchor="ctr"/>
+          <a:lstStyle/>
+          <a:p>
+            <a:pPr marL="0" indent="0">
+              <a:buNone/>
+            </a:pPr>
+            <a:r>
+              <a:rPr lang="en-US" sz="1400" b="1" dirty="0">
+                <a:solidFill>
+                  <a:srgbClr val="FFFFFF"/>
+                </a:solidFill>
+                <a:latin typeface="Arial" pitchFamily="34" charset="0"/>
+                <a:ea typeface="Arial" pitchFamily="34" charset="-122"/>
+                <a:cs typeface="Arial" pitchFamily="34" charset="-120"/>
+              </a:rPr>
+              <a:t>OLAP Operations (5 queries)</a:t>
+            </a:r>
+            <a:endParaRPr lang="en-US" sz="1400" dirty="0"/>
+          </a:p>
+        </p:txBody>
+      </p:sp>
+      <p:sp>
+        <p:nvSpPr>
+          <p:cNvPr id="13" name="Text 11"/>
+          <p:cNvSpPr/>
+          <p:nvPr/>
+        </p:nvSpPr>
+        <p:spPr>
+          <a:xfrm>
+            <a:off x="879565" y="3594898"/>
+            <a:ext cx="6949440" cy="228600"/>
+          </a:xfrm>
+          <a:prstGeom prst="rect">
+            <a:avLst/>
+          </a:prstGeom>
+          <a:noFill/>
+          <a:ln/>
+        </p:spPr>
+        <p:txBody>
+          <a:bodyPr wrap="square" rtlCol="0" anchor="ctr"/>
+          <a:lstStyle/>
+          <a:p>
+            <a:pPr marL="0" indent="0">
+              <a:buNone/>
+            </a:pPr>
+            <a:r>
+              <a:rPr lang="en-US" sz="1200" dirty="0">
+                <a:solidFill>
+                  <a:srgbClr val="212121"/>
+                </a:solidFill>
+                <a:latin typeface="Arial" pitchFamily="34" charset="0"/>
+                <a:ea typeface="Arial" pitchFamily="34" charset="-122"/>
+                <a:cs typeface="Arial" pitchFamily="34" charset="-120"/>
+              </a:rPr>
+              <a:t>• Drill-down (Year → Day)</a:t>
+            </a:r>
+            <a:endParaRPr lang="en-US" sz="1200" dirty="0"/>
+          </a:p>
+        </p:txBody>
+      </p:sp>
+      <p:sp>
+        <p:nvSpPr>
+          <p:cNvPr id="14" name="Text 12"/>
+          <p:cNvSpPr/>
+          <p:nvPr/>
+        </p:nvSpPr>
+        <p:spPr>
+          <a:xfrm>
+            <a:off x="879565" y="3757694"/>
+            <a:ext cx="6949440" cy="228600"/>
+          </a:xfrm>
+          <a:prstGeom prst="rect">
+            <a:avLst/>
+          </a:prstGeom>
+          <a:noFill/>
+          <a:ln/>
+        </p:spPr>
+        <p:txBody>
+          <a:bodyPr wrap="square" rtlCol="0" anchor="ctr"/>
+          <a:lstStyle/>
+          <a:p>
+            <a:pPr marL="0" indent="0">
+              <a:buNone/>
+            </a:pPr>
+            <a:r>
+              <a:rPr lang="en-US" sz="1200" dirty="0">
+                <a:solidFill>
+                  <a:srgbClr val="212121"/>
+                </a:solidFill>
+                <a:latin typeface="Arial" pitchFamily="34" charset="0"/>
+                <a:ea typeface="Arial" pitchFamily="34" charset="-122"/>
+                <a:cs typeface="Arial" pitchFamily="34" charset="-120"/>
+              </a:rPr>
+              <a:t>• Roll-up (Day → Month)</a:t>
+            </a:r>
+            <a:endParaRPr lang="en-US" sz="1200" dirty="0"/>
+          </a:p>
+        </p:txBody>
+      </p:sp>
+      <p:sp>
+        <p:nvSpPr>
+          <p:cNvPr id="15" name="Text 13"/>
+          <p:cNvSpPr/>
+          <p:nvPr/>
+        </p:nvSpPr>
+        <p:spPr>
+          <a:xfrm>
+            <a:off x="879565" y="3904489"/>
+            <a:ext cx="6949440" cy="228600"/>
+          </a:xfrm>
+          <a:prstGeom prst="rect">
+            <a:avLst/>
+          </a:prstGeom>
+          <a:noFill/>
+          <a:ln/>
+        </p:spPr>
+        <p:txBody>
+          <a:bodyPr wrap="square" rtlCol="0" anchor="ctr"/>
+          <a:lstStyle/>
+          <a:p>
+            <a:pPr marL="0" indent="0">
+              <a:buNone/>
+            </a:pPr>
+            <a:r>
+              <a:rPr lang="en-US" sz="1200" dirty="0">
+                <a:solidFill>
+                  <a:srgbClr val="212121"/>
+                </a:solidFill>
+                <a:latin typeface="Arial" pitchFamily="34" charset="0"/>
+                <a:ea typeface="Arial" pitchFamily="34" charset="-122"/>
+                <a:cs typeface="Arial" pitchFamily="34" charset="-120"/>
+              </a:rPr>
+              <a:t>• Slicing (Q1 2024)</a:t>
+            </a:r>
+            <a:endParaRPr lang="en-US" sz="1200" dirty="0"/>
+          </a:p>
+        </p:txBody>
+      </p:sp>
+      <p:sp>
+        <p:nvSpPr>
+          <p:cNvPr id="16" name="Text 14"/>
+          <p:cNvSpPr/>
+          <p:nvPr/>
+        </p:nvSpPr>
+        <p:spPr>
+          <a:xfrm>
+            <a:off x="879565" y="4038383"/>
+            <a:ext cx="6949440" cy="228600"/>
+          </a:xfrm>
+          <a:prstGeom prst="rect">
+            <a:avLst/>
+          </a:prstGeom>
+          <a:noFill/>
+          <a:ln/>
+        </p:spPr>
+        <p:txBody>
+          <a:bodyPr wrap="square" rtlCol="0" anchor="ctr"/>
+          <a:lstStyle/>
+          <a:p>
+            <a:pPr marL="0" indent="0">
+              <a:buNone/>
+            </a:pPr>
+            <a:r>
+              <a:rPr lang="en-US" sz="1200" dirty="0">
+                <a:solidFill>
+                  <a:srgbClr val="212121"/>
+                </a:solidFill>
+                <a:latin typeface="Arial" pitchFamily="34" charset="0"/>
+                <a:ea typeface="Arial" pitchFamily="34" charset="-122"/>
+                <a:cs typeface="Arial" pitchFamily="34" charset="-120"/>
+              </a:rPr>
+              <a:t>• Dicing (Eng + Digital + March)</a:t>
+            </a:r>
+            <a:endParaRPr lang="en-US" sz="1200" dirty="0"/>
+          </a:p>
+        </p:txBody>
+      </p:sp>
+      <p:sp>
+        <p:nvSpPr>
+          <p:cNvPr id="17" name="Text 15"/>
+          <p:cNvSpPr/>
+          <p:nvPr/>
+        </p:nvSpPr>
+        <p:spPr>
+          <a:xfrm>
+            <a:off x="879565" y="4206568"/>
+            <a:ext cx="6949440" cy="228600"/>
+          </a:xfrm>
+          <a:prstGeom prst="rect">
+            <a:avLst/>
+          </a:prstGeom>
+          <a:noFill/>
+          <a:ln/>
+        </p:spPr>
+        <p:txBody>
+          <a:bodyPr wrap="square" rtlCol="0" anchor="ctr"/>
+          <a:lstStyle/>
+          <a:p>
+            <a:pPr marL="0" indent="0">
+              <a:buNone/>
+            </a:pPr>
+            <a:r>
+              <a:rPr lang="en-US" sz="1200" dirty="0">
+                <a:solidFill>
+                  <a:srgbClr val="212121"/>
+                </a:solidFill>
+                <a:latin typeface="Arial" pitchFamily="34" charset="0"/>
+                <a:ea typeface="Arial" pitchFamily="34" charset="-122"/>
+                <a:cs typeface="Arial" pitchFamily="34" charset="-120"/>
+              </a:rPr>
+              <a:t>• Pivot analysis</a:t>
+            </a:r>
+            <a:endParaRPr lang="en-US" sz="1200" dirty="0"/>
+          </a:p>
+        </p:txBody>
+      </p:sp>
+      <p:sp>
+        <p:nvSpPr>
+          <p:cNvPr id="18" name="Shape 16"/>
+          <p:cNvSpPr/>
+          <p:nvPr/>
+        </p:nvSpPr>
+        <p:spPr>
+          <a:xfrm>
+            <a:off x="463005" y="4474356"/>
+            <a:ext cx="7680960" cy="365760"/>
+          </a:xfrm>
+          <a:prstGeom prst="rect">
+            <a:avLst/>
+          </a:prstGeom>
+          <a:solidFill>
+            <a:srgbClr val="1C7293"/>
+          </a:solidFill>
+          <a:ln/>
+        </p:spPr>
+        <p:txBody>
+          <a:bodyPr/>
+          <a:lstStyle/>
+          <a:p>
+            <a:endParaRPr lang="en-US"/>
+          </a:p>
+        </p:txBody>
+      </p:sp>
+      <p:sp>
+        <p:nvSpPr>
+          <p:cNvPr id="19" name="Text 17"/>
+          <p:cNvSpPr/>
+          <p:nvPr/>
+        </p:nvSpPr>
+        <p:spPr>
+          <a:xfrm>
+            <a:off x="513805" y="4487419"/>
+            <a:ext cx="7680960" cy="365760"/>
+          </a:xfrm>
+          <a:prstGeom prst="rect">
+            <a:avLst/>
+          </a:prstGeom>
+          <a:noFill/>
+          <a:ln/>
+        </p:spPr>
+        <p:txBody>
+          <a:bodyPr wrap="square" rtlCol="0" anchor="ctr"/>
+          <a:lstStyle/>
+          <a:p>
+            <a:pPr marL="0" indent="0">
+              <a:buNone/>
+            </a:pPr>
+            <a:r>
+              <a:rPr lang="en-US" sz="1400" b="1" dirty="0">
+                <a:solidFill>
+                  <a:srgbClr val="FFFFFF"/>
+                </a:solidFill>
+                <a:latin typeface="Arial" pitchFamily="34" charset="0"/>
+                <a:ea typeface="Arial" pitchFamily="34" charset="-122"/>
+                <a:cs typeface="Arial" pitchFamily="34" charset="-120"/>
+              </a:rPr>
+              <a:t>Advanced Analytics (3 queries)</a:t>
+            </a:r>
+            <a:endParaRPr lang="en-US" sz="1400" dirty="0"/>
+          </a:p>
+        </p:txBody>
+      </p:sp>
+      <p:sp>
+        <p:nvSpPr>
+          <p:cNvPr id="20" name="Text 18"/>
+          <p:cNvSpPr/>
+          <p:nvPr/>
+        </p:nvSpPr>
+        <p:spPr>
+          <a:xfrm>
+            <a:off x="226422" y="4910980"/>
+            <a:ext cx="6949440" cy="228600"/>
+          </a:xfrm>
+          <a:prstGeom prst="rect">
+            <a:avLst/>
+          </a:prstGeom>
+          <a:noFill/>
+          <a:ln/>
+        </p:spPr>
+        <p:txBody>
+          <a:bodyPr wrap="square" rtlCol="0" anchor="ctr"/>
+          <a:lstStyle/>
+          <a:p>
+            <a:pPr marL="0" indent="0">
+              <a:buNone/>
+            </a:pPr>
+            <a:r>
+              <a:rPr lang="en-US" sz="1200" dirty="0">
+                <a:solidFill>
+                  <a:srgbClr val="212121"/>
+                </a:solidFill>
+                <a:latin typeface="Arial" pitchFamily="34" charset="0"/>
+                <a:ea typeface="Arial" pitchFamily="34" charset="-122"/>
+                <a:cs typeface="Arial" pitchFamily="34" charset="-120"/>
+              </a:rPr>
+              <a:t>• Correlation analysis</a:t>
+            </a:r>
+            <a:endParaRPr lang="en-US" sz="1200" dirty="0"/>
+          </a:p>
+        </p:txBody>
+      </p:sp>
+      <p:sp>
+        <p:nvSpPr>
+          <p:cNvPr id="21" name="Text 19"/>
+          <p:cNvSpPr/>
+          <p:nvPr/>
+        </p:nvSpPr>
+        <p:spPr>
+          <a:xfrm>
+            <a:off x="2026194" y="4908696"/>
+            <a:ext cx="6949440" cy="228600"/>
+          </a:xfrm>
+          <a:prstGeom prst="rect">
+            <a:avLst/>
+          </a:prstGeom>
+          <a:noFill/>
+          <a:ln/>
+        </p:spPr>
+        <p:txBody>
+          <a:bodyPr wrap="square" rtlCol="0" anchor="ctr"/>
+          <a:lstStyle/>
+          <a:p>
+            <a:pPr marL="0" indent="0">
+              <a:buNone/>
+            </a:pPr>
+            <a:r>
+              <a:rPr lang="en-US" sz="1200" dirty="0">
+                <a:solidFill>
+                  <a:srgbClr val="212121"/>
+                </a:solidFill>
+                <a:latin typeface="Arial" pitchFamily="34" charset="0"/>
+                <a:ea typeface="Arial" pitchFamily="34" charset="-122"/>
+                <a:cs typeface="Arial" pitchFamily="34" charset="-120"/>
+              </a:rPr>
+              <a:t>• Trend forecasting</a:t>
+            </a:r>
+            <a:endParaRPr lang="en-US" sz="1200" dirty="0"/>
+          </a:p>
+        </p:txBody>
+      </p:sp>
+      <p:sp>
+        <p:nvSpPr>
+          <p:cNvPr id="22" name="Text 20"/>
+          <p:cNvSpPr/>
+          <p:nvPr/>
+        </p:nvSpPr>
+        <p:spPr>
+          <a:xfrm>
+            <a:off x="4152537" y="4905430"/>
+            <a:ext cx="6949440" cy="228600"/>
+          </a:xfrm>
+          <a:prstGeom prst="rect">
+            <a:avLst/>
+          </a:prstGeom>
+          <a:noFill/>
+          <a:ln/>
+        </p:spPr>
+        <p:txBody>
+          <a:bodyPr wrap="square" rtlCol="0" anchor="ctr"/>
+          <a:lstStyle/>
+          <a:p>
+            <a:pPr marL="0" indent="0">
+              <a:buNone/>
+            </a:pPr>
+            <a:r>
+              <a:rPr lang="en-US" sz="1200" dirty="0">
+                <a:solidFill>
+                  <a:srgbClr val="212121"/>
+                </a:solidFill>
+                <a:latin typeface="Arial" pitchFamily="34" charset="0"/>
+                <a:ea typeface="Arial" pitchFamily="34" charset="-122"/>
+                <a:cs typeface="Arial" pitchFamily="34" charset="-120"/>
+              </a:rPr>
+              <a:t>• Anomaly detection</a:t>
+            </a:r>
+            <a:endParaRPr lang="en-US" sz="1200" dirty="0"/>
+          </a:p>
+        </p:txBody>
+      </p:sp>
+    </p:spTree>
+  </p:cSld>
+  <p:clrMapOvr>
+    <a:masterClrMapping/>
+  </p:clrMapOvr>
+</p:sld>
+</file>
+
+<file path=ppt/slides/slide11.xml><?xml version="1.0" encoding="utf-8"?>
+<p:sld xmlns:a="http://schemas.openxmlformats.org/drawingml/2006/main" xmlns:r="http://schemas.openxmlformats.org/officeDocument/2006/relationships" xmlns:p="http://schemas.openxmlformats.org/presentationml/2006/main">
   <p:cSld name="Slide 10">
     <p:bg>
       <p:bgPr>
@@ -3130,7 +6683,7 @@
 </p:sld>
 </file>
 
-<file path=ppt/slides/slide11.xml><?xml version="1.0" encoding="utf-8"?>
+<file path=ppt/slides/slide12.xml><?xml version="1.0" encoding="utf-8"?>
 <p:sld xmlns:a="http://schemas.openxmlformats.org/drawingml/2006/main" xmlns:r="http://schemas.openxmlformats.org/officeDocument/2006/relationships" xmlns:p="http://schemas.openxmlformats.org/presentationml/2006/main">
   <p:cSld name="Slide 11">
     <p:bg>
@@ -4075,7 +7628,7 @@
 </p:sld>
 </file>
 
-<file path=ppt/slides/slide12.xml><?xml version="1.0" encoding="utf-8"?>
+<file path=ppt/slides/slide13.xml><?xml version="1.0" encoding="utf-8"?>
 <p:sld xmlns:a="http://schemas.openxmlformats.org/drawingml/2006/main" xmlns:r="http://schemas.openxmlformats.org/officeDocument/2006/relationships" xmlns:p="http://schemas.openxmlformats.org/presentationml/2006/main">
   <p:cSld name="Slide 12">
     <p:bg>
@@ -5013,7 +8566,7 @@
 </p:sld>
 </file>
 
-<file path=ppt/slides/slide13.xml><?xml version="1.0" encoding="utf-8"?>
+<file path=ppt/slides/slide14.xml><?xml version="1.0" encoding="utf-8"?>
 <p:sld xmlns:a="http://schemas.openxmlformats.org/drawingml/2006/main" xmlns:r="http://schemas.openxmlformats.org/officeDocument/2006/relationships" xmlns:p="http://schemas.openxmlformats.org/presentationml/2006/main">
   <p:cSld name="Slide 13">
     <p:bg>
@@ -5712,7 +9265,7 @@
 </p:sld>
 </file>
 
-<file path=ppt/slides/slide14.xml><?xml version="1.0" encoding="utf-8"?>
+<file path=ppt/slides/slide15.xml><?xml version="1.0" encoding="utf-8"?>
 <p:sld xmlns:a="http://schemas.openxmlformats.org/drawingml/2006/main" xmlns:r="http://schemas.openxmlformats.org/officeDocument/2006/relationships" xmlns:p="http://schemas.openxmlformats.org/presentationml/2006/main">
   <p:cSld name="Slide 14">
     <p:bg>
@@ -6447,7 +10000,7 @@
 </p:sld>
 </file>
 
-<file path=ppt/slides/slide15.xml><?xml version="1.0" encoding="utf-8"?>
+<file path=ppt/slides/slide16.xml><?xml version="1.0" encoding="utf-8"?>
 <p:sld xmlns:a="http://schemas.openxmlformats.org/drawingml/2006/main" xmlns:r="http://schemas.openxmlformats.org/officeDocument/2006/relationships" xmlns:p="http://schemas.openxmlformats.org/presentationml/2006/main">
   <p:cSld name="Slide 15">
     <p:bg>
@@ -7251,6 +10804,280 @@
       </p:grpSpPr>
       <p:sp>
         <p:nvSpPr>
+          <p:cNvPr id="2" name="Title 1">
+            <a:extLst>
+              <a:ext uri="{FF2B5EF4-FFF2-40B4-BE49-F238E27FC236}">
+                <a16:creationId xmlns:a16="http://schemas.microsoft.com/office/drawing/2014/main" id="{E3E95985-F3E0-BC11-A536-B2914C1D5D51}"/>
+              </a:ext>
+            </a:extLst>
+          </p:cNvPr>
+          <p:cNvSpPr>
+            <a:spLocks noGrp="1"/>
+          </p:cNvSpPr>
+          <p:nvPr>
+            <p:ph type="title"/>
+          </p:nvPr>
+        </p:nvSpPr>
+        <p:spPr/>
+        <p:txBody>
+          <a:bodyPr/>
+          <a:lstStyle/>
+          <a:p>
+            <a:r>
+              <a:rPr lang="en-US" dirty="0"/>
+              <a:t>GROUP 1 MEMBERS</a:t>
+            </a:r>
+          </a:p>
+        </p:txBody>
+      </p:sp>
+      <p:sp>
+        <p:nvSpPr>
+          <p:cNvPr id="3" name="Content Placeholder 2">
+            <a:extLst>
+              <a:ext uri="{FF2B5EF4-FFF2-40B4-BE49-F238E27FC236}">
+                <a16:creationId xmlns:a16="http://schemas.microsoft.com/office/drawing/2014/main" id="{355E2629-E183-D7EF-F5EC-0BCC4526526C}"/>
+              </a:ext>
+            </a:extLst>
+          </p:cNvPr>
+          <p:cNvSpPr>
+            <a:spLocks noGrp="1"/>
+          </p:cNvSpPr>
+          <p:nvPr>
+            <p:ph idx="1"/>
+          </p:nvPr>
+        </p:nvSpPr>
+        <p:spPr/>
+        <p:txBody>
+          <a:bodyPr/>
+          <a:lstStyle/>
+          <a:p>
+            <a:pPr marL="0" indent="0">
+              <a:buNone/>
+            </a:pPr>
+            <a:endParaRPr lang="en-US" dirty="0"/>
+          </a:p>
+          <a:p>
+            <a:pPr marL="0" indent="0">
+              <a:buNone/>
+            </a:pPr>
+            <a:endParaRPr lang="en-US" dirty="0"/>
+          </a:p>
+        </p:txBody>
+      </p:sp>
+      <p:graphicFrame>
+        <p:nvGraphicFramePr>
+          <p:cNvPr id="6" name="Table 5">
+            <a:extLst>
+              <a:ext uri="{FF2B5EF4-FFF2-40B4-BE49-F238E27FC236}">
+                <a16:creationId xmlns:a16="http://schemas.microsoft.com/office/drawing/2014/main" id="{050D6E6D-F876-F6D2-6D6E-8761DB9E8D80}"/>
+              </a:ext>
+            </a:extLst>
+          </p:cNvPr>
+          <p:cNvGraphicFramePr>
+            <a:graphicFrameLocks noGrp="1"/>
+          </p:cNvGraphicFramePr>
+          <p:nvPr>
+            <p:extLst>
+              <p:ext uri="{D42A27DB-BD31-4B8C-83A1-F6EECF244321}">
+                <p14:modId xmlns:p14="http://schemas.microsoft.com/office/powerpoint/2010/main" val="1608556868"/>
+              </p:ext>
+            </p:extLst>
+          </p:nvPr>
+        </p:nvGraphicFramePr>
+        <p:xfrm>
+          <a:off x="1302327" y="1742787"/>
+          <a:ext cx="6096000" cy="1409700"/>
+        </p:xfrm>
+        <a:graphic>
+          <a:graphicData uri="http://schemas.openxmlformats.org/drawingml/2006/table">
+            <a:tbl>
+              <a:tblPr firstRow="1" bandRow="1">
+                <a:tableStyleId>{5C22544A-7EE6-4342-B048-85BDC9FD1C3A}</a:tableStyleId>
+              </a:tblPr>
+              <a:tblGrid>
+                <a:gridCol w="3048000">
+                  <a:extLst>
+                    <a:ext uri="{9D8B030D-6E8A-4147-A177-3AD203B41FA5}">
+                      <a16:colId xmlns:a16="http://schemas.microsoft.com/office/drawing/2014/main" val="660847020"/>
+                    </a:ext>
+                  </a:extLst>
+                </a:gridCol>
+                <a:gridCol w="3048000">
+                  <a:extLst>
+                    <a:ext uri="{9D8B030D-6E8A-4147-A177-3AD203B41FA5}">
+                      <a16:colId xmlns:a16="http://schemas.microsoft.com/office/drawing/2014/main" val="2953997503"/>
+                    </a:ext>
+                  </a:extLst>
+                </a:gridCol>
+              </a:tblGrid>
+              <a:tr h="0">
+                <a:tc>
+                  <a:txBody>
+                    <a:bodyPr/>
+                    <a:lstStyle/>
+                    <a:p>
+                      <a:r>
+                        <a:rPr lang="en-US" dirty="0"/>
+                        <a:t>NAMES</a:t>
+                      </a:r>
+                    </a:p>
+                  </a:txBody>
+                  <a:tcPr/>
+                </a:tc>
+                <a:tc>
+                  <a:txBody>
+                    <a:bodyPr/>
+                    <a:lstStyle/>
+                    <a:p>
+                      <a:r>
+                        <a:rPr lang="en-US" dirty="0"/>
+                        <a:t>REGNO</a:t>
+                      </a:r>
+                    </a:p>
+                  </a:txBody>
+                  <a:tcPr/>
+                </a:tc>
+                <a:extLst>
+                  <a:ext uri="{0D108BD9-81ED-4DB2-BD59-A6C34878D82A}">
+                    <a16:rowId xmlns:a16="http://schemas.microsoft.com/office/drawing/2014/main" val="2465498167"/>
+                  </a:ext>
+                </a:extLst>
+              </a:tr>
+              <a:tr h="370840">
+                <a:tc>
+                  <a:txBody>
+                    <a:bodyPr/>
+                    <a:lstStyle/>
+                    <a:p>
+                      <a:r>
+                        <a:rPr lang="en-US" dirty="0"/>
+                        <a:t>IRIMASO Gertrude</a:t>
+                      </a:r>
+                    </a:p>
+                  </a:txBody>
+                  <a:tcPr/>
+                </a:tc>
+                <a:tc>
+                  <a:txBody>
+                    <a:bodyPr/>
+                    <a:lstStyle/>
+                    <a:p>
+                      <a:r>
+                        <a:rPr lang="en-US" dirty="0"/>
+                        <a:t>25RP19175</a:t>
+                      </a:r>
+                    </a:p>
+                  </a:txBody>
+                  <a:tcPr/>
+                </a:tc>
+                <a:extLst>
+                  <a:ext uri="{0D108BD9-81ED-4DB2-BD59-A6C34878D82A}">
+                    <a16:rowId xmlns:a16="http://schemas.microsoft.com/office/drawing/2014/main" val="729930081"/>
+                  </a:ext>
+                </a:extLst>
+              </a:tr>
+              <a:tr h="370840">
+                <a:tc>
+                  <a:txBody>
+                    <a:bodyPr/>
+                    <a:lstStyle/>
+                    <a:p>
+                      <a:r>
+                        <a:rPr lang="en-US" dirty="0"/>
+                        <a:t>NZAYISENGA Cyprien</a:t>
+                      </a:r>
+                    </a:p>
+                  </a:txBody>
+                  <a:tcPr/>
+                </a:tc>
+                <a:tc>
+                  <a:txBody>
+                    <a:bodyPr/>
+                    <a:lstStyle/>
+                    <a:p>
+                      <a:r>
+                        <a:rPr lang="en-US" dirty="0"/>
+                        <a:t>25RP20156</a:t>
+                      </a:r>
+                    </a:p>
+                  </a:txBody>
+                  <a:tcPr/>
+                </a:tc>
+                <a:extLst>
+                  <a:ext uri="{0D108BD9-81ED-4DB2-BD59-A6C34878D82A}">
+                    <a16:rowId xmlns:a16="http://schemas.microsoft.com/office/drawing/2014/main" val="942375881"/>
+                  </a:ext>
+                </a:extLst>
+              </a:tr>
+              <a:tr h="370840">
+                <a:tc>
+                  <a:txBody>
+                    <a:bodyPr/>
+                    <a:lstStyle/>
+                    <a:p>
+                      <a:r>
+                        <a:rPr lang="en-US" dirty="0"/>
+                        <a:t>AKIMANA Aline</a:t>
+                      </a:r>
+                    </a:p>
+                  </a:txBody>
+                  <a:tcPr/>
+                </a:tc>
+                <a:tc>
+                  <a:txBody>
+                    <a:bodyPr/>
+                    <a:lstStyle/>
+                    <a:p>
+                      <a:r>
+                        <a:rPr lang="en-US" dirty="0"/>
+                        <a:t>25RP20978</a:t>
+                      </a:r>
+                    </a:p>
+                  </a:txBody>
+                  <a:tcPr/>
+                </a:tc>
+                <a:extLst>
+                  <a:ext uri="{0D108BD9-81ED-4DB2-BD59-A6C34878D82A}">
+                    <a16:rowId xmlns:a16="http://schemas.microsoft.com/office/drawing/2014/main" val="3451621712"/>
+                  </a:ext>
+                </a:extLst>
+              </a:tr>
+            </a:tbl>
+          </a:graphicData>
+        </a:graphic>
+      </p:graphicFrame>
+    </p:spTree>
+    <p:extLst>
+      <p:ext uri="{BB962C8B-B14F-4D97-AF65-F5344CB8AC3E}">
+        <p14:creationId xmlns:p14="http://schemas.microsoft.com/office/powerpoint/2010/main" val="2314410834"/>
+      </p:ext>
+    </p:extLst>
+  </p:cSld>
+  <p:clrMapOvr>
+    <a:masterClrMapping/>
+  </p:clrMapOvr>
+</p:sld>
+</file>
+
+<file path=ppt/slides/slide3.xml><?xml version="1.0" encoding="utf-8"?>
+<p:sld xmlns:a="http://schemas.openxmlformats.org/drawingml/2006/main" xmlns:r="http://schemas.openxmlformats.org/officeDocument/2006/relationships" xmlns:p="http://schemas.openxmlformats.org/presentationml/2006/main">
+  <p:cSld>
+    <p:spTree>
+      <p:nvGrpSpPr>
+        <p:cNvPr id="1" name=""/>
+        <p:cNvGrpSpPr/>
+        <p:nvPr/>
+      </p:nvGrpSpPr>
+      <p:grpSpPr>
+        <a:xfrm>
+          <a:off x="0" y="0"/>
+          <a:ext cx="0" cy="0"/>
+          <a:chOff x="0" y="0"/>
+          <a:chExt cx="0" cy="0"/>
+        </a:xfrm>
+      </p:grpSpPr>
+      <p:sp>
+        <p:nvSpPr>
           <p:cNvPr id="3" name="Content Placeholder 2">
             <a:extLst>
               <a:ext uri="{FF2B5EF4-FFF2-40B4-BE49-F238E27FC236}">
@@ -8372,7 +12199,7 @@
 </p:sld>
 </file>
 
-<file path=ppt/slides/slide3.xml><?xml version="1.0" encoding="utf-8"?>
+<file path=ppt/slides/slide4.xml><?xml version="1.0" encoding="utf-8"?>
 <p:sld xmlns:a="http://schemas.openxmlformats.org/drawingml/2006/main" xmlns:r="http://schemas.openxmlformats.org/officeDocument/2006/relationships" xmlns:p="http://schemas.openxmlformats.org/presentationml/2006/main">
   <p:cSld name="Slide 3">
     <p:bg>
@@ -9203,7 +13030,7 @@
 </p:sld>
 </file>
 
-<file path=ppt/slides/slide4.xml><?xml version="1.0" encoding="utf-8"?>
+<file path=ppt/slides/slide5.xml><?xml version="1.0" encoding="utf-8"?>
 <p:sld xmlns:a="http://schemas.openxmlformats.org/drawingml/2006/main" xmlns:r="http://schemas.openxmlformats.org/officeDocument/2006/relationships" xmlns:p="http://schemas.openxmlformats.org/presentationml/2006/main">
   <p:cSld name="Slide 4">
     <p:bg>
@@ -10353,7 +14180,7 @@
 </p:sld>
 </file>
 
-<file path=ppt/slides/slide5.xml><?xml version="1.0" encoding="utf-8"?>
+<file path=ppt/slides/slide6.xml><?xml version="1.0" encoding="utf-8"?>
 <p:sld xmlns:a="http://schemas.openxmlformats.org/drawingml/2006/main" xmlns:r="http://schemas.openxmlformats.org/officeDocument/2006/relationships" xmlns:p="http://schemas.openxmlformats.org/presentationml/2006/main">
   <p:cSld name="Slide 5">
     <p:bg>
@@ -11062,7 +14889,7 @@
                 <a:ea typeface="Arial" pitchFamily="34" charset="-122"/>
                 <a:cs typeface="Arial" pitchFamily="34" charset="-120"/>
               </a:rPr>
-              <a:t>4 Dimensions</a:t>
+              <a:t>5 Dimensions</a:t>
             </a:r>
             <a:endParaRPr lang="en-US" sz="1100" dirty="0"/>
           </a:p>
@@ -11493,7 +15320,7 @@
 </p:sld>
 </file>
 
-<file path=ppt/slides/slide6.xml><?xml version="1.0" encoding="utf-8"?>
+<file path=ppt/slides/slide7.xml><?xml version="1.0" encoding="utf-8"?>
 <p:sld xmlns:a="http://schemas.openxmlformats.org/drawingml/2006/main" xmlns:r="http://schemas.openxmlformats.org/officeDocument/2006/relationships" xmlns:p="http://schemas.openxmlformats.org/presentationml/2006/main">
   <p:cSld name="Slide 6">
     <p:bg>
@@ -11590,7 +15417,7 @@
                 <a:ea typeface="Arial" pitchFamily="34" charset="-122"/>
                 <a:cs typeface="Arial" pitchFamily="34" charset="-120"/>
               </a:rPr>
-              <a:t>1 Fact Table + 4 Dimension Tables</a:t>
+              <a:t>1 Fact Table + 5 Dimension Tables</a:t>
             </a:r>
             <a:endParaRPr lang="en-US" sz="1800" dirty="0"/>
           </a:p>
@@ -11892,7 +15719,7 @@
         </p:nvSpPr>
         <p:spPr>
           <a:xfrm>
-            <a:off x="6400800" y="1645920"/>
+            <a:off x="6492240" y="1603193"/>
             <a:ext cx="1828800" cy="1097280"/>
           </a:xfrm>
           <a:prstGeom prst="rect">
@@ -12265,6 +16092,88 @@
           </a:p>
         </p:txBody>
       </p:sp>
+      <p:sp>
+        <p:nvSpPr>
+          <p:cNvPr id="10" name="Shape 9">
+            <a:extLst>
+              <a:ext uri="{FF2B5EF4-FFF2-40B4-BE49-F238E27FC236}">
+                <a16:creationId xmlns:a16="http://schemas.microsoft.com/office/drawing/2014/main" id="{704340C4-CDBB-09C6-BBF4-9CE5046B086A}"/>
+              </a:ext>
+            </a:extLst>
+          </p:cNvPr>
+          <p:cNvSpPr/>
+          <p:nvPr/>
+        </p:nvSpPr>
+        <p:spPr>
+          <a:xfrm>
+            <a:off x="3140824" y="1493520"/>
+            <a:ext cx="2299854" cy="1097280"/>
+          </a:xfrm>
+          <a:prstGeom prst="rect">
+            <a:avLst/>
+          </a:prstGeom>
+          <a:solidFill>
+            <a:srgbClr val="1C7293"/>
+          </a:solidFill>
+          <a:ln w="25400">
+            <a:solidFill>
+              <a:srgbClr val="1C7293"/>
+            </a:solidFill>
+            <a:prstDash val="solid"/>
+          </a:ln>
+        </p:spPr>
+        <p:txBody>
+          <a:bodyPr/>
+          <a:lstStyle/>
+          <a:p>
+            <a:pPr algn="ctr"/>
+            <a:r>
+              <a:rPr lang="en-US" sz="1400" b="1" dirty="0" err="1">
+                <a:solidFill>
+                  <a:srgbClr val="FFFFFF"/>
+                </a:solidFill>
+                <a:latin typeface="Arial" pitchFamily="34" charset="0"/>
+                <a:ea typeface="Arial" pitchFamily="34" charset="-122"/>
+                <a:cs typeface="Arial" pitchFamily="34" charset="-120"/>
+              </a:rPr>
+              <a:t>Dim_department</a:t>
+            </a:r>
+            <a:endParaRPr lang="en-US" sz="1400" b="1" dirty="0">
+              <a:solidFill>
+                <a:srgbClr val="FFFFFF"/>
+              </a:solidFill>
+              <a:latin typeface="Arial" pitchFamily="34" charset="0"/>
+              <a:ea typeface="Arial" pitchFamily="34" charset="-122"/>
+              <a:cs typeface="Arial" pitchFamily="34" charset="-120"/>
+            </a:endParaRPr>
+          </a:p>
+          <a:p>
+            <a:pPr algn="ctr"/>
+            <a:endParaRPr lang="en-US" b="1" dirty="0">
+              <a:solidFill>
+                <a:srgbClr val="FFFFFF"/>
+              </a:solidFill>
+              <a:latin typeface="Arial" pitchFamily="34" charset="0"/>
+              <a:ea typeface="Arial" pitchFamily="34" charset="-122"/>
+              <a:cs typeface="Arial" pitchFamily="34" charset="-120"/>
+            </a:endParaRPr>
+          </a:p>
+          <a:p>
+            <a:pPr algn="ctr"/>
+            <a:r>
+              <a:rPr lang="en-US" sz="1200" b="1" dirty="0">
+                <a:solidFill>
+                  <a:srgbClr val="FFFFFF"/>
+                </a:solidFill>
+                <a:latin typeface="Arial" pitchFamily="34" charset="0"/>
+                <a:ea typeface="Arial" pitchFamily="34" charset="-122"/>
+                <a:cs typeface="Arial" pitchFamily="34" charset="-120"/>
+              </a:rPr>
+              <a:t>Department/info</a:t>
+            </a:r>
+          </a:p>
+        </p:txBody>
+      </p:sp>
     </p:spTree>
   </p:cSld>
   <p:clrMapOvr>
@@ -12273,7 +16182,7 @@
 </p:sld>
 </file>
 
-<file path=ppt/slides/slide7.xml><?xml version="1.0" encoding="utf-8"?>
+<file path=ppt/slides/slide8.xml><?xml version="1.0" encoding="utf-8"?>
 <p:sld xmlns:a="http://schemas.openxmlformats.org/drawingml/2006/main" xmlns:r="http://schemas.openxmlformats.org/officeDocument/2006/relationships" xmlns:p="http://schemas.openxmlformats.org/presentationml/2006/main">
   <p:cSld name="Slide 7">
     <p:bg>
@@ -13699,7 +17608,7 @@
 </p:sld>
 </file>
 
-<file path=ppt/slides/slide8.xml><?xml version="1.0" encoding="utf-8"?>
+<file path=ppt/slides/slide9.xml><?xml version="1.0" encoding="utf-8"?>
 <p:sld xmlns:a="http://schemas.openxmlformats.org/drawingml/2006/main" xmlns:r="http://schemas.openxmlformats.org/officeDocument/2006/relationships" xmlns:p="http://schemas.openxmlformats.org/presentationml/2006/main">
   <p:cSld name="Slide 8">
     <p:bg>
@@ -15696,822 +19605,6 @@
 </p:sld>
 </file>
 
-<file path=ppt/slides/slide9.xml><?xml version="1.0" encoding="utf-8"?>
-<p:sld xmlns:a="http://schemas.openxmlformats.org/drawingml/2006/main" xmlns:r="http://schemas.openxmlformats.org/officeDocument/2006/relationships" xmlns:p="http://schemas.openxmlformats.org/presentationml/2006/main">
-  <p:cSld name="Slide 9">
-    <p:bg>
-      <p:bgPr>
-        <a:solidFill>
-          <a:srgbClr val="FFFFFF"/>
-        </a:solidFill>
-        <a:effectLst/>
-      </p:bgPr>
-    </p:bg>
-    <p:spTree>
-      <p:nvGrpSpPr>
-        <p:cNvPr id="1" name=""/>
-        <p:cNvGrpSpPr/>
-        <p:nvPr/>
-      </p:nvGrpSpPr>
-      <p:grpSpPr>
-        <a:xfrm>
-          <a:off x="0" y="0"/>
-          <a:ext cx="0" cy="0"/>
-          <a:chOff x="0" y="0"/>
-          <a:chExt cx="0" cy="0"/>
-        </a:xfrm>
-      </p:grpSpPr>
-      <p:sp>
-        <p:nvSpPr>
-          <p:cNvPr id="2" name="Text 0"/>
-          <p:cNvSpPr/>
-          <p:nvPr/>
-        </p:nvSpPr>
-        <p:spPr>
-          <a:xfrm>
-            <a:off x="457200" y="274320"/>
-            <a:ext cx="8229600" cy="548640"/>
-          </a:xfrm>
-          <a:prstGeom prst="rect">
-            <a:avLst/>
-          </a:prstGeom>
-          <a:noFill/>
-          <a:ln/>
-        </p:spPr>
-        <p:txBody>
-          <a:bodyPr wrap="square" rtlCol="0" anchor="ctr"/>
-          <a:lstStyle/>
-          <a:p>
-            <a:pPr marL="0" indent="0">
-              <a:buNone/>
-            </a:pPr>
-            <a:r>
-              <a:rPr lang="en-US" sz="4000" b="1" dirty="0">
-                <a:solidFill>
-                  <a:srgbClr val="065A82"/>
-                </a:solidFill>
-                <a:latin typeface="Arial Black" pitchFamily="34" charset="0"/>
-                <a:ea typeface="Arial Black" pitchFamily="34" charset="-122"/>
-                <a:cs typeface="Arial Black" pitchFamily="34" charset="-120"/>
-              </a:rPr>
-              <a:t>Business Intelligence &amp; Analytics</a:t>
-            </a:r>
-            <a:endParaRPr lang="en-US" sz="4000" dirty="0"/>
-          </a:p>
-        </p:txBody>
-      </p:sp>
-      <p:sp>
-        <p:nvSpPr>
-          <p:cNvPr id="3" name="Text 1"/>
-          <p:cNvSpPr/>
-          <p:nvPr/>
-        </p:nvSpPr>
-        <p:spPr>
-          <a:xfrm>
-            <a:off x="457200" y="1097280"/>
-            <a:ext cx="8229600" cy="274320"/>
-          </a:xfrm>
-          <a:prstGeom prst="rect">
-            <a:avLst/>
-          </a:prstGeom>
-          <a:noFill/>
-          <a:ln/>
-        </p:spPr>
-        <p:txBody>
-          <a:bodyPr wrap="square" rtlCol="0" anchor="ctr"/>
-          <a:lstStyle/>
-          <a:p>
-            <a:pPr marL="0" indent="0">
-              <a:buNone/>
-            </a:pPr>
-            <a:r>
-              <a:rPr lang="en-US" sz="1800" i="1" dirty="0">
-                <a:solidFill>
-                  <a:srgbClr val="666666"/>
-                </a:solidFill>
-                <a:latin typeface="Arial" pitchFamily="34" charset="0"/>
-                <a:ea typeface="Arial" pitchFamily="34" charset="-122"/>
-                <a:cs typeface="Arial" pitchFamily="34" charset="-120"/>
-              </a:rPr>
-              <a:t>13+ SQL Queries Answering Critical Questions</a:t>
-            </a:r>
-            <a:endParaRPr lang="en-US" sz="1800" dirty="0"/>
-          </a:p>
-        </p:txBody>
-      </p:sp>
-      <p:sp>
-        <p:nvSpPr>
-          <p:cNvPr id="4" name="Shape 2"/>
-          <p:cNvSpPr/>
-          <p:nvPr/>
-        </p:nvSpPr>
-        <p:spPr>
-          <a:xfrm>
-            <a:off x="513805" y="1449324"/>
-            <a:ext cx="7680960" cy="365760"/>
-          </a:xfrm>
-          <a:prstGeom prst="rect">
-            <a:avLst/>
-          </a:prstGeom>
-          <a:solidFill>
-            <a:srgbClr val="1C7293"/>
-          </a:solidFill>
-          <a:ln/>
-        </p:spPr>
-        <p:txBody>
-          <a:bodyPr/>
-          <a:lstStyle/>
-          <a:p>
-            <a:endParaRPr lang="en-US"/>
-          </a:p>
-        </p:txBody>
-      </p:sp>
-      <p:sp>
-        <p:nvSpPr>
-          <p:cNvPr id="5" name="Text 3"/>
-          <p:cNvSpPr/>
-          <p:nvPr/>
-        </p:nvSpPr>
-        <p:spPr>
-          <a:xfrm>
-            <a:off x="731520" y="1473490"/>
-            <a:ext cx="7680960" cy="365760"/>
-          </a:xfrm>
-          <a:prstGeom prst="rect">
-            <a:avLst/>
-          </a:prstGeom>
-          <a:noFill/>
-          <a:ln/>
-        </p:spPr>
-        <p:txBody>
-          <a:bodyPr wrap="square" rtlCol="0" anchor="ctr"/>
-          <a:lstStyle/>
-          <a:p>
-            <a:pPr marL="0" indent="0">
-              <a:buNone/>
-            </a:pPr>
-            <a:r>
-              <a:rPr lang="en-US" sz="1400" b="1" dirty="0">
-                <a:solidFill>
-                  <a:srgbClr val="FFFFFF"/>
-                </a:solidFill>
-                <a:latin typeface="Arial" pitchFamily="34" charset="0"/>
-                <a:ea typeface="Arial" pitchFamily="34" charset="-122"/>
-                <a:cs typeface="Arial" pitchFamily="34" charset="-120"/>
-              </a:rPr>
-              <a:t>Basic Reporting (5 queries)</a:t>
-            </a:r>
-            <a:endParaRPr lang="en-US" sz="1400" dirty="0"/>
-          </a:p>
-        </p:txBody>
-      </p:sp>
-      <p:sp>
-        <p:nvSpPr>
-          <p:cNvPr id="6" name="Text 4"/>
-          <p:cNvSpPr/>
-          <p:nvPr/>
-        </p:nvSpPr>
-        <p:spPr>
-          <a:xfrm>
-            <a:off x="1010195" y="1888236"/>
-            <a:ext cx="6949440" cy="228600"/>
-          </a:xfrm>
-          <a:prstGeom prst="rect">
-            <a:avLst/>
-          </a:prstGeom>
-          <a:noFill/>
-          <a:ln/>
-        </p:spPr>
-        <p:txBody>
-          <a:bodyPr wrap="square" rtlCol="0" anchor="ctr"/>
-          <a:lstStyle/>
-          <a:p>
-            <a:pPr marL="0" indent="0">
-              <a:buNone/>
-            </a:pPr>
-            <a:r>
-              <a:rPr lang="en-US" sz="1200" dirty="0">
-                <a:solidFill>
-                  <a:srgbClr val="212121"/>
-                </a:solidFill>
-                <a:latin typeface="Arial" pitchFamily="34" charset="0"/>
-                <a:ea typeface="Arial" pitchFamily="34" charset="-122"/>
-                <a:cs typeface="Arial" pitchFamily="34" charset="-120"/>
-              </a:rPr>
-              <a:t>• Monthly usage trends</a:t>
-            </a:r>
-            <a:endParaRPr lang="en-US" sz="1200" dirty="0"/>
-          </a:p>
-        </p:txBody>
-      </p:sp>
-      <p:sp>
-        <p:nvSpPr>
-          <p:cNvPr id="7" name="Text 5"/>
-          <p:cNvSpPr/>
-          <p:nvPr/>
-        </p:nvSpPr>
-        <p:spPr>
-          <a:xfrm>
-            <a:off x="1010195" y="2107692"/>
-            <a:ext cx="6949440" cy="228600"/>
-          </a:xfrm>
-          <a:prstGeom prst="rect">
-            <a:avLst/>
-          </a:prstGeom>
-          <a:noFill/>
-          <a:ln/>
-        </p:spPr>
-        <p:txBody>
-          <a:bodyPr wrap="square" rtlCol="0" anchor="ctr"/>
-          <a:lstStyle/>
-          <a:p>
-            <a:pPr marL="0" indent="0">
-              <a:buNone/>
-            </a:pPr>
-            <a:r>
-              <a:rPr lang="en-US" sz="1200" dirty="0">
-                <a:solidFill>
-                  <a:srgbClr val="212121"/>
-                </a:solidFill>
-                <a:latin typeface="Arial" pitchFamily="34" charset="0"/>
-                <a:ea typeface="Arial" pitchFamily="34" charset="-122"/>
-                <a:cs typeface="Arial" pitchFamily="34" charset="-120"/>
-              </a:rPr>
-              <a:t>• Department rankings</a:t>
-            </a:r>
-            <a:endParaRPr lang="en-US" sz="1200" dirty="0"/>
-          </a:p>
-        </p:txBody>
-      </p:sp>
-      <p:sp>
-        <p:nvSpPr>
-          <p:cNvPr id="8" name="Text 6"/>
-          <p:cNvSpPr/>
-          <p:nvPr/>
-        </p:nvSpPr>
-        <p:spPr>
-          <a:xfrm>
-            <a:off x="1047931" y="2313432"/>
-            <a:ext cx="6949440" cy="228600"/>
-          </a:xfrm>
-          <a:prstGeom prst="rect">
-            <a:avLst/>
-          </a:prstGeom>
-          <a:noFill/>
-          <a:ln/>
-        </p:spPr>
-        <p:txBody>
-          <a:bodyPr wrap="square" rtlCol="0" anchor="ctr"/>
-          <a:lstStyle/>
-          <a:p>
-            <a:pPr marL="0" indent="0">
-              <a:buNone/>
-            </a:pPr>
-            <a:r>
-              <a:rPr lang="en-US" sz="1200" dirty="0">
-                <a:solidFill>
-                  <a:srgbClr val="212121"/>
-                </a:solidFill>
-                <a:latin typeface="Arial" pitchFamily="34" charset="0"/>
-                <a:ea typeface="Arial" pitchFamily="34" charset="-122"/>
-                <a:cs typeface="Arial" pitchFamily="34" charset="-120"/>
-              </a:rPr>
-              <a:t>• Peak usage times</a:t>
-            </a:r>
-            <a:endParaRPr lang="en-US" sz="1200" dirty="0"/>
-          </a:p>
-        </p:txBody>
-      </p:sp>
-      <p:sp>
-        <p:nvSpPr>
-          <p:cNvPr id="9" name="Text 7"/>
-          <p:cNvSpPr/>
-          <p:nvPr/>
-        </p:nvSpPr>
-        <p:spPr>
-          <a:xfrm>
-            <a:off x="1047931" y="2500884"/>
-            <a:ext cx="6949440" cy="228600"/>
-          </a:xfrm>
-          <a:prstGeom prst="rect">
-            <a:avLst/>
-          </a:prstGeom>
-          <a:noFill/>
-          <a:ln/>
-        </p:spPr>
-        <p:txBody>
-          <a:bodyPr wrap="square" rtlCol="0" anchor="ctr"/>
-          <a:lstStyle/>
-          <a:p>
-            <a:pPr marL="0" indent="0">
-              <a:buNone/>
-            </a:pPr>
-            <a:r>
-              <a:rPr lang="en-US" sz="1200" dirty="0">
-                <a:solidFill>
-                  <a:srgbClr val="212121"/>
-                </a:solidFill>
-                <a:latin typeface="Arial" pitchFamily="34" charset="0"/>
-                <a:ea typeface="Arial" pitchFamily="34" charset="-122"/>
-                <a:cs typeface="Arial" pitchFamily="34" charset="-120"/>
-              </a:rPr>
-              <a:t>• Popular resources</a:t>
-            </a:r>
-            <a:endParaRPr lang="en-US" sz="1200" dirty="0"/>
-          </a:p>
-        </p:txBody>
-      </p:sp>
-      <p:sp>
-        <p:nvSpPr>
-          <p:cNvPr id="10" name="Text 8"/>
-          <p:cNvSpPr/>
-          <p:nvPr/>
-        </p:nvSpPr>
-        <p:spPr>
-          <a:xfrm>
-            <a:off x="1047931" y="2696174"/>
-            <a:ext cx="6949440" cy="228600"/>
-          </a:xfrm>
-          <a:prstGeom prst="rect">
-            <a:avLst/>
-          </a:prstGeom>
-          <a:noFill/>
-          <a:ln/>
-        </p:spPr>
-        <p:txBody>
-          <a:bodyPr wrap="square" rtlCol="0" anchor="ctr"/>
-          <a:lstStyle/>
-          <a:p>
-            <a:pPr marL="0" indent="0">
-              <a:buNone/>
-            </a:pPr>
-            <a:r>
-              <a:rPr lang="en-US" sz="1200" dirty="0">
-                <a:solidFill>
-                  <a:srgbClr val="212121"/>
-                </a:solidFill>
-                <a:latin typeface="Arial" pitchFamily="34" charset="0"/>
-                <a:ea typeface="Arial" pitchFamily="34" charset="-122"/>
-                <a:cs typeface="Arial" pitchFamily="34" charset="-120"/>
-              </a:rPr>
-              <a:t>• Average loan duration</a:t>
-            </a:r>
-            <a:endParaRPr lang="en-US" sz="1200" dirty="0"/>
-          </a:p>
-        </p:txBody>
-      </p:sp>
-      <p:sp>
-        <p:nvSpPr>
-          <p:cNvPr id="11" name="Shape 9"/>
-          <p:cNvSpPr/>
-          <p:nvPr/>
-        </p:nvSpPr>
-        <p:spPr>
-          <a:xfrm>
-            <a:off x="513805" y="3073690"/>
-            <a:ext cx="7680960" cy="365760"/>
-          </a:xfrm>
-          <a:prstGeom prst="rect">
-            <a:avLst/>
-          </a:prstGeom>
-          <a:solidFill>
-            <a:srgbClr val="1C7293"/>
-          </a:solidFill>
-          <a:ln/>
-        </p:spPr>
-        <p:txBody>
-          <a:bodyPr/>
-          <a:lstStyle/>
-          <a:p>
-            <a:endParaRPr lang="en-US"/>
-          </a:p>
-        </p:txBody>
-      </p:sp>
-      <p:sp>
-        <p:nvSpPr>
-          <p:cNvPr id="12" name="Text 10"/>
-          <p:cNvSpPr/>
-          <p:nvPr/>
-        </p:nvSpPr>
-        <p:spPr>
-          <a:xfrm>
-            <a:off x="731520" y="3119410"/>
-            <a:ext cx="7680960" cy="365760"/>
-          </a:xfrm>
-          <a:prstGeom prst="rect">
-            <a:avLst/>
-          </a:prstGeom>
-          <a:noFill/>
-          <a:ln/>
-        </p:spPr>
-        <p:txBody>
-          <a:bodyPr wrap="square" rtlCol="0" anchor="ctr"/>
-          <a:lstStyle/>
-          <a:p>
-            <a:pPr marL="0" indent="0">
-              <a:buNone/>
-            </a:pPr>
-            <a:r>
-              <a:rPr lang="en-US" sz="1400" b="1" dirty="0">
-                <a:solidFill>
-                  <a:srgbClr val="FFFFFF"/>
-                </a:solidFill>
-                <a:latin typeface="Arial" pitchFamily="34" charset="0"/>
-                <a:ea typeface="Arial" pitchFamily="34" charset="-122"/>
-                <a:cs typeface="Arial" pitchFamily="34" charset="-120"/>
-              </a:rPr>
-              <a:t>OLAP Operations (5 queries)</a:t>
-            </a:r>
-            <a:endParaRPr lang="en-US" sz="1400" dirty="0"/>
-          </a:p>
-        </p:txBody>
-      </p:sp>
-      <p:sp>
-        <p:nvSpPr>
-          <p:cNvPr id="13" name="Text 11"/>
-          <p:cNvSpPr/>
-          <p:nvPr/>
-        </p:nvSpPr>
-        <p:spPr>
-          <a:xfrm>
-            <a:off x="879565" y="3594898"/>
-            <a:ext cx="6949440" cy="228600"/>
-          </a:xfrm>
-          <a:prstGeom prst="rect">
-            <a:avLst/>
-          </a:prstGeom>
-          <a:noFill/>
-          <a:ln/>
-        </p:spPr>
-        <p:txBody>
-          <a:bodyPr wrap="square" rtlCol="0" anchor="ctr"/>
-          <a:lstStyle/>
-          <a:p>
-            <a:pPr marL="0" indent="0">
-              <a:buNone/>
-            </a:pPr>
-            <a:r>
-              <a:rPr lang="en-US" sz="1200" dirty="0">
-                <a:solidFill>
-                  <a:srgbClr val="212121"/>
-                </a:solidFill>
-                <a:latin typeface="Arial" pitchFamily="34" charset="0"/>
-                <a:ea typeface="Arial" pitchFamily="34" charset="-122"/>
-                <a:cs typeface="Arial" pitchFamily="34" charset="-120"/>
-              </a:rPr>
-              <a:t>• Drill-down (Year → Day)</a:t>
-            </a:r>
-            <a:endParaRPr lang="en-US" sz="1200" dirty="0"/>
-          </a:p>
-        </p:txBody>
-      </p:sp>
-      <p:sp>
-        <p:nvSpPr>
-          <p:cNvPr id="14" name="Text 12"/>
-          <p:cNvSpPr/>
-          <p:nvPr/>
-        </p:nvSpPr>
-        <p:spPr>
-          <a:xfrm>
-            <a:off x="879565" y="3757694"/>
-            <a:ext cx="6949440" cy="228600"/>
-          </a:xfrm>
-          <a:prstGeom prst="rect">
-            <a:avLst/>
-          </a:prstGeom>
-          <a:noFill/>
-          <a:ln/>
-        </p:spPr>
-        <p:txBody>
-          <a:bodyPr wrap="square" rtlCol="0" anchor="ctr"/>
-          <a:lstStyle/>
-          <a:p>
-            <a:pPr marL="0" indent="0">
-              <a:buNone/>
-            </a:pPr>
-            <a:r>
-              <a:rPr lang="en-US" sz="1200" dirty="0">
-                <a:solidFill>
-                  <a:srgbClr val="212121"/>
-                </a:solidFill>
-                <a:latin typeface="Arial" pitchFamily="34" charset="0"/>
-                <a:ea typeface="Arial" pitchFamily="34" charset="-122"/>
-                <a:cs typeface="Arial" pitchFamily="34" charset="-120"/>
-              </a:rPr>
-              <a:t>• Roll-up (Day → Month)</a:t>
-            </a:r>
-            <a:endParaRPr lang="en-US" sz="1200" dirty="0"/>
-          </a:p>
-        </p:txBody>
-      </p:sp>
-      <p:sp>
-        <p:nvSpPr>
-          <p:cNvPr id="15" name="Text 13"/>
-          <p:cNvSpPr/>
-          <p:nvPr/>
-        </p:nvSpPr>
-        <p:spPr>
-          <a:xfrm>
-            <a:off x="879565" y="3904489"/>
-            <a:ext cx="6949440" cy="228600"/>
-          </a:xfrm>
-          <a:prstGeom prst="rect">
-            <a:avLst/>
-          </a:prstGeom>
-          <a:noFill/>
-          <a:ln/>
-        </p:spPr>
-        <p:txBody>
-          <a:bodyPr wrap="square" rtlCol="0" anchor="ctr"/>
-          <a:lstStyle/>
-          <a:p>
-            <a:pPr marL="0" indent="0">
-              <a:buNone/>
-            </a:pPr>
-            <a:r>
-              <a:rPr lang="en-US" sz="1200" dirty="0">
-                <a:solidFill>
-                  <a:srgbClr val="212121"/>
-                </a:solidFill>
-                <a:latin typeface="Arial" pitchFamily="34" charset="0"/>
-                <a:ea typeface="Arial" pitchFamily="34" charset="-122"/>
-                <a:cs typeface="Arial" pitchFamily="34" charset="-120"/>
-              </a:rPr>
-              <a:t>• Slicing (Q1 2024)</a:t>
-            </a:r>
-            <a:endParaRPr lang="en-US" sz="1200" dirty="0"/>
-          </a:p>
-        </p:txBody>
-      </p:sp>
-      <p:sp>
-        <p:nvSpPr>
-          <p:cNvPr id="16" name="Text 14"/>
-          <p:cNvSpPr/>
-          <p:nvPr/>
-        </p:nvSpPr>
-        <p:spPr>
-          <a:xfrm>
-            <a:off x="879565" y="4038383"/>
-            <a:ext cx="6949440" cy="228600"/>
-          </a:xfrm>
-          <a:prstGeom prst="rect">
-            <a:avLst/>
-          </a:prstGeom>
-          <a:noFill/>
-          <a:ln/>
-        </p:spPr>
-        <p:txBody>
-          <a:bodyPr wrap="square" rtlCol="0" anchor="ctr"/>
-          <a:lstStyle/>
-          <a:p>
-            <a:pPr marL="0" indent="0">
-              <a:buNone/>
-            </a:pPr>
-            <a:r>
-              <a:rPr lang="en-US" sz="1200" dirty="0">
-                <a:solidFill>
-                  <a:srgbClr val="212121"/>
-                </a:solidFill>
-                <a:latin typeface="Arial" pitchFamily="34" charset="0"/>
-                <a:ea typeface="Arial" pitchFamily="34" charset="-122"/>
-                <a:cs typeface="Arial" pitchFamily="34" charset="-120"/>
-              </a:rPr>
-              <a:t>• Dicing (Eng + Digital + March)</a:t>
-            </a:r>
-            <a:endParaRPr lang="en-US" sz="1200" dirty="0"/>
-          </a:p>
-        </p:txBody>
-      </p:sp>
-      <p:sp>
-        <p:nvSpPr>
-          <p:cNvPr id="17" name="Text 15"/>
-          <p:cNvSpPr/>
-          <p:nvPr/>
-        </p:nvSpPr>
-        <p:spPr>
-          <a:xfrm>
-            <a:off x="879565" y="4206568"/>
-            <a:ext cx="6949440" cy="228600"/>
-          </a:xfrm>
-          <a:prstGeom prst="rect">
-            <a:avLst/>
-          </a:prstGeom>
-          <a:noFill/>
-          <a:ln/>
-        </p:spPr>
-        <p:txBody>
-          <a:bodyPr wrap="square" rtlCol="0" anchor="ctr"/>
-          <a:lstStyle/>
-          <a:p>
-            <a:pPr marL="0" indent="0">
-              <a:buNone/>
-            </a:pPr>
-            <a:r>
-              <a:rPr lang="en-US" sz="1200" dirty="0">
-                <a:solidFill>
-                  <a:srgbClr val="212121"/>
-                </a:solidFill>
-                <a:latin typeface="Arial" pitchFamily="34" charset="0"/>
-                <a:ea typeface="Arial" pitchFamily="34" charset="-122"/>
-                <a:cs typeface="Arial" pitchFamily="34" charset="-120"/>
-              </a:rPr>
-              <a:t>• Pivot analysis</a:t>
-            </a:r>
-            <a:endParaRPr lang="en-US" sz="1200" dirty="0"/>
-          </a:p>
-        </p:txBody>
-      </p:sp>
-      <p:sp>
-        <p:nvSpPr>
-          <p:cNvPr id="18" name="Shape 16"/>
-          <p:cNvSpPr/>
-          <p:nvPr/>
-        </p:nvSpPr>
-        <p:spPr>
-          <a:xfrm>
-            <a:off x="463005" y="4474356"/>
-            <a:ext cx="7680960" cy="365760"/>
-          </a:xfrm>
-          <a:prstGeom prst="rect">
-            <a:avLst/>
-          </a:prstGeom>
-          <a:solidFill>
-            <a:srgbClr val="1C7293"/>
-          </a:solidFill>
-          <a:ln/>
-        </p:spPr>
-        <p:txBody>
-          <a:bodyPr/>
-          <a:lstStyle/>
-          <a:p>
-            <a:endParaRPr lang="en-US"/>
-          </a:p>
-        </p:txBody>
-      </p:sp>
-      <p:sp>
-        <p:nvSpPr>
-          <p:cNvPr id="19" name="Text 17"/>
-          <p:cNvSpPr/>
-          <p:nvPr/>
-        </p:nvSpPr>
-        <p:spPr>
-          <a:xfrm>
-            <a:off x="513805" y="4487419"/>
-            <a:ext cx="7680960" cy="365760"/>
-          </a:xfrm>
-          <a:prstGeom prst="rect">
-            <a:avLst/>
-          </a:prstGeom>
-          <a:noFill/>
-          <a:ln/>
-        </p:spPr>
-        <p:txBody>
-          <a:bodyPr wrap="square" rtlCol="0" anchor="ctr"/>
-          <a:lstStyle/>
-          <a:p>
-            <a:pPr marL="0" indent="0">
-              <a:buNone/>
-            </a:pPr>
-            <a:r>
-              <a:rPr lang="en-US" sz="1400" b="1" dirty="0">
-                <a:solidFill>
-                  <a:srgbClr val="FFFFFF"/>
-                </a:solidFill>
-                <a:latin typeface="Arial" pitchFamily="34" charset="0"/>
-                <a:ea typeface="Arial" pitchFamily="34" charset="-122"/>
-                <a:cs typeface="Arial" pitchFamily="34" charset="-120"/>
-              </a:rPr>
-              <a:t>Advanced Analytics (3 queries)</a:t>
-            </a:r>
-            <a:endParaRPr lang="en-US" sz="1400" dirty="0"/>
-          </a:p>
-        </p:txBody>
-      </p:sp>
-      <p:sp>
-        <p:nvSpPr>
-          <p:cNvPr id="20" name="Text 18"/>
-          <p:cNvSpPr/>
-          <p:nvPr/>
-        </p:nvSpPr>
-        <p:spPr>
-          <a:xfrm>
-            <a:off x="226422" y="4910980"/>
-            <a:ext cx="6949440" cy="228600"/>
-          </a:xfrm>
-          <a:prstGeom prst="rect">
-            <a:avLst/>
-          </a:prstGeom>
-          <a:noFill/>
-          <a:ln/>
-        </p:spPr>
-        <p:txBody>
-          <a:bodyPr wrap="square" rtlCol="0" anchor="ctr"/>
-          <a:lstStyle/>
-          <a:p>
-            <a:pPr marL="0" indent="0">
-              <a:buNone/>
-            </a:pPr>
-            <a:r>
-              <a:rPr lang="en-US" sz="1200" dirty="0">
-                <a:solidFill>
-                  <a:srgbClr val="212121"/>
-                </a:solidFill>
-                <a:latin typeface="Arial" pitchFamily="34" charset="0"/>
-                <a:ea typeface="Arial" pitchFamily="34" charset="-122"/>
-                <a:cs typeface="Arial" pitchFamily="34" charset="-120"/>
-              </a:rPr>
-              <a:t>• Correlation analysis</a:t>
-            </a:r>
-            <a:endParaRPr lang="en-US" sz="1200" dirty="0"/>
-          </a:p>
-        </p:txBody>
-      </p:sp>
-      <p:sp>
-        <p:nvSpPr>
-          <p:cNvPr id="21" name="Text 19"/>
-          <p:cNvSpPr/>
-          <p:nvPr/>
-        </p:nvSpPr>
-        <p:spPr>
-          <a:xfrm>
-            <a:off x="2026194" y="4908696"/>
-            <a:ext cx="6949440" cy="228600"/>
-          </a:xfrm>
-          <a:prstGeom prst="rect">
-            <a:avLst/>
-          </a:prstGeom>
-          <a:noFill/>
-          <a:ln/>
-        </p:spPr>
-        <p:txBody>
-          <a:bodyPr wrap="square" rtlCol="0" anchor="ctr"/>
-          <a:lstStyle/>
-          <a:p>
-            <a:pPr marL="0" indent="0">
-              <a:buNone/>
-            </a:pPr>
-            <a:r>
-              <a:rPr lang="en-US" sz="1200" dirty="0">
-                <a:solidFill>
-                  <a:srgbClr val="212121"/>
-                </a:solidFill>
-                <a:latin typeface="Arial" pitchFamily="34" charset="0"/>
-                <a:ea typeface="Arial" pitchFamily="34" charset="-122"/>
-                <a:cs typeface="Arial" pitchFamily="34" charset="-120"/>
-              </a:rPr>
-              <a:t>• Trend forecasting</a:t>
-            </a:r>
-            <a:endParaRPr lang="en-US" sz="1200" dirty="0"/>
-          </a:p>
-        </p:txBody>
-      </p:sp>
-      <p:sp>
-        <p:nvSpPr>
-          <p:cNvPr id="22" name="Text 20"/>
-          <p:cNvSpPr/>
-          <p:nvPr/>
-        </p:nvSpPr>
-        <p:spPr>
-          <a:xfrm>
-            <a:off x="4152537" y="4905430"/>
-            <a:ext cx="6949440" cy="228600"/>
-          </a:xfrm>
-          <a:prstGeom prst="rect">
-            <a:avLst/>
-          </a:prstGeom>
-          <a:noFill/>
-          <a:ln/>
-        </p:spPr>
-        <p:txBody>
-          <a:bodyPr wrap="square" rtlCol="0" anchor="ctr"/>
-          <a:lstStyle/>
-          <a:p>
-            <a:pPr marL="0" indent="0">
-              <a:buNone/>
-            </a:pPr>
-            <a:r>
-              <a:rPr lang="en-US" sz="1200" dirty="0">
-                <a:solidFill>
-                  <a:srgbClr val="212121"/>
-                </a:solidFill>
-                <a:latin typeface="Arial" pitchFamily="34" charset="0"/>
-                <a:ea typeface="Arial" pitchFamily="34" charset="-122"/>
-                <a:cs typeface="Arial" pitchFamily="34" charset="-120"/>
-              </a:rPr>
-              <a:t>• Anomaly detection</a:t>
-            </a:r>
-            <a:endParaRPr lang="en-US" sz="1200" dirty="0"/>
-          </a:p>
-        </p:txBody>
-      </p:sp>
-    </p:spTree>
-  </p:cSld>
-  <p:clrMapOvr>
-    <a:masterClrMapping/>
-  </p:clrMapOvr>
-</p:sld>
-</file>
-
 <file path=ppt/theme/theme1.xml><?xml version="1.0" encoding="utf-8"?>
 <a:theme xmlns:a="http://schemas.openxmlformats.org/drawingml/2006/main" name="Office Theme">
   <a:themeElements>
@@ -16523,39 +19616,39 @@
         <a:sysClr val="window" lastClr="FFFFFF"/>
       </a:lt1>
       <a:dk2>
-        <a:srgbClr val="44546A"/>
+        <a:srgbClr val="0E2841"/>
       </a:dk2>
       <a:lt2>
-        <a:srgbClr val="E7E6E6"/>
+        <a:srgbClr val="E8E8E8"/>
       </a:lt2>
       <a:accent1>
-        <a:srgbClr val="4472C4"/>
+        <a:srgbClr val="156082"/>
       </a:accent1>
       <a:accent2>
-        <a:srgbClr val="ED7D31"/>
+        <a:srgbClr val="E97132"/>
       </a:accent2>
       <a:accent3>
-        <a:srgbClr val="A5A5A5"/>
+        <a:srgbClr val="196B24"/>
       </a:accent3>
       <a:accent4>
-        <a:srgbClr val="FFC000"/>
+        <a:srgbClr val="0F9ED5"/>
       </a:accent4>
       <a:accent5>
-        <a:srgbClr val="5B9BD5"/>
+        <a:srgbClr val="A02B93"/>
       </a:accent5>
       <a:accent6>
-        <a:srgbClr val="70AD47"/>
+        <a:srgbClr val="4EA72E"/>
       </a:accent6>
       <a:hlink>
-        <a:srgbClr val="0563C1"/>
+        <a:srgbClr val="467886"/>
       </a:hlink>
       <a:folHlink>
-        <a:srgbClr val="954F72"/>
+        <a:srgbClr val="96607D"/>
       </a:folHlink>
     </a:clrScheme>
     <a:fontScheme name="Office">
       <a:majorFont>
-        <a:latin typeface="Calibri Light" panose="020F0302020204030204"/>
+        <a:latin typeface="Aptos Display" panose="02110004020202020204"/>
         <a:ea typeface=""/>
         <a:cs typeface=""/>
         <a:font script="Jpan" typeface="游ゴシック Light"/>
@@ -16607,7 +19700,7 @@
         <a:font script="Tfng" typeface="Ebrima"/>
       </a:majorFont>
       <a:minorFont>
-        <a:latin typeface="Calibri" panose="020F0502020204030204"/>
+        <a:latin typeface="Aptos" panose="02110004020202020204"/>
         <a:ea typeface=""/>
         <a:cs typeface=""/>
         <a:font script="Jpan" typeface="游ゴシック"/>
@@ -16718,13 +19811,6 @@
         </a:gradFill>
       </a:fillStyleLst>
       <a:lnStyleLst>
-        <a:ln w="6350" cap="flat" cmpd="sng" algn="ctr">
-          <a:solidFill>
-            <a:schemeClr val="phClr"/>
-          </a:solidFill>
-          <a:prstDash val="solid"/>
-          <a:miter lim="800000"/>
-        </a:ln>
         <a:ln w="12700" cap="flat" cmpd="sng" algn="ctr">
           <a:solidFill>
             <a:schemeClr val="phClr"/>
@@ -16733,6 +19819,13 @@
           <a:miter lim="800000"/>
         </a:ln>
         <a:ln w="19050" cap="flat" cmpd="sng" algn="ctr">
+          <a:solidFill>
+            <a:schemeClr val="phClr"/>
+          </a:solidFill>
+          <a:prstDash val="solid"/>
+          <a:miter lim="800000"/>
+        </a:ln>
+        <a:ln w="25400" cap="flat" cmpd="sng" algn="ctr">
           <a:solidFill>
             <a:schemeClr val="phClr"/>
           </a:solidFill>
@@ -16797,11 +19890,31 @@
       </a:bgFillStyleLst>
     </a:fmtScheme>
   </a:themeElements>
-  <a:objectDefaults/>
+  <a:objectDefaults>
+    <a:lnDef>
+      <a:spPr/>
+      <a:bodyPr/>
+      <a:lstStyle/>
+      <a:style>
+        <a:lnRef idx="2">
+          <a:schemeClr val="accent1"/>
+        </a:lnRef>
+        <a:fillRef idx="0">
+          <a:schemeClr val="accent1"/>
+        </a:fillRef>
+        <a:effectRef idx="1">
+          <a:schemeClr val="accent1"/>
+        </a:effectRef>
+        <a:fontRef idx="minor">
+          <a:schemeClr val="tx1"/>
+        </a:fontRef>
+      </a:style>
+    </a:lnDef>
+  </a:objectDefaults>
   <a:extraClrSchemeLst/>
   <a:extLst>
     <a:ext uri="{05A4C25C-085E-4340-85A3-A5531E510DB2}">
-      <thm15:themeFamily xmlns:thm15="http://schemas.microsoft.com/office/thememl/2012/main" name="Office Theme" id="{62F939B6-93AF-4DB8-9C6B-D6C7DFDC589F}" vid="{4A3C46E8-61CC-4603-A589-7422A47A8E4A}"/>
+      <thm15:themeFamily xmlns:thm15="http://schemas.microsoft.com/office/thememl/2012/main" name="Office Theme" id="{2E142A2C-CD16-42D6-873A-C26D2A0506FA}" vid="{1BDDFF52-6CD6-40A5-AB3C-68EB2F1E4D0A}"/>
     </a:ext>
   </a:extLst>
 </a:theme>
